--- a/RBC_Aging_CD47_EatMe_Slide.pptx
+++ b/RBC_Aging_CD47_EatMe_Slide.pptx
@@ -107,7 +107,7 @@
   <p:extLst>
     <p:ext uri="{521415D9-36F7-43E2-AB2F-B90AF26B5E84}">
       <p14:sectionLst xmlns:p14="http://schemas.microsoft.com/office/powerpoint/2010/main">
-        <p14:section name="RBC Aging" id="{7bf46fe5-0a0b-52a7-313d-e4a54d0a03b5}">
+        <p14:section name="RBC Aging" id="{ef4a8fca-1951-96ec-e7f6-fb56cf526070}">
           <p14:sldIdLst>
             <p14:sldId id="256"/>
           </p14:sldIdLst>
@@ -516,7 +516,7 @@
           <a:p>
             <a:r>
               <a:rPr lang="en-US" dirty="0"/>
-              <a:t>Red blood cell aging. Left: a newly released RBC leaves the bone marrow with an intact membrane, abundant surface CD47 (the 'don't eat me' signal), and eat-me proteins confined to the inner membrane leaflet. Middle: in mid-circulation, the membrane is partially disrupted, CD47 is reduced, and some eat-me proteins have appeared on the outer surface, though most remain on the inner leaflet. Right: the senescent RBC has a degenerated membrane, minimal CD47, and predominantly outer-surface eat-me proteins, marking it for clearance by phagocytes. Every element is a native PowerPoint shape and can be recolored, moved, or animated.</a:t>
+              <a:t>Red blood cell aging. Left: a newly released RBC leaves the marrow cavity of a long bone with an intact membrane, abundant surface CD47 (the 'don't eat me' signal), and eat-me proteins confined to the inner membrane leaflet. Middle: in mid-circulation, the membrane is partially disrupted, CD47 is reduced, and some eat-me proteins have appeared on the outer surface, though most remain on the inner leaflet. Right: the senescent RBC has a degenerated membrane, minimal CD47, and predominantly outer-surface eat-me proteins, marking it for clearance. Far right: a macrophage in the red pulp of the spleen recognizes the exposed eat-me signals, extends pseudopods around the senescent RBC, and digests a previously engulfed RBC within a phagosome. Every element is a native PowerPoint shape and can be recolored, moved, or animated.</a:t>
             </a:r>
             <a:endParaRPr lang="en-US" dirty="0"/>
           </a:p>
@@ -2129,8 +2129,8 @@
         </p:nvSpPr>
         <p:spPr>
           <a:xfrm>
-            <a:off x="1463040" y="2331720"/>
-            <a:ext cx="10177272" cy="1463040"/>
+            <a:off x="1325880" y="2331720"/>
+            <a:ext cx="7589520" cy="1463040"/>
           </a:xfrm>
           <a:prstGeom prst="rightArrow">
             <a:avLst/>
@@ -2143,46 +2143,333 @@
       </p:sp>
       <p:sp>
         <p:nvSpPr>
-          <p:cNvPr id="4" name="Bone marrow"/>
-          <p:cNvSpPr/>
-          <p:nvPr/>
-        </p:nvSpPr>
-        <p:spPr>
-          <a:xfrm>
-            <a:off x="548640" y="1417320"/>
-            <a:ext cx="1737360" cy="3291840"/>
-          </a:xfrm>
-          <a:prstGeom prst="roundRect">
-            <a:avLst>
-              <a:gd name="adj" fmla="val 10526"/>
-            </a:avLst>
-          </a:prstGeom>
-          <a:solidFill>
-            <a:srgbClr val="E6E1DA"/>
-          </a:solidFill>
-          <a:ln/>
-        </p:spPr>
-      </p:sp>
-      <p:sp>
-        <p:nvSpPr>
-          <p:cNvPr id="5" name="Marrow precursor 1"/>
-          <p:cNvSpPr/>
-          <p:nvPr/>
-        </p:nvSpPr>
-        <p:spPr>
-          <a:xfrm>
-            <a:off x="868680" y="2331720"/>
-            <a:ext cx="292608" cy="292608"/>
-          </a:xfrm>
-          <a:prstGeom prst="ellipse">
-            <a:avLst/>
-          </a:prstGeom>
-          <a:solidFill>
-            <a:srgbClr val="D9B8B8"/>
-          </a:solidFill>
-          <a:ln w="6350">
+          <p:cNvPr id="4" name="Bone"/>
+          <p:cNvSpPr/>
+          <p:nvPr/>
+        </p:nvSpPr>
+        <p:spPr>
+          <a:xfrm>
+            <a:off x="622676" y="1508981"/>
+            <a:ext cx="985785" cy="3199958"/>
+          </a:xfrm>
+          <a:custGeom>
+            <a:avLst/>
+            <a:gdLst/>
+            <a:ahLst/>
+            <a:cxnLst/>
+            <a:rect l="l" t="t" r="r" b="b"/>
+            <a:pathLst>
+              <a:path w="985785" h="3199958">
+                <a:moveTo>
+                  <a:pt x="767039" y="542912"/>
+                </a:moveTo>
+                <a:lnTo>
+                  <a:pt x="809463" y="530654"/>
+                </a:lnTo>
+                <a:lnTo>
+                  <a:pt x="849370" y="511747"/>
+                </a:lnTo>
+                <a:lnTo>
+                  <a:pt x="885727" y="486682"/>
+                </a:lnTo>
+                <a:lnTo>
+                  <a:pt x="917590" y="456108"/>
+                </a:lnTo>
+                <a:lnTo>
+                  <a:pt x="944135" y="420817"/>
+                </a:lnTo>
+                <a:lnTo>
+                  <a:pt x="964674" y="381725"/>
+                </a:lnTo>
+                <a:lnTo>
+                  <a:pt x="978674" y="339843"/>
+                </a:lnTo>
+                <a:lnTo>
+                  <a:pt x="985772" y="296258"/>
+                </a:lnTo>
+                <a:lnTo>
+                  <a:pt x="985785" y="252099"/>
+                </a:lnTo>
+                <a:lnTo>
+                  <a:pt x="978712" y="208510"/>
+                </a:lnTo>
+                <a:lnTo>
+                  <a:pt x="964736" y="166620"/>
+                </a:lnTo>
+                <a:lnTo>
+                  <a:pt x="944221" y="127515"/>
+                </a:lnTo>
+                <a:lnTo>
+                  <a:pt x="917696" y="92210"/>
+                </a:lnTo>
+                <a:lnTo>
+                  <a:pt x="885850" y="61617"/>
+                </a:lnTo>
+                <a:lnTo>
+                  <a:pt x="849508" y="36531"/>
+                </a:lnTo>
+                <a:lnTo>
+                  <a:pt x="809612" y="17601"/>
+                </a:lnTo>
+                <a:lnTo>
+                  <a:pt x="767195" y="5318"/>
+                </a:lnTo>
+                <a:lnTo>
+                  <a:pt x="723357" y="0"/>
+                </a:lnTo>
+                <a:lnTo>
+                  <a:pt x="679234" y="1785"/>
+                </a:lnTo>
+                <a:lnTo>
+                  <a:pt x="635969" y="10627"/>
+                </a:lnTo>
+                <a:lnTo>
+                  <a:pt x="594683" y="26296"/>
+                </a:lnTo>
+                <a:lnTo>
+                  <a:pt x="556446" y="48387"/>
+                </a:lnTo>
+                <a:lnTo>
+                  <a:pt x="522249" y="76327"/>
+                </a:lnTo>
+                <a:lnTo>
+                  <a:pt x="492979" y="109392"/>
+                </a:lnTo>
+                <a:lnTo>
+                  <a:pt x="492806" y="109392"/>
+                </a:lnTo>
+                <a:lnTo>
+                  <a:pt x="463535" y="76327"/>
+                </a:lnTo>
+                <a:lnTo>
+                  <a:pt x="429339" y="48387"/>
+                </a:lnTo>
+                <a:lnTo>
+                  <a:pt x="391102" y="26296"/>
+                </a:lnTo>
+                <a:lnTo>
+                  <a:pt x="349816" y="10627"/>
+                </a:lnTo>
+                <a:lnTo>
+                  <a:pt x="306551" y="1785"/>
+                </a:lnTo>
+                <a:lnTo>
+                  <a:pt x="262427" y="0"/>
+                </a:lnTo>
+                <a:lnTo>
+                  <a:pt x="218589" y="5318"/>
+                </a:lnTo>
+                <a:lnTo>
+                  <a:pt x="176173" y="17601"/>
+                </a:lnTo>
+                <a:lnTo>
+                  <a:pt x="136276" y="36531"/>
+                </a:lnTo>
+                <a:lnTo>
+                  <a:pt x="99934" y="61617"/>
+                </a:lnTo>
+                <a:lnTo>
+                  <a:pt x="68089" y="92210"/>
+                </a:lnTo>
+                <a:lnTo>
+                  <a:pt x="41564" y="127515"/>
+                </a:lnTo>
+                <a:lnTo>
+                  <a:pt x="21048" y="166620"/>
+                </a:lnTo>
+                <a:lnTo>
+                  <a:pt x="7073" y="208510"/>
+                </a:lnTo>
+                <a:lnTo>
+                  <a:pt x="0" y="252099"/>
+                </a:lnTo>
+                <a:lnTo>
+                  <a:pt x="13" y="296258"/>
+                </a:lnTo>
+                <a:lnTo>
+                  <a:pt x="7111" y="339843"/>
+                </a:lnTo>
+                <a:lnTo>
+                  <a:pt x="21111" y="381725"/>
+                </a:lnTo>
+                <a:lnTo>
+                  <a:pt x="41649" y="420817"/>
+                </a:lnTo>
+                <a:lnTo>
+                  <a:pt x="68194" y="456108"/>
+                </a:lnTo>
+                <a:lnTo>
+                  <a:pt x="100058" y="486682"/>
+                </a:lnTo>
+                <a:lnTo>
+                  <a:pt x="136415" y="511747"/>
+                </a:lnTo>
+                <a:lnTo>
+                  <a:pt x="176322" y="530654"/>
+                </a:lnTo>
+                <a:lnTo>
+                  <a:pt x="218746" y="542912"/>
+                </a:lnTo>
+                <a:lnTo>
+                  <a:pt x="218746" y="2657046"/>
+                </a:lnTo>
+                <a:lnTo>
+                  <a:pt x="176322" y="2669304"/>
+                </a:lnTo>
+                <a:lnTo>
+                  <a:pt x="136415" y="2688211"/>
+                </a:lnTo>
+                <a:lnTo>
+                  <a:pt x="100058" y="2713276"/>
+                </a:lnTo>
+                <a:lnTo>
+                  <a:pt x="68194" y="2743850"/>
+                </a:lnTo>
+                <a:lnTo>
+                  <a:pt x="41649" y="2779141"/>
+                </a:lnTo>
+                <a:lnTo>
+                  <a:pt x="21111" y="2818233"/>
+                </a:lnTo>
+                <a:lnTo>
+                  <a:pt x="7111" y="2860115"/>
+                </a:lnTo>
+                <a:lnTo>
+                  <a:pt x="13" y="2903700"/>
+                </a:lnTo>
+                <a:lnTo>
+                  <a:pt x="0" y="2947859"/>
+                </a:lnTo>
+                <a:lnTo>
+                  <a:pt x="7073" y="2991448"/>
+                </a:lnTo>
+                <a:lnTo>
+                  <a:pt x="21048" y="3033338"/>
+                </a:lnTo>
+                <a:lnTo>
+                  <a:pt x="41564" y="3072443"/>
+                </a:lnTo>
+                <a:lnTo>
+                  <a:pt x="68089" y="3107748"/>
+                </a:lnTo>
+                <a:lnTo>
+                  <a:pt x="99934" y="3138341"/>
+                </a:lnTo>
+                <a:lnTo>
+                  <a:pt x="136276" y="3163427"/>
+                </a:lnTo>
+                <a:lnTo>
+                  <a:pt x="176173" y="3182357"/>
+                </a:lnTo>
+                <a:lnTo>
+                  <a:pt x="218589" y="3194640"/>
+                </a:lnTo>
+                <a:lnTo>
+                  <a:pt x="262427" y="3199958"/>
+                </a:lnTo>
+                <a:lnTo>
+                  <a:pt x="306551" y="3198173"/>
+                </a:lnTo>
+                <a:lnTo>
+                  <a:pt x="349816" y="3189331"/>
+                </a:lnTo>
+                <a:lnTo>
+                  <a:pt x="391102" y="3173662"/>
+                </a:lnTo>
+                <a:lnTo>
+                  <a:pt x="429339" y="3151571"/>
+                </a:lnTo>
+                <a:lnTo>
+                  <a:pt x="463535" y="3123631"/>
+                </a:lnTo>
+                <a:lnTo>
+                  <a:pt x="492806" y="3090566"/>
+                </a:lnTo>
+                <a:lnTo>
+                  <a:pt x="492979" y="3090566"/>
+                </a:lnTo>
+                <a:lnTo>
+                  <a:pt x="522249" y="3123631"/>
+                </a:lnTo>
+                <a:lnTo>
+                  <a:pt x="556446" y="3151571"/>
+                </a:lnTo>
+                <a:lnTo>
+                  <a:pt x="594683" y="3173662"/>
+                </a:lnTo>
+                <a:lnTo>
+                  <a:pt x="635969" y="3189331"/>
+                </a:lnTo>
+                <a:lnTo>
+                  <a:pt x="679234" y="3198173"/>
+                </a:lnTo>
+                <a:lnTo>
+                  <a:pt x="723357" y="3199958"/>
+                </a:lnTo>
+                <a:lnTo>
+                  <a:pt x="767195" y="3194640"/>
+                </a:lnTo>
+                <a:lnTo>
+                  <a:pt x="809612" y="3182357"/>
+                </a:lnTo>
+                <a:lnTo>
+                  <a:pt x="849508" y="3163427"/>
+                </a:lnTo>
+                <a:lnTo>
+                  <a:pt x="885850" y="3138341"/>
+                </a:lnTo>
+                <a:lnTo>
+                  <a:pt x="917696" y="3107748"/>
+                </a:lnTo>
+                <a:lnTo>
+                  <a:pt x="944221" y="3072443"/>
+                </a:lnTo>
+                <a:lnTo>
+                  <a:pt x="964736" y="3033338"/>
+                </a:lnTo>
+                <a:lnTo>
+                  <a:pt x="978712" y="2991448"/>
+                </a:lnTo>
+                <a:lnTo>
+                  <a:pt x="985785" y="2947859"/>
+                </a:lnTo>
+                <a:lnTo>
+                  <a:pt x="985772" y="2903700"/>
+                </a:lnTo>
+                <a:lnTo>
+                  <a:pt x="978674" y="2860115"/>
+                </a:lnTo>
+                <a:lnTo>
+                  <a:pt x="964674" y="2818233"/>
+                </a:lnTo>
+                <a:lnTo>
+                  <a:pt x="944135" y="2779141"/>
+                </a:lnTo>
+                <a:lnTo>
+                  <a:pt x="917590" y="2743850"/>
+                </a:lnTo>
+                <a:lnTo>
+                  <a:pt x="885727" y="2713276"/>
+                </a:lnTo>
+                <a:lnTo>
+                  <a:pt x="849370" y="2688211"/>
+                </a:lnTo>
+                <a:lnTo>
+                  <a:pt x="809463" y="2669304"/>
+                </a:lnTo>
+                <a:lnTo>
+                  <a:pt x="767039" y="2657046"/>
+                </a:lnTo>
+                <a:close/>
+              </a:path>
+            </a:pathLst>
+          </a:custGeom>
+          <a:solidFill>
+            <a:srgbClr val="F1EADB"/>
+          </a:solidFill>
+          <a:ln w="15875">
             <a:solidFill>
-              <a:srgbClr val="A88AA8"/>
+              <a:srgbClr val="A8997A"/>
             </a:solidFill>
             <a:prstDash val="solid"/>
           </a:ln>
@@ -2190,24 +2477,26 @@
       </p:sp>
       <p:sp>
         <p:nvSpPr>
-          <p:cNvPr id="6" name="Marrow precursor 2"/>
-          <p:cNvSpPr/>
-          <p:nvPr/>
-        </p:nvSpPr>
-        <p:spPr>
-          <a:xfrm>
-            <a:off x="1371600" y="2011680"/>
-            <a:ext cx="237744" cy="237744"/>
-          </a:xfrm>
-          <a:prstGeom prst="ellipse">
-            <a:avLst/>
-          </a:prstGeom>
-          <a:solidFill>
-            <a:srgbClr val="C9A9C9"/>
-          </a:solidFill>
-          <a:ln w="6350">
+          <p:cNvPr id="5" name="Marrow cavity"/>
+          <p:cNvSpPr/>
+          <p:nvPr/>
+        </p:nvSpPr>
+        <p:spPr>
+          <a:xfrm>
+            <a:off x="941832" y="1874520"/>
+            <a:ext cx="347472" cy="2468880"/>
+          </a:xfrm>
+          <a:prstGeom prst="roundRect">
+            <a:avLst>
+              <a:gd name="adj" fmla="val 31579"/>
+            </a:avLst>
+          </a:prstGeom>
+          <a:solidFill>
+            <a:srgbClr val="E7A1A1"/>
+          </a:solidFill>
+          <a:ln w="9525">
             <a:solidFill>
-              <a:srgbClr val="A88AA8"/>
+              <a:srgbClr val="C97D7D"/>
             </a:solidFill>
             <a:prstDash val="solid"/>
           </a:ln>
@@ -2215,114 +2504,154 @@
       </p:sp>
       <p:sp>
         <p:nvSpPr>
-          <p:cNvPr id="7" name="Marrow precursor 3"/>
-          <p:cNvSpPr/>
-          <p:nvPr/>
-        </p:nvSpPr>
-        <p:spPr>
-          <a:xfrm>
-            <a:off x="960120" y="3611880"/>
-            <a:ext cx="256032" cy="256032"/>
+          <p:cNvPr id="6" name="Marrow precursor 1"/>
+          <p:cNvSpPr/>
+          <p:nvPr/>
+        </p:nvSpPr>
+        <p:spPr>
+          <a:xfrm>
+            <a:off x="987552" y="2057400"/>
+            <a:ext cx="118872" cy="118872"/>
           </a:xfrm>
           <a:prstGeom prst="ellipse">
             <a:avLst/>
           </a:prstGeom>
           <a:solidFill>
-            <a:srgbClr val="D9B8B8"/>
-          </a:solidFill>
-          <a:ln w="6350">
-            <a:solidFill>
-              <a:srgbClr val="A88AA8"/>
-            </a:solidFill>
-            <a:prstDash val="solid"/>
-          </a:ln>
-        </p:spPr>
-      </p:sp>
-      <p:sp>
-        <p:nvSpPr>
-          <p:cNvPr id="8" name="Marrow precursor 4"/>
-          <p:cNvSpPr/>
-          <p:nvPr/>
-        </p:nvSpPr>
-        <p:spPr>
-          <a:xfrm>
-            <a:off x="1508760" y="3977640"/>
-            <a:ext cx="274320" cy="274320"/>
+            <a:srgbClr val="C24A4A"/>
+          </a:solidFill>
+          <a:ln/>
+        </p:spPr>
+      </p:sp>
+      <p:sp>
+        <p:nvSpPr>
+          <p:cNvPr id="7" name="Marrow precursor 2"/>
+          <p:cNvSpPr/>
+          <p:nvPr/>
+        </p:nvSpPr>
+        <p:spPr>
+          <a:xfrm>
+            <a:off x="1115568" y="2377440"/>
+            <a:ext cx="100584" cy="100584"/>
           </a:xfrm>
           <a:prstGeom prst="ellipse">
             <a:avLst/>
           </a:prstGeom>
           <a:solidFill>
-            <a:srgbClr val="C9A9C9"/>
-          </a:solidFill>
-          <a:ln w="6350">
-            <a:solidFill>
-              <a:srgbClr val="A88AA8"/>
-            </a:solidFill>
-            <a:prstDash val="solid"/>
-          </a:ln>
-        </p:spPr>
-      </p:sp>
-      <p:sp>
-        <p:nvSpPr>
-          <p:cNvPr id="9" name="Marrow precursor 5"/>
-          <p:cNvSpPr/>
-          <p:nvPr/>
-        </p:nvSpPr>
-        <p:spPr>
-          <a:xfrm>
-            <a:off x="822960" y="4297680"/>
-            <a:ext cx="182880" cy="182880"/>
+            <a:srgbClr val="B07AB0"/>
+          </a:solidFill>
+          <a:ln/>
+        </p:spPr>
+      </p:sp>
+      <p:sp>
+        <p:nvSpPr>
+          <p:cNvPr id="8" name="Marrow precursor 3"/>
+          <p:cNvSpPr/>
+          <p:nvPr/>
+        </p:nvSpPr>
+        <p:spPr>
+          <a:xfrm>
+            <a:off x="1005840" y="2743200"/>
+            <a:ext cx="109728" cy="109728"/>
           </a:xfrm>
           <a:prstGeom prst="ellipse">
             <a:avLst/>
           </a:prstGeom>
           <a:solidFill>
-            <a:srgbClr val="D9B8B8"/>
-          </a:solidFill>
-          <a:ln w="6350">
-            <a:solidFill>
-              <a:srgbClr val="A88AA8"/>
-            </a:solidFill>
-            <a:prstDash val="solid"/>
-          </a:ln>
-        </p:spPr>
-      </p:sp>
-      <p:sp>
-        <p:nvSpPr>
-          <p:cNvPr id="10" name="Marrow precursor 6"/>
-          <p:cNvSpPr/>
-          <p:nvPr/>
-        </p:nvSpPr>
-        <p:spPr>
-          <a:xfrm>
-            <a:off x="1417320" y="1691640"/>
-            <a:ext cx="164592" cy="164592"/>
+            <a:srgbClr val="C24A4A"/>
+          </a:solidFill>
+          <a:ln/>
+        </p:spPr>
+      </p:sp>
+      <p:sp>
+        <p:nvSpPr>
+          <p:cNvPr id="9" name="Marrow precursor 4"/>
+          <p:cNvSpPr/>
+          <p:nvPr/>
+        </p:nvSpPr>
+        <p:spPr>
+          <a:xfrm>
+            <a:off x="1133856" y="3108960"/>
+            <a:ext cx="118872" cy="118872"/>
           </a:xfrm>
           <a:prstGeom prst="ellipse">
             <a:avLst/>
           </a:prstGeom>
           <a:solidFill>
-            <a:srgbClr val="C9A9C9"/>
-          </a:solidFill>
-          <a:ln w="6350">
-            <a:solidFill>
-              <a:srgbClr val="A88AA8"/>
-            </a:solidFill>
-            <a:prstDash val="solid"/>
-          </a:ln>
-        </p:spPr>
-      </p:sp>
-      <p:sp>
-        <p:nvSpPr>
-          <p:cNvPr id="11" name="Text 9"/>
+            <a:srgbClr val="B07AB0"/>
+          </a:solidFill>
+          <a:ln/>
+        </p:spPr>
+      </p:sp>
+      <p:sp>
+        <p:nvSpPr>
+          <p:cNvPr id="10" name="Marrow precursor 5"/>
+          <p:cNvSpPr/>
+          <p:nvPr/>
+        </p:nvSpPr>
+        <p:spPr>
+          <a:xfrm>
+            <a:off x="987552" y="3474720"/>
+            <a:ext cx="100584" cy="100584"/>
+          </a:xfrm>
+          <a:prstGeom prst="ellipse">
+            <a:avLst/>
+          </a:prstGeom>
+          <a:solidFill>
+            <a:srgbClr val="C24A4A"/>
+          </a:solidFill>
+          <a:ln/>
+        </p:spPr>
+      </p:sp>
+      <p:sp>
+        <p:nvSpPr>
+          <p:cNvPr id="11" name="Marrow precursor 6"/>
+          <p:cNvSpPr/>
+          <p:nvPr/>
+        </p:nvSpPr>
+        <p:spPr>
+          <a:xfrm>
+            <a:off x="1124712" y="3794760"/>
+            <a:ext cx="109728" cy="109728"/>
+          </a:xfrm>
+          <a:prstGeom prst="ellipse">
+            <a:avLst/>
+          </a:prstGeom>
+          <a:solidFill>
+            <a:srgbClr val="B07AB0"/>
+          </a:solidFill>
+          <a:ln/>
+        </p:spPr>
+      </p:sp>
+      <p:sp>
+        <p:nvSpPr>
+          <p:cNvPr id="12" name="Marrow precursor 7"/>
+          <p:cNvSpPr/>
+          <p:nvPr/>
+        </p:nvSpPr>
+        <p:spPr>
+          <a:xfrm>
+            <a:off x="1005840" y="4069080"/>
+            <a:ext cx="91440" cy="91440"/>
+          </a:xfrm>
+          <a:prstGeom prst="ellipse">
+            <a:avLst/>
+          </a:prstGeom>
+          <a:solidFill>
+            <a:srgbClr val="C24A4A"/>
+          </a:solidFill>
+          <a:ln/>
+        </p:spPr>
+      </p:sp>
+      <p:sp>
+        <p:nvSpPr>
+          <p:cNvPr id="13" name="Text 11"/>
           <p:cNvSpPr txBox="1"/>
           <p:nvPr/>
         </p:nvSpPr>
         <p:spPr>
           <a:xfrm>
-            <a:off x="548640" y="2743200"/>
-            <a:ext cx="914400" cy="548640"/>
+            <a:off x="548640" y="4846320"/>
+            <a:ext cx="1143000" cy="274320"/>
           </a:xfrm>
           <a:prstGeom prst="rect">
             <a:avLst/>
@@ -2338,41 +2667,27 @@
               <a:buNone/>
             </a:pPr>
             <a:r>
-              <a:rPr lang="en-US" sz="1100" b="1" spc="100" kern="0" dirty="0">
+              <a:rPr lang="en-US" sz="1200" b="1" dirty="0">
                 <a:solidFill>
                   <a:schemeClr val="tx2"/>
                 </a:solidFill>
               </a:rPr>
-              <a:t>BONE</a:t>
+              <a:t>Bone marrow</a:t>
             </a:r>
-            <a:endParaRPr lang="en-US" sz="1100" dirty="0"/>
-          </a:p>
-          <a:p>
-            <a:pPr algn="ctr" indent="0" marL="0">
-              <a:buNone/>
-            </a:pPr>
-            <a:r>
-              <a:rPr lang="en-US" sz="1100" b="1" spc="100" kern="0" dirty="0">
-                <a:solidFill>
-                  <a:schemeClr val="tx2"/>
-                </a:solidFill>
-              </a:rPr>
-              <a:t>MARROW</a:t>
-            </a:r>
-            <a:endParaRPr lang="en-US" sz="1100" dirty="0"/>
+            <a:endParaRPr lang="en-US" sz="1200" dirty="0"/>
           </a:p>
         </p:txBody>
       </p:sp>
       <p:sp>
         <p:nvSpPr>
-          <p:cNvPr id="12" name="New RBC cytoplasm"/>
-          <p:cNvSpPr/>
-          <p:nvPr/>
-        </p:nvSpPr>
-        <p:spPr>
-          <a:xfrm>
-            <a:off x="2103120" y="2148840"/>
-            <a:ext cx="1828800" cy="1828800"/>
+          <p:cNvPr id="14" name="New RBC cytoplasm"/>
+          <p:cNvSpPr/>
+          <p:nvPr/>
+        </p:nvSpPr>
+        <p:spPr>
+          <a:xfrm>
+            <a:off x="1920240" y="2286000"/>
+            <a:ext cx="1554480" cy="1554480"/>
           </a:xfrm>
           <a:prstGeom prst="ellipse">
             <a:avLst/>
@@ -2385,14 +2700,14 @@
       </p:sp>
       <p:sp>
         <p:nvSpPr>
-          <p:cNvPr id="13" name="New RBC central pallor"/>
-          <p:cNvSpPr/>
-          <p:nvPr/>
-        </p:nvSpPr>
-        <p:spPr>
-          <a:xfrm>
-            <a:off x="2595067" y="2640787"/>
-            <a:ext cx="844906" cy="844906"/>
+          <p:cNvPr id="15" name="New RBC central pallor"/>
+          <p:cNvSpPr/>
+          <p:nvPr/>
+        </p:nvSpPr>
+        <p:spPr>
+          <a:xfrm>
+            <a:off x="2332634" y="2698394"/>
+            <a:ext cx="729691" cy="729691"/>
           </a:xfrm>
           <a:prstGeom prst="ellipse">
             <a:avLst/>
@@ -2405,20 +2720,20 @@
       </p:sp>
       <p:sp>
         <p:nvSpPr>
-          <p:cNvPr id="14" name="New RBC outer leaflet 1"/>
-          <p:cNvSpPr/>
-          <p:nvPr/>
-        </p:nvSpPr>
-        <p:spPr>
-          <a:xfrm>
-            <a:off x="2011680" y="2057400"/>
-            <a:ext cx="2011680" cy="2011680"/>
+          <p:cNvPr id="16" name="New RBC outer leaflet 1"/>
+          <p:cNvSpPr/>
+          <p:nvPr/>
+        </p:nvSpPr>
+        <p:spPr>
+          <a:xfrm>
+            <a:off x="1828800" y="2194560"/>
+            <a:ext cx="1737360" cy="1737360"/>
           </a:xfrm>
           <a:prstGeom prst="blockArc">
             <a:avLst>
               <a:gd name="adj1" fmla="val 0"/>
               <a:gd name="adj2" fmla="val 21594000"/>
-              <a:gd name="adj3" fmla="val 3409"/>
+              <a:gd name="adj3" fmla="val 3947"/>
             </a:avLst>
           </a:prstGeom>
           <a:solidFill>
@@ -2429,20 +2744,20 @@
       </p:sp>
       <p:sp>
         <p:nvSpPr>
-          <p:cNvPr id="15" name="New RBC inner leaflet 1"/>
-          <p:cNvSpPr/>
-          <p:nvPr/>
-        </p:nvSpPr>
-        <p:spPr>
-          <a:xfrm>
-            <a:off x="2080260" y="2125980"/>
-            <a:ext cx="1874520" cy="1874520"/>
+          <p:cNvPr id="17" name="New RBC inner leaflet 1"/>
+          <p:cNvSpPr/>
+          <p:nvPr/>
+        </p:nvSpPr>
+        <p:spPr>
+          <a:xfrm>
+            <a:off x="1897380" y="2263140"/>
+            <a:ext cx="1600200" cy="1600200"/>
           </a:xfrm>
           <a:prstGeom prst="blockArc">
             <a:avLst>
               <a:gd name="adj1" fmla="val 0"/>
               <a:gd name="adj2" fmla="val 21594000"/>
-              <a:gd name="adj3" fmla="val 3659"/>
+              <a:gd name="adj3" fmla="val 4286"/>
             </a:avLst>
           </a:prstGeom>
           <a:solidFill>
@@ -2453,13 +2768,13 @@
       </p:sp>
       <p:sp>
         <p:nvSpPr>
-          <p:cNvPr id="16" name="New RBC CD47 stalk"/>
+          <p:cNvPr id="18" name="New RBC CD47 stalk"/>
           <p:cNvSpPr/>
           <p:nvPr/>
         </p:nvSpPr>
         <p:spPr>
           <a:xfrm rot="11400000">
-            <a:off x="3186597" y="1918344"/>
+            <a:off x="2842739" y="2053421"/>
             <a:ext cx="36576" cy="164592"/>
           </a:xfrm>
           <a:prstGeom prst="rect">
@@ -2473,13 +2788,13 @@
       </p:sp>
       <p:sp>
         <p:nvSpPr>
-          <p:cNvPr id="17" name="New RBC CD47"/>
-          <p:cNvSpPr/>
-          <p:nvPr/>
-        </p:nvSpPr>
-        <p:spPr>
-          <a:xfrm>
-            <a:off x="3158535" y="1805989"/>
+          <p:cNvPr id="19" name="New RBC CD47"/>
+          <p:cNvSpPr/>
+          <p:nvPr/>
+        </p:nvSpPr>
+        <p:spPr>
+          <a:xfrm>
+            <a:off x="2814677" y="1941065"/>
             <a:ext cx="137160" cy="137160"/>
           </a:xfrm>
           <a:prstGeom prst="ellipse">
@@ -2498,13 +2813,13 @@
       </p:sp>
       <p:sp>
         <p:nvSpPr>
-          <p:cNvPr id="18" name="New RBC CD47 stalk"/>
+          <p:cNvPr id="20" name="New RBC CD47 stalk"/>
           <p:cNvSpPr/>
           <p:nvPr/>
         </p:nvSpPr>
         <p:spPr>
           <a:xfrm rot="12942857">
-            <a:off x="3629087" y="2104869"/>
+            <a:off x="3228980" y="2216235"/>
             <a:ext cx="36576" cy="164592"/>
           </a:xfrm>
           <a:prstGeom prst="rect">
@@ -2518,13 +2833,13 @@
       </p:sp>
       <p:sp>
         <p:nvSpPr>
-          <p:cNvPr id="19" name="New RBC CD47"/>
-          <p:cNvSpPr/>
-          <p:nvPr/>
-        </p:nvSpPr>
-        <p:spPr>
-          <a:xfrm>
-            <a:off x="3653523" y="2014644"/>
+          <p:cNvPr id="21" name="New RBC CD47"/>
+          <p:cNvSpPr/>
+          <p:nvPr/>
+        </p:nvSpPr>
+        <p:spPr>
+          <a:xfrm>
+            <a:off x="3253417" y="2126010"/>
             <a:ext cx="137160" cy="137160"/>
           </a:xfrm>
           <a:prstGeom prst="ellipse">
@@ -2543,13 +2858,13 @@
       </p:sp>
       <p:sp>
         <p:nvSpPr>
-          <p:cNvPr id="20" name="New RBC CD47 stalk"/>
+          <p:cNvPr id="22" name="New RBC CD47 stalk"/>
           <p:cNvSpPr/>
           <p:nvPr/>
         </p:nvSpPr>
         <p:spPr>
           <a:xfrm rot="14485714">
-            <a:off x="3946826" y="2464912"/>
+            <a:off x="3506329" y="2530509"/>
             <a:ext cx="36576" cy="164592"/>
           </a:xfrm>
           <a:prstGeom prst="rect">
@@ -2563,13 +2878,13 @@
       </p:sp>
       <p:sp>
         <p:nvSpPr>
-          <p:cNvPr id="21" name="New RBC CD47"/>
-          <p:cNvSpPr/>
-          <p:nvPr/>
-        </p:nvSpPr>
-        <p:spPr>
-          <a:xfrm>
-            <a:off x="4008960" y="2417404"/>
+          <p:cNvPr id="23" name="New RBC CD47"/>
+          <p:cNvSpPr/>
+          <p:nvPr/>
+        </p:nvSpPr>
+        <p:spPr>
+          <a:xfrm>
+            <a:off x="3568464" y="2483001"/>
             <a:ext cx="137160" cy="137160"/>
           </a:xfrm>
           <a:prstGeom prst="ellipse">
@@ -2588,13 +2903,13 @@
       </p:sp>
       <p:sp>
         <p:nvSpPr>
-          <p:cNvPr id="22" name="New RBC CD47 stalk"/>
+          <p:cNvPr id="24" name="New RBC CD47 stalk"/>
           <p:cNvSpPr/>
           <p:nvPr/>
         </p:nvSpPr>
         <p:spPr>
           <a:xfrm rot="16028571">
-            <a:off x="4076883" y="2927161"/>
+            <a:off x="3619853" y="2933998"/>
             <a:ext cx="36576" cy="164592"/>
           </a:xfrm>
           <a:prstGeom prst="rect">
@@ -2608,13 +2923,13 @@
       </p:sp>
       <p:sp>
         <p:nvSpPr>
-          <p:cNvPr id="23" name="New RBC CD47"/>
-          <p:cNvSpPr/>
-          <p:nvPr/>
-        </p:nvSpPr>
-        <p:spPr>
-          <a:xfrm>
-            <a:off x="4154448" y="2934496"/>
+          <p:cNvPr id="25" name="New RBC CD47"/>
+          <p:cNvSpPr/>
+          <p:nvPr/>
+        </p:nvSpPr>
+        <p:spPr>
+          <a:xfrm>
+            <a:off x="3697418" y="2941332"/>
             <a:ext cx="137160" cy="137160"/>
           </a:xfrm>
           <a:prstGeom prst="ellipse">
@@ -2633,13 +2948,13 @@
       </p:sp>
       <p:sp>
         <p:nvSpPr>
-          <p:cNvPr id="24" name="New RBC CD47 stalk"/>
+          <p:cNvPr id="26" name="New RBC CD47 stalk"/>
           <p:cNvSpPr/>
           <p:nvPr/>
         </p:nvSpPr>
         <p:spPr>
           <a:xfrm rot="-4028571">
-            <a:off x="3993497" y="3400062"/>
+            <a:off x="3547068" y="3346784"/>
             <a:ext cx="36576" cy="164592"/>
           </a:xfrm>
           <a:prstGeom prst="rect">
@@ -2653,13 +2968,13 @@
       </p:sp>
       <p:sp>
         <p:nvSpPr>
-          <p:cNvPr id="25" name="New RBC CD47"/>
-          <p:cNvSpPr/>
-          <p:nvPr/>
-        </p:nvSpPr>
-        <p:spPr>
-          <a:xfrm>
-            <a:off x="4061169" y="3463504"/>
+          <p:cNvPr id="27" name="New RBC CD47"/>
+          <p:cNvSpPr/>
+          <p:nvPr/>
+        </p:nvSpPr>
+        <p:spPr>
+          <a:xfrm>
+            <a:off x="3614739" y="3410226"/>
             <a:ext cx="137160" cy="137160"/>
           </a:xfrm>
           <a:prstGeom prst="ellipse">
@@ -2678,13 +2993,13 @@
       </p:sp>
       <p:sp>
         <p:nvSpPr>
-          <p:cNvPr id="26" name="New RBC CD47 stalk"/>
+          <p:cNvPr id="28" name="New RBC CD47 stalk"/>
           <p:cNvSpPr/>
           <p:nvPr/>
         </p:nvSpPr>
         <p:spPr>
           <a:xfrm rot="-2485714">
-            <a:off x="3713186" y="3789952"/>
+            <a:off x="3302389" y="3687112"/>
             <a:ext cx="36576" cy="164592"/>
           </a:xfrm>
           <a:prstGeom prst="rect">
@@ -2698,13 +3013,13 @@
       </p:sp>
       <p:sp>
         <p:nvSpPr>
-          <p:cNvPr id="27" name="New RBC CD47"/>
-          <p:cNvSpPr/>
-          <p:nvPr/>
-        </p:nvSpPr>
-        <p:spPr>
-          <a:xfrm>
-            <a:off x="3747600" y="3899652"/>
+          <p:cNvPr id="29" name="New RBC CD47"/>
+          <p:cNvSpPr/>
+          <p:nvPr/>
+        </p:nvSpPr>
+        <p:spPr>
+          <a:xfrm>
+            <a:off x="3336803" y="3796812"/>
             <a:ext cx="137160" cy="137160"/>
           </a:xfrm>
           <a:prstGeom prst="ellipse">
@@ -2723,13 +3038,13 @@
       </p:sp>
       <p:sp>
         <p:nvSpPr>
-          <p:cNvPr id="28" name="New RBC CD47 stalk"/>
+          <p:cNvPr id="30" name="New RBC CD47 stalk"/>
           <p:cNvSpPr/>
           <p:nvPr/>
         </p:nvSpPr>
         <p:spPr>
           <a:xfrm rot="-942857">
-            <a:off x="3291467" y="4019608"/>
+            <a:off x="2934278" y="3887574"/>
             <a:ext cx="36576" cy="164592"/>
           </a:xfrm>
           <a:prstGeom prst="rect">
@@ -2743,13 +3058,13 @@
       </p:sp>
       <p:sp>
         <p:nvSpPr>
-          <p:cNvPr id="29" name="New RBC CD47"/>
-          <p:cNvSpPr/>
-          <p:nvPr/>
-        </p:nvSpPr>
-        <p:spPr>
-          <a:xfrm>
-            <a:off x="3275847" y="4156555"/>
+          <p:cNvPr id="31" name="New RBC CD47"/>
+          <p:cNvSpPr/>
+          <p:nvPr/>
+        </p:nvSpPr>
+        <p:spPr>
+          <a:xfrm>
+            <a:off x="2918658" y="4024522"/>
             <a:ext cx="137160" cy="137160"/>
           </a:xfrm>
           <a:prstGeom prst="ellipse">
@@ -2768,13 +3083,13 @@
       </p:sp>
       <p:sp>
         <p:nvSpPr>
-          <p:cNvPr id="30" name="New RBC CD47 stalk"/>
+          <p:cNvPr id="32" name="New RBC CD47 stalk"/>
           <p:cNvSpPr/>
           <p:nvPr/>
         </p:nvSpPr>
         <p:spPr>
           <a:xfrm rot="600000">
-            <a:off x="2811867" y="4043544"/>
+            <a:off x="2515645" y="3908467"/>
             <a:ext cx="36576" cy="164592"/>
           </a:xfrm>
           <a:prstGeom prst="rect">
@@ -2788,13 +3103,13 @@
       </p:sp>
       <p:sp>
         <p:nvSpPr>
-          <p:cNvPr id="31" name="New RBC CD47"/>
-          <p:cNvSpPr/>
-          <p:nvPr/>
-        </p:nvSpPr>
-        <p:spPr>
-          <a:xfrm>
-            <a:off x="2739345" y="4183331"/>
+          <p:cNvPr id="33" name="New RBC CD47"/>
+          <p:cNvSpPr/>
+          <p:nvPr/>
+        </p:nvSpPr>
+        <p:spPr>
+          <a:xfrm>
+            <a:off x="2443123" y="4048255"/>
             <a:ext cx="137160" cy="137160"/>
           </a:xfrm>
           <a:prstGeom prst="ellipse">
@@ -2813,13 +3128,13 @@
       </p:sp>
       <p:sp>
         <p:nvSpPr>
-          <p:cNvPr id="32" name="New RBC CD47 stalk"/>
+          <p:cNvPr id="34" name="New RBC CD47 stalk"/>
           <p:cNvSpPr/>
           <p:nvPr/>
         </p:nvSpPr>
         <p:spPr>
           <a:xfrm rot="2142857">
-            <a:off x="2369377" y="3857019"/>
+            <a:off x="2129404" y="3745653"/>
             <a:ext cx="36576" cy="164592"/>
           </a:xfrm>
           <a:prstGeom prst="rect">
@@ -2833,13 +3148,13 @@
       </p:sp>
       <p:sp>
         <p:nvSpPr>
-          <p:cNvPr id="33" name="New RBC CD47"/>
-          <p:cNvSpPr/>
-          <p:nvPr/>
-        </p:nvSpPr>
-        <p:spPr>
-          <a:xfrm>
-            <a:off x="2244357" y="3974676"/>
+          <p:cNvPr id="35" name="New RBC CD47"/>
+          <p:cNvSpPr/>
+          <p:nvPr/>
+        </p:nvSpPr>
+        <p:spPr>
+          <a:xfrm>
+            <a:off x="2004383" y="3863310"/>
             <a:ext cx="137160" cy="137160"/>
           </a:xfrm>
           <a:prstGeom prst="ellipse">
@@ -2858,13 +3173,13 @@
       </p:sp>
       <p:sp>
         <p:nvSpPr>
-          <p:cNvPr id="34" name="New RBC CD47 stalk"/>
+          <p:cNvPr id="36" name="New RBC CD47 stalk"/>
           <p:cNvSpPr/>
           <p:nvPr/>
         </p:nvSpPr>
         <p:spPr>
           <a:xfrm rot="3685714">
-            <a:off x="2051638" y="3496976"/>
+            <a:off x="1852055" y="3431379"/>
             <a:ext cx="36576" cy="164592"/>
           </a:xfrm>
           <a:prstGeom prst="rect">
@@ -2878,13 +3193,13 @@
       </p:sp>
       <p:sp>
         <p:nvSpPr>
-          <p:cNvPr id="35" name="New RBC CD47"/>
-          <p:cNvSpPr/>
-          <p:nvPr/>
-        </p:nvSpPr>
-        <p:spPr>
-          <a:xfrm>
-            <a:off x="1888920" y="3571916"/>
+          <p:cNvPr id="37" name="New RBC CD47"/>
+          <p:cNvSpPr/>
+          <p:nvPr/>
+        </p:nvSpPr>
+        <p:spPr>
+          <a:xfrm>
+            <a:off x="1689336" y="3506319"/>
             <a:ext cx="137160" cy="137160"/>
           </a:xfrm>
           <a:prstGeom prst="ellipse">
@@ -2903,13 +3218,13 @@
       </p:sp>
       <p:sp>
         <p:nvSpPr>
-          <p:cNvPr id="36" name="New RBC CD47 stalk"/>
+          <p:cNvPr id="38" name="New RBC CD47 stalk"/>
           <p:cNvSpPr/>
           <p:nvPr/>
         </p:nvSpPr>
         <p:spPr>
           <a:xfrm rot="5228571">
-            <a:off x="1921581" y="3034727"/>
+            <a:off x="1738531" y="3027890"/>
             <a:ext cx="36576" cy="164592"/>
           </a:xfrm>
           <a:prstGeom prst="rect">
@@ -2923,13 +3238,13 @@
       </p:sp>
       <p:sp>
         <p:nvSpPr>
-          <p:cNvPr id="37" name="New RBC CD47"/>
-          <p:cNvSpPr/>
-          <p:nvPr/>
-        </p:nvSpPr>
-        <p:spPr>
-          <a:xfrm>
-            <a:off x="1743432" y="3054824"/>
+          <p:cNvPr id="39" name="New RBC CD47"/>
+          <p:cNvSpPr/>
+          <p:nvPr/>
+        </p:nvSpPr>
+        <p:spPr>
+          <a:xfrm>
+            <a:off x="1560382" y="3047988"/>
             <a:ext cx="137160" cy="137160"/>
           </a:xfrm>
           <a:prstGeom prst="ellipse">
@@ -2948,13 +3263,13 @@
       </p:sp>
       <p:sp>
         <p:nvSpPr>
-          <p:cNvPr id="38" name="New RBC CD47 stalk"/>
+          <p:cNvPr id="40" name="New RBC CD47 stalk"/>
           <p:cNvSpPr/>
           <p:nvPr/>
         </p:nvSpPr>
         <p:spPr>
           <a:xfrm rot="6771429">
-            <a:off x="2004967" y="2561826"/>
+            <a:off x="1811316" y="2615104"/>
             <a:ext cx="36576" cy="164592"/>
           </a:xfrm>
           <a:prstGeom prst="rect">
@@ -2968,13 +3283,13 @@
       </p:sp>
       <p:sp>
         <p:nvSpPr>
-          <p:cNvPr id="39" name="New RBC CD47"/>
-          <p:cNvSpPr/>
-          <p:nvPr/>
-        </p:nvSpPr>
-        <p:spPr>
-          <a:xfrm>
-            <a:off x="1836711" y="2525816"/>
+          <p:cNvPr id="41" name="New RBC CD47"/>
+          <p:cNvSpPr/>
+          <p:nvPr/>
+        </p:nvSpPr>
+        <p:spPr>
+          <a:xfrm>
+            <a:off x="1643061" y="2579094"/>
             <a:ext cx="137160" cy="137160"/>
           </a:xfrm>
           <a:prstGeom prst="ellipse">
@@ -2993,13 +3308,13 @@
       </p:sp>
       <p:sp>
         <p:nvSpPr>
-          <p:cNvPr id="40" name="New RBC CD47 stalk"/>
+          <p:cNvPr id="42" name="New RBC CD47 stalk"/>
           <p:cNvSpPr/>
           <p:nvPr/>
         </p:nvSpPr>
         <p:spPr>
           <a:xfrm rot="8314286">
-            <a:off x="2285278" y="2171936"/>
+            <a:off x="2055995" y="2274776"/>
             <a:ext cx="36576" cy="164592"/>
           </a:xfrm>
           <a:prstGeom prst="rect">
@@ -3013,13 +3328,13 @@
       </p:sp>
       <p:sp>
         <p:nvSpPr>
-          <p:cNvPr id="41" name="New RBC CD47"/>
-          <p:cNvSpPr/>
-          <p:nvPr/>
-        </p:nvSpPr>
-        <p:spPr>
-          <a:xfrm>
-            <a:off x="2150280" y="2089668"/>
+          <p:cNvPr id="43" name="New RBC CD47"/>
+          <p:cNvSpPr/>
+          <p:nvPr/>
+        </p:nvSpPr>
+        <p:spPr>
+          <a:xfrm>
+            <a:off x="1920997" y="2192508"/>
             <a:ext cx="137160" cy="137160"/>
           </a:xfrm>
           <a:prstGeom prst="ellipse">
@@ -3038,13 +3353,13 @@
       </p:sp>
       <p:sp>
         <p:nvSpPr>
-          <p:cNvPr id="42" name="New RBC CD47 stalk"/>
+          <p:cNvPr id="44" name="New RBC CD47 stalk"/>
           <p:cNvSpPr/>
           <p:nvPr/>
         </p:nvSpPr>
         <p:spPr>
           <a:xfrm rot="9857143">
-            <a:off x="2706997" y="1942280"/>
+            <a:off x="2424106" y="2074314"/>
             <a:ext cx="36576" cy="164592"/>
           </a:xfrm>
           <a:prstGeom prst="rect">
@@ -3058,13 +3373,13 @@
       </p:sp>
       <p:sp>
         <p:nvSpPr>
-          <p:cNvPr id="43" name="New RBC CD47"/>
-          <p:cNvSpPr/>
-          <p:nvPr/>
-        </p:nvSpPr>
-        <p:spPr>
-          <a:xfrm>
-            <a:off x="2622033" y="1832765"/>
+          <p:cNvPr id="45" name="New RBC CD47"/>
+          <p:cNvSpPr/>
+          <p:nvPr/>
+        </p:nvSpPr>
+        <p:spPr>
+          <a:xfrm>
+            <a:off x="2339142" y="1964798"/>
             <a:ext cx="137160" cy="137160"/>
           </a:xfrm>
           <a:prstGeom prst="ellipse">
@@ -3083,13 +3398,13 @@
       </p:sp>
       <p:sp>
         <p:nvSpPr>
-          <p:cNvPr id="44" name="New RBC eat-me (inner)"/>
+          <p:cNvPr id="46" name="New RBC eat-me (inner)"/>
           <p:cNvSpPr/>
           <p:nvPr/>
         </p:nvSpPr>
         <p:spPr>
           <a:xfrm rot="17400000">
-            <a:off x="3211883" y="2237964"/>
+            <a:off x="2844931" y="2366852"/>
             <a:ext cx="155448" cy="155448"/>
           </a:xfrm>
           <a:prstGeom prst="diamond">
@@ -3108,13 +3423,13 @@
       </p:sp>
       <p:sp>
         <p:nvSpPr>
-          <p:cNvPr id="45" name="New RBC eat-me (inner)"/>
+          <p:cNvPr id="47" name="New RBC eat-me (inner)"/>
           <p:cNvSpPr/>
           <p:nvPr/>
         </p:nvSpPr>
         <p:spPr>
           <a:xfrm rot="18942857">
-            <a:off x="3509288" y="2430049"/>
+            <a:off x="3091060" y="2525819"/>
             <a:ext cx="155448" cy="155448"/>
           </a:xfrm>
           <a:prstGeom prst="diamond">
@@ -3133,13 +3448,13 @@
       </p:sp>
       <p:sp>
         <p:nvSpPr>
-          <p:cNvPr id="46" name="New RBC eat-me (inner)"/>
+          <p:cNvPr id="48" name="New RBC eat-me (inner)"/>
           <p:cNvSpPr/>
           <p:nvPr/>
         </p:nvSpPr>
         <p:spPr>
           <a:xfrm rot="20485714">
-            <a:off x="3693899" y="2732151"/>
+            <a:off x="3243841" y="2775835"/>
             <a:ext cx="155448" cy="155448"/>
           </a:xfrm>
           <a:prstGeom prst="diamond">
@@ -3158,13 +3473,13 @@
       </p:sp>
       <p:sp>
         <p:nvSpPr>
-          <p:cNvPr id="47" name="New RBC eat-me (inner)"/>
+          <p:cNvPr id="49" name="New RBC eat-me (inner)"/>
           <p:cNvSpPr/>
           <p:nvPr/>
         </p:nvSpPr>
         <p:spPr>
           <a:xfrm rot="428571">
-            <a:off x="3729150" y="3084435"/>
+            <a:off x="3273015" y="3067380"/>
             <a:ext cx="155448" cy="155448"/>
           </a:xfrm>
           <a:prstGeom prst="diamond">
@@ -3183,13 +3498,13 @@
       </p:sp>
       <p:sp>
         <p:nvSpPr>
-          <p:cNvPr id="48" name="New RBC eat-me (inner)"/>
+          <p:cNvPr id="50" name="New RBC eat-me (inner)"/>
           <p:cNvSpPr/>
           <p:nvPr/>
         </p:nvSpPr>
         <p:spPr>
           <a:xfrm rot="1971429">
-            <a:off x="3608060" y="3417127"/>
+            <a:off x="3172802" y="3342711"/>
             <a:ext cx="155448" cy="155448"/>
           </a:xfrm>
           <a:prstGeom prst="diamond">
@@ -3208,13 +3523,13 @@
       </p:sp>
       <p:sp>
         <p:nvSpPr>
-          <p:cNvPr id="49" name="New RBC eat-me (inner)"/>
+          <p:cNvPr id="51" name="New RBC eat-me (inner)"/>
           <p:cNvSpPr/>
           <p:nvPr/>
         </p:nvSpPr>
         <p:spPr>
           <a:xfrm rot="3514286">
-            <a:off x="3354612" y="3664333"/>
+            <a:off x="2963052" y="3547295"/>
             <a:ext cx="155448" cy="155448"/>
           </a:xfrm>
           <a:prstGeom prst="diamond">
@@ -3233,13 +3548,13 @@
       </p:sp>
       <p:sp>
         <p:nvSpPr>
-          <p:cNvPr id="50" name="New RBC eat-me (inner)"/>
+          <p:cNvPr id="52" name="New RBC eat-me (inner)"/>
           <p:cNvSpPr/>
           <p:nvPr/>
         </p:nvSpPr>
         <p:spPr>
           <a:xfrm rot="5057143">
-            <a:off x="3019005" y="3777091"/>
+            <a:off x="2685308" y="3640612"/>
             <a:ext cx="155448" cy="155448"/>
           </a:xfrm>
           <a:prstGeom prst="diamond">
@@ -3258,13 +3573,13 @@
       </p:sp>
       <p:sp>
         <p:nvSpPr>
-          <p:cNvPr id="51" name="New RBC eat-me (inner)"/>
+          <p:cNvPr id="53" name="New RBC eat-me (inner)"/>
           <p:cNvSpPr/>
           <p:nvPr/>
         </p:nvSpPr>
         <p:spPr>
           <a:xfrm rot="6600000">
-            <a:off x="2667709" y="3733068"/>
+            <a:off x="2394581" y="3604180"/>
             <a:ext cx="155448" cy="155448"/>
           </a:xfrm>
           <a:prstGeom prst="diamond">
@@ -3283,13 +3598,13 @@
       </p:sp>
       <p:sp>
         <p:nvSpPr>
-          <p:cNvPr id="52" name="New RBC eat-me (inner)"/>
+          <p:cNvPr id="54" name="New RBC eat-me (inner)"/>
           <p:cNvSpPr/>
           <p:nvPr/>
         </p:nvSpPr>
         <p:spPr>
           <a:xfrm rot="8142857">
-            <a:off x="2370304" y="3540983"/>
+            <a:off x="2148452" y="3445213"/>
             <a:ext cx="155448" cy="155448"/>
           </a:xfrm>
           <a:prstGeom prst="diamond">
@@ -3308,13 +3623,13 @@
       </p:sp>
       <p:sp>
         <p:nvSpPr>
-          <p:cNvPr id="53" name="New RBC eat-me (inner)"/>
+          <p:cNvPr id="55" name="New RBC eat-me (inner)"/>
           <p:cNvSpPr/>
           <p:nvPr/>
         </p:nvSpPr>
         <p:spPr>
           <a:xfrm rot="9685714">
-            <a:off x="2185693" y="3238881"/>
+            <a:off x="1995671" y="3195197"/>
             <a:ext cx="155448" cy="155448"/>
           </a:xfrm>
           <a:prstGeom prst="diamond">
@@ -3333,13 +3648,13 @@
       </p:sp>
       <p:sp>
         <p:nvSpPr>
-          <p:cNvPr id="54" name="New RBC eat-me (inner)"/>
+          <p:cNvPr id="56" name="New RBC eat-me (inner)"/>
           <p:cNvSpPr/>
           <p:nvPr/>
         </p:nvSpPr>
         <p:spPr>
           <a:xfrm rot="11228571">
-            <a:off x="2150442" y="2886597"/>
+            <a:off x="1966497" y="2903652"/>
             <a:ext cx="155448" cy="155448"/>
           </a:xfrm>
           <a:prstGeom prst="diamond">
@@ -3358,13 +3673,13 @@
       </p:sp>
       <p:sp>
         <p:nvSpPr>
-          <p:cNvPr id="55" name="New RBC eat-me (inner)"/>
+          <p:cNvPr id="57" name="New RBC eat-me (inner)"/>
           <p:cNvSpPr/>
           <p:nvPr/>
         </p:nvSpPr>
         <p:spPr>
           <a:xfrm rot="12771429">
-            <a:off x="2271532" y="2553905"/>
+            <a:off x="2066710" y="2628321"/>
             <a:ext cx="155448" cy="155448"/>
           </a:xfrm>
           <a:prstGeom prst="diamond">
@@ -3383,13 +3698,13 @@
       </p:sp>
       <p:sp>
         <p:nvSpPr>
-          <p:cNvPr id="56" name="New RBC eat-me (inner)"/>
+          <p:cNvPr id="58" name="New RBC eat-me (inner)"/>
           <p:cNvSpPr/>
           <p:nvPr/>
         </p:nvSpPr>
         <p:spPr>
           <a:xfrm rot="14314286">
-            <a:off x="2524980" y="2306699"/>
+            <a:off x="2276460" y="2423737"/>
             <a:ext cx="155448" cy="155448"/>
           </a:xfrm>
           <a:prstGeom prst="diamond">
@@ -3408,13 +3723,13 @@
       </p:sp>
       <p:sp>
         <p:nvSpPr>
-          <p:cNvPr id="57" name="New RBC eat-me (inner)"/>
+          <p:cNvPr id="59" name="New RBC eat-me (inner)"/>
           <p:cNvSpPr/>
           <p:nvPr/>
         </p:nvSpPr>
         <p:spPr>
           <a:xfrm rot="15857143">
-            <a:off x="2860587" y="2193941"/>
+            <a:off x="2554204" y="2330420"/>
             <a:ext cx="155448" cy="155448"/>
           </a:xfrm>
           <a:prstGeom prst="diamond">
@@ -3433,14 +3748,14 @@
       </p:sp>
       <p:sp>
         <p:nvSpPr>
-          <p:cNvPr id="58" name="New RBC heading"/>
+          <p:cNvPr id="60" name="New RBC heading"/>
           <p:cNvSpPr txBox="1"/>
           <p:nvPr/>
         </p:nvSpPr>
         <p:spPr>
           <a:xfrm>
             <a:off x="1508760" y="1325880"/>
-            <a:ext cx="3017520" cy="566928"/>
+            <a:ext cx="2377440" cy="566928"/>
           </a:xfrm>
           <a:prstGeom prst="rect">
             <a:avLst/>
@@ -3456,7 +3771,7 @@
               <a:buNone/>
             </a:pPr>
             <a:r>
-              <a:rPr lang="en-US" sz="1700" b="1" dirty="0">
+              <a:rPr lang="en-US" sz="1600" b="1" dirty="0">
                 <a:solidFill>
                   <a:schemeClr val="tx1"/>
                 </a:solidFill>
@@ -3466,7 +3781,7 @@
               </a:rPr>
               <a:t>New RBC</a:t>
             </a:r>
-            <a:endParaRPr lang="en-US" sz="1700" dirty="0"/>
+            <a:endParaRPr lang="en-US" sz="1600" dirty="0"/>
           </a:p>
           <a:p>
             <a:pPr algn="ctr" indent="0" marL="0">
@@ -3478,22 +3793,22 @@
                   <a:schemeClr val="accent3"/>
                 </a:solidFill>
               </a:rPr>
-              <a:t>Day 0  |  leaving the marrow</a:t>
+              <a:t>Day 0  |  leaving marrow</a:t>
             </a:r>
-            <a:endParaRPr lang="en-US" sz="1700" dirty="0"/>
+            <a:endParaRPr lang="en-US" sz="1600" dirty="0"/>
           </a:p>
         </p:txBody>
       </p:sp>
       <p:sp>
         <p:nvSpPr>
-          <p:cNvPr id="59" name="New RBC summary"/>
+          <p:cNvPr id="61" name="New RBC summary"/>
           <p:cNvSpPr txBox="1"/>
           <p:nvPr/>
         </p:nvSpPr>
         <p:spPr>
           <a:xfrm>
-            <a:off x="1508760" y="4434840"/>
-            <a:ext cx="3017520" cy="914400"/>
+            <a:off x="1737360" y="4572000"/>
+            <a:ext cx="1920240" cy="914400"/>
           </a:xfrm>
           <a:prstGeom prst="rect">
             <a:avLst/>
@@ -3551,7 +3866,7 @@
                   <a:schemeClr val="tx2"/>
                 </a:solidFill>
               </a:rPr>
-              <a:t>Eat-me signals on inner leaflet only</a:t>
+              <a:t>Eat-me inside only</a:t>
             </a:r>
             <a:endParaRPr lang="en-US" sz="1400" dirty="0"/>
           </a:p>
@@ -3559,14 +3874,14 @@
       </p:sp>
       <p:sp>
         <p:nvSpPr>
-          <p:cNvPr id="60" name="Intermediate RBC cytoplasm"/>
-          <p:cNvSpPr/>
-          <p:nvPr/>
-        </p:nvSpPr>
-        <p:spPr>
-          <a:xfrm>
-            <a:off x="5532120" y="2194560"/>
-            <a:ext cx="1737360" cy="1737360"/>
+          <p:cNvPr id="62" name="Intermediate RBC cytoplasm"/>
+          <p:cNvSpPr/>
+          <p:nvPr/>
+        </p:nvSpPr>
+        <p:spPr>
+          <a:xfrm>
+            <a:off x="4297680" y="2331720"/>
+            <a:ext cx="1463040" cy="1463040"/>
           </a:xfrm>
           <a:prstGeom prst="ellipse">
             <a:avLst/>
@@ -3579,14 +3894,14 @@
       </p:sp>
       <p:sp>
         <p:nvSpPr>
-          <p:cNvPr id="61" name="Intermediate RBC central pallor"/>
-          <p:cNvSpPr/>
-          <p:nvPr/>
-        </p:nvSpPr>
-        <p:spPr>
-          <a:xfrm>
-            <a:off x="5997550" y="2659990"/>
-            <a:ext cx="806501" cy="806501"/>
+          <p:cNvPr id="63" name="Intermediate RBC central pallor"/>
+          <p:cNvSpPr/>
+          <p:nvPr/>
+        </p:nvSpPr>
+        <p:spPr>
+          <a:xfrm>
+            <a:off x="4683557" y="2717597"/>
+            <a:ext cx="691286" cy="691286"/>
           </a:xfrm>
           <a:prstGeom prst="ellipse">
             <a:avLst/>
@@ -3599,20 +3914,20 @@
       </p:sp>
       <p:sp>
         <p:nvSpPr>
-          <p:cNvPr id="62" name="Intermediate RBC outer leaflet 1"/>
-          <p:cNvSpPr/>
-          <p:nvPr/>
-        </p:nvSpPr>
-        <p:spPr>
-          <a:xfrm>
-            <a:off x="5440680" y="2103120"/>
-            <a:ext cx="1920240" cy="1920240"/>
+          <p:cNvPr id="64" name="Intermediate RBC outer leaflet 1"/>
+          <p:cNvSpPr/>
+          <p:nvPr/>
+        </p:nvSpPr>
+        <p:spPr>
+          <a:xfrm>
+            <a:off x="4206240" y="2240280"/>
+            <a:ext cx="1645920" cy="1645920"/>
           </a:xfrm>
           <a:prstGeom prst="blockArc">
             <a:avLst>
               <a:gd name="adj1" fmla="val 2520000"/>
               <a:gd name="adj2" fmla="val 9240000"/>
-              <a:gd name="adj3" fmla="val 3571"/>
+              <a:gd name="adj3" fmla="val 4167"/>
             </a:avLst>
           </a:prstGeom>
           <a:solidFill>
@@ -3623,20 +3938,20 @@
       </p:sp>
       <p:sp>
         <p:nvSpPr>
-          <p:cNvPr id="63" name="Intermediate RBC inner leaflet 1"/>
-          <p:cNvSpPr/>
-          <p:nvPr/>
-        </p:nvSpPr>
-        <p:spPr>
-          <a:xfrm>
-            <a:off x="5509260" y="2171700"/>
-            <a:ext cx="1783080" cy="1783080"/>
+          <p:cNvPr id="65" name="Intermediate RBC inner leaflet 1"/>
+          <p:cNvSpPr/>
+          <p:nvPr/>
+        </p:nvSpPr>
+        <p:spPr>
+          <a:xfrm>
+            <a:off x="4274820" y="2308860"/>
+            <a:ext cx="1508760" cy="1508760"/>
           </a:xfrm>
           <a:prstGeom prst="blockArc">
             <a:avLst>
               <a:gd name="adj1" fmla="val 2520000"/>
               <a:gd name="adj2" fmla="val 9240000"/>
-              <a:gd name="adj3" fmla="val 3846"/>
+              <a:gd name="adj3" fmla="val 4545"/>
             </a:avLst>
           </a:prstGeom>
           <a:solidFill>
@@ -3647,20 +3962,20 @@
       </p:sp>
       <p:sp>
         <p:nvSpPr>
-          <p:cNvPr id="64" name="Intermediate RBC outer leaflet 2"/>
-          <p:cNvSpPr/>
-          <p:nvPr/>
-        </p:nvSpPr>
-        <p:spPr>
-          <a:xfrm>
-            <a:off x="5440680" y="2103120"/>
-            <a:ext cx="1920240" cy="1920240"/>
+          <p:cNvPr id="66" name="Intermediate RBC outer leaflet 2"/>
+          <p:cNvSpPr/>
+          <p:nvPr/>
+        </p:nvSpPr>
+        <p:spPr>
+          <a:xfrm>
+            <a:off x="4206240" y="2240280"/>
+            <a:ext cx="1645920" cy="1645920"/>
           </a:xfrm>
           <a:prstGeom prst="blockArc">
             <a:avLst>
               <a:gd name="adj1" fmla="val 9960000"/>
               <a:gd name="adj2" fmla="val 16620000"/>
-              <a:gd name="adj3" fmla="val 3571"/>
+              <a:gd name="adj3" fmla="val 4167"/>
             </a:avLst>
           </a:prstGeom>
           <a:solidFill>
@@ -3671,20 +3986,20 @@
       </p:sp>
       <p:sp>
         <p:nvSpPr>
-          <p:cNvPr id="65" name="Intermediate RBC inner leaflet 2"/>
-          <p:cNvSpPr/>
-          <p:nvPr/>
-        </p:nvSpPr>
-        <p:spPr>
-          <a:xfrm>
-            <a:off x="5509260" y="2171700"/>
-            <a:ext cx="1783080" cy="1783080"/>
+          <p:cNvPr id="67" name="Intermediate RBC inner leaflet 2"/>
+          <p:cNvSpPr/>
+          <p:nvPr/>
+        </p:nvSpPr>
+        <p:spPr>
+          <a:xfrm>
+            <a:off x="4274820" y="2308860"/>
+            <a:ext cx="1508760" cy="1508760"/>
           </a:xfrm>
           <a:prstGeom prst="blockArc">
             <a:avLst>
               <a:gd name="adj1" fmla="val 9960000"/>
               <a:gd name="adj2" fmla="val 16620000"/>
-              <a:gd name="adj3" fmla="val 3846"/>
+              <a:gd name="adj3" fmla="val 4545"/>
             </a:avLst>
           </a:prstGeom>
           <a:solidFill>
@@ -3695,20 +4010,20 @@
       </p:sp>
       <p:sp>
         <p:nvSpPr>
-          <p:cNvPr id="66" name="Intermediate RBC outer leaflet 3"/>
-          <p:cNvSpPr/>
-          <p:nvPr/>
-        </p:nvSpPr>
-        <p:spPr>
-          <a:xfrm>
-            <a:off x="5440680" y="2103120"/>
-            <a:ext cx="1920240" cy="1920240"/>
+          <p:cNvPr id="68" name="Intermediate RBC outer leaflet 3"/>
+          <p:cNvSpPr/>
+          <p:nvPr/>
+        </p:nvSpPr>
+        <p:spPr>
+          <a:xfrm>
+            <a:off x="4206240" y="2240280"/>
+            <a:ext cx="1645920" cy="1645920"/>
           </a:xfrm>
           <a:prstGeom prst="blockArc">
             <a:avLst>
               <a:gd name="adj1" fmla="val 17580000"/>
               <a:gd name="adj2" fmla="val 1680000"/>
-              <a:gd name="adj3" fmla="val 3571"/>
+              <a:gd name="adj3" fmla="val 4167"/>
             </a:avLst>
           </a:prstGeom>
           <a:solidFill>
@@ -3719,20 +4034,20 @@
       </p:sp>
       <p:sp>
         <p:nvSpPr>
-          <p:cNvPr id="67" name="Intermediate RBC inner leaflet 3"/>
-          <p:cNvSpPr/>
-          <p:nvPr/>
-        </p:nvSpPr>
-        <p:spPr>
-          <a:xfrm>
-            <a:off x="5509260" y="2171700"/>
-            <a:ext cx="1783080" cy="1783080"/>
+          <p:cNvPr id="69" name="Intermediate RBC inner leaflet 3"/>
+          <p:cNvSpPr/>
+          <p:nvPr/>
+        </p:nvSpPr>
+        <p:spPr>
+          <a:xfrm>
+            <a:off x="4274820" y="2308860"/>
+            <a:ext cx="1508760" cy="1508760"/>
           </a:xfrm>
           <a:prstGeom prst="blockArc">
             <a:avLst>
               <a:gd name="adj1" fmla="val 17580000"/>
               <a:gd name="adj2" fmla="val 1680000"/>
-              <a:gd name="adj3" fmla="val 3846"/>
+              <a:gd name="adj3" fmla="val 4545"/>
             </a:avLst>
           </a:prstGeom>
           <a:solidFill>
@@ -3743,13 +4058,13 @@
       </p:sp>
       <p:sp>
         <p:nvSpPr>
-          <p:cNvPr id="68" name="Intermediate RBC eat-me (outer)"/>
+          <p:cNvPr id="70" name="Intermediate RBC eat-me (outer)"/>
           <p:cNvSpPr/>
           <p:nvPr/>
         </p:nvSpPr>
         <p:spPr>
           <a:xfrm rot="3495000">
-            <a:off x="6852363" y="3840834"/>
+            <a:off x="5408588" y="3724200"/>
             <a:ext cx="155448" cy="155448"/>
           </a:xfrm>
           <a:prstGeom prst="diamond">
@@ -3768,13 +4083,13 @@
       </p:sp>
       <p:sp>
         <p:nvSpPr>
-          <p:cNvPr id="69" name="Intermediate RBC CD47 stalk"/>
+          <p:cNvPr id="71" name="Intermediate RBC CD47 stalk"/>
           <p:cNvSpPr/>
           <p:nvPr/>
         </p:nvSpPr>
         <p:spPr>
           <a:xfrm rot="-435000">
-            <a:off x="6512910" y="4005955"/>
+            <a:off x="5124000" y="3869892"/>
             <a:ext cx="36576" cy="164592"/>
           </a:xfrm>
           <a:prstGeom prst="rect">
@@ -3788,13 +4103,13 @@
       </p:sp>
       <p:sp>
         <p:nvSpPr>
-          <p:cNvPr id="70" name="Intermediate RBC CD47"/>
-          <p:cNvSpPr/>
-          <p:nvPr/>
-        </p:nvSpPr>
-        <p:spPr>
-          <a:xfrm>
-            <a:off x="6478773" y="4146663"/>
+          <p:cNvPr id="72" name="Intermediate RBC CD47"/>
+          <p:cNvSpPr/>
+          <p:nvPr/>
+        </p:nvSpPr>
+        <p:spPr>
+          <a:xfrm>
+            <a:off x="5089864" y="4010600"/>
             <a:ext cx="137160" cy="137160"/>
           </a:xfrm>
           <a:prstGeom prst="ellipse">
@@ -3813,13 +4128,13 @@
       </p:sp>
       <p:sp>
         <p:nvSpPr>
-          <p:cNvPr id="71" name="Intermediate RBC eat-me (outer)"/>
+          <p:cNvPr id="73" name="Intermediate RBC eat-me (outer)"/>
           <p:cNvSpPr/>
           <p:nvPr/>
         </p:nvSpPr>
         <p:spPr>
           <a:xfrm rot="6435000">
-            <a:off x="6024803" y="3946113"/>
+            <a:off x="4693876" y="3815123"/>
             <a:ext cx="155448" cy="155448"/>
           </a:xfrm>
           <a:prstGeom prst="diamond">
@@ -3838,13 +4153,13 @@
       </p:sp>
       <p:sp>
         <p:nvSpPr>
-          <p:cNvPr id="72" name="Intermediate RBC CD47 stalk"/>
+          <p:cNvPr id="74" name="Intermediate RBC CD47 stalk"/>
           <p:cNvSpPr/>
           <p:nvPr/>
         </p:nvSpPr>
         <p:spPr>
           <a:xfrm rot="2505000">
-            <a:off x="5694475" y="3751824"/>
+            <a:off x="4414207" y="3649495"/>
             <a:ext cx="36576" cy="164592"/>
           </a:xfrm>
           <a:prstGeom prst="rect">
@@ -3858,13 +4173,13 @@
       </p:sp>
       <p:sp>
         <p:nvSpPr>
-          <p:cNvPr id="73" name="Intermediate RBC CD47"/>
-          <p:cNvSpPr/>
-          <p:nvPr/>
-        </p:nvSpPr>
-        <p:spPr>
-          <a:xfrm>
-            <a:off x="5558940" y="3861047"/>
+          <p:cNvPr id="75" name="Intermediate RBC CD47"/>
+          <p:cNvSpPr/>
+          <p:nvPr/>
+        </p:nvSpPr>
+        <p:spPr>
+          <a:xfrm>
+            <a:off x="4278672" y="3758718"/>
             <a:ext cx="137160" cy="137160"/>
           </a:xfrm>
           <a:prstGeom prst="ellipse">
@@ -3883,13 +4198,13 @@
       </p:sp>
       <p:sp>
         <p:nvSpPr>
-          <p:cNvPr id="74" name="Intermediate RBC eat-me (outer)"/>
+          <p:cNvPr id="76" name="Intermediate RBC eat-me (outer)"/>
           <p:cNvSpPr/>
           <p:nvPr/>
         </p:nvSpPr>
         <p:spPr>
           <a:xfrm rot="10575000">
-            <a:off x="5319390" y="3051301"/>
+            <a:off x="4084656" y="3042330"/>
             <a:ext cx="155448" cy="155448"/>
           </a:xfrm>
           <a:prstGeom prst="diamond">
@@ -3908,13 +4223,13 @@
       </p:sp>
       <p:sp>
         <p:nvSpPr>
-          <p:cNvPr id="75" name="Intermediate RBC CD47 stalk"/>
+          <p:cNvPr id="77" name="Intermediate RBC CD47 stalk"/>
           <p:cNvSpPr/>
           <p:nvPr/>
         </p:nvSpPr>
         <p:spPr>
           <a:xfrm rot="6645000">
-            <a:off x="5416263" y="2614865"/>
+            <a:off x="4172926" y="2663460"/>
             <a:ext cx="36576" cy="164592"/>
           </a:xfrm>
           <a:prstGeom prst="rect">
@@ -3928,13 +4243,13 @@
       </p:sp>
       <p:sp>
         <p:nvSpPr>
-          <p:cNvPr id="76" name="Intermediate RBC CD47"/>
-          <p:cNvSpPr/>
-          <p:nvPr/>
-        </p:nvSpPr>
-        <p:spPr>
-          <a:xfrm>
-            <a:off x="5246259" y="2583226"/>
+          <p:cNvPr id="78" name="Intermediate RBC CD47"/>
+          <p:cNvSpPr/>
+          <p:nvPr/>
+        </p:nvSpPr>
+        <p:spPr>
+          <a:xfrm>
+            <a:off x="4002922" y="2631821"/>
             <a:ext cx="137160" cy="137160"/>
           </a:xfrm>
           <a:prstGeom prst="ellipse">
@@ -3953,13 +4268,13 @@
       </p:sp>
       <p:sp>
         <p:nvSpPr>
-          <p:cNvPr id="77" name="Intermediate RBC CD47 stalk"/>
+          <p:cNvPr id="79" name="Intermediate RBC CD47 stalk"/>
           <p:cNvSpPr/>
           <p:nvPr/>
         </p:nvSpPr>
         <p:spPr>
           <a:xfrm rot="8115000">
-            <a:off x="5655073" y="2247129"/>
+            <a:off x="4380036" y="2344538"/>
             <a:ext cx="36576" cy="164592"/>
           </a:xfrm>
           <a:prstGeom prst="rect">
@@ -3973,13 +4288,13 @@
       </p:sp>
       <p:sp>
         <p:nvSpPr>
-          <p:cNvPr id="78" name="Intermediate RBC CD47"/>
-          <p:cNvSpPr/>
-          <p:nvPr/>
-        </p:nvSpPr>
-        <p:spPr>
-          <a:xfrm>
-            <a:off x="5514656" y="2169930"/>
+          <p:cNvPr id="80" name="Intermediate RBC CD47"/>
+          <p:cNvSpPr/>
+          <p:nvPr/>
+        </p:nvSpPr>
+        <p:spPr>
+          <a:xfrm>
+            <a:off x="4239619" y="2267339"/>
             <a:ext cx="137160" cy="137160"/>
           </a:xfrm>
           <a:prstGeom prst="ellipse">
@@ -3998,13 +4313,13 @@
       </p:sp>
       <p:sp>
         <p:nvSpPr>
-          <p:cNvPr id="79" name="Intermediate RBC eat-me (outer)"/>
+          <p:cNvPr id="81" name="Intermediate RBC eat-me (outer)"/>
           <p:cNvSpPr/>
           <p:nvPr/>
         </p:nvSpPr>
         <p:spPr>
           <a:xfrm rot="14985000">
-            <a:off x="5974938" y="2041846"/>
+            <a:off x="4650811" y="2170528"/>
             <a:ext cx="155448" cy="155448"/>
           </a:xfrm>
           <a:prstGeom prst="diamond">
@@ -4023,13 +4338,13 @@
       </p:sp>
       <p:sp>
         <p:nvSpPr>
-          <p:cNvPr id="80" name="Intermediate RBC CD47 stalk"/>
+          <p:cNvPr id="82" name="Intermediate RBC CD47 stalk"/>
           <p:cNvSpPr/>
           <p:nvPr/>
         </p:nvSpPr>
         <p:spPr>
           <a:xfrm rot="12495000">
-            <a:off x="6871580" y="2070744"/>
+            <a:off x="5435059" y="2191567"/>
             <a:ext cx="36576" cy="164592"/>
           </a:xfrm>
           <a:prstGeom prst="rect">
@@ -4043,13 +4358,13 @@
       </p:sp>
       <p:sp>
         <p:nvSpPr>
-          <p:cNvPr id="81" name="Intermediate RBC CD47"/>
-          <p:cNvSpPr/>
-          <p:nvPr/>
-        </p:nvSpPr>
-        <p:spPr>
-          <a:xfrm>
-            <a:off x="6881880" y="1971692"/>
+          <p:cNvPr id="83" name="Intermediate RBC CD47"/>
+          <p:cNvSpPr/>
+          <p:nvPr/>
+        </p:nvSpPr>
+        <p:spPr>
+          <a:xfrm>
+            <a:off x="5445360" y="2092515"/>
             <a:ext cx="137160" cy="137160"/>
           </a:xfrm>
           <a:prstGeom prst="ellipse">
@@ -4068,13 +4383,13 @@
       </p:sp>
       <p:sp>
         <p:nvSpPr>
-          <p:cNvPr id="82" name="Intermediate RBC eat-me (outer)"/>
+          <p:cNvPr id="84" name="Intermediate RBC eat-me (outer)"/>
           <p:cNvSpPr/>
           <p:nvPr/>
         </p:nvSpPr>
         <p:spPr>
           <a:xfrm rot="19365000">
-            <a:off x="7123727" y="2376687"/>
+            <a:off x="5642947" y="2459709"/>
             <a:ext cx="155448" cy="155448"/>
           </a:xfrm>
           <a:prstGeom prst="diamond">
@@ -4093,13 +4408,13 @@
       </p:sp>
       <p:sp>
         <p:nvSpPr>
-          <p:cNvPr id="83" name="Intermediate RBC CD47 stalk"/>
+          <p:cNvPr id="85" name="Intermediate RBC CD47 stalk"/>
           <p:cNvSpPr/>
           <p:nvPr/>
         </p:nvSpPr>
         <p:spPr>
           <a:xfrm rot="15435000">
-            <a:off x="7390306" y="2752904"/>
+            <a:off x="5884928" y="2783174"/>
             <a:ext cx="36576" cy="164592"/>
           </a:xfrm>
           <a:prstGeom prst="rect">
@@ -4113,13 +4428,13 @@
       </p:sp>
       <p:sp>
         <p:nvSpPr>
-          <p:cNvPr id="84" name="Intermediate RBC CD47"/>
-          <p:cNvSpPr/>
-          <p:nvPr/>
-        </p:nvSpPr>
-        <p:spPr>
-          <a:xfrm>
-            <a:off x="7464873" y="2738367"/>
+          <p:cNvPr id="86" name="Intermediate RBC CD47"/>
+          <p:cNvSpPr/>
+          <p:nvPr/>
+        </p:nvSpPr>
+        <p:spPr>
+          <a:xfrm>
+            <a:off x="5959495" y="2768638"/>
             <a:ext cx="137160" cy="137160"/>
           </a:xfrm>
           <a:prstGeom prst="ellipse">
@@ -4138,13 +4453,13 @@
       </p:sp>
       <p:sp>
         <p:nvSpPr>
-          <p:cNvPr id="85" name="Intermediate RBC CD47 stalk"/>
+          <p:cNvPr id="87" name="Intermediate RBC CD47 stalk"/>
           <p:cNvSpPr/>
           <p:nvPr/>
         </p:nvSpPr>
         <p:spPr>
           <a:xfrm rot="-4695000">
-            <a:off x="7394132" y="3191361"/>
+            <a:off x="5888246" y="3163430"/>
             <a:ext cx="36576" cy="164592"/>
           </a:xfrm>
           <a:prstGeom prst="rect">
@@ -4158,13 +4473,13 @@
       </p:sp>
       <p:sp>
         <p:nvSpPr>
-          <p:cNvPr id="86" name="Intermediate RBC CD47"/>
-          <p:cNvSpPr/>
-          <p:nvPr/>
-        </p:nvSpPr>
-        <p:spPr>
-          <a:xfrm>
-            <a:off x="7469174" y="3231147"/>
+          <p:cNvPr id="88" name="Intermediate RBC CD47"/>
+          <p:cNvSpPr/>
+          <p:nvPr/>
+        </p:nvSpPr>
+        <p:spPr>
+          <a:xfrm>
+            <a:off x="5963288" y="3203215"/>
             <a:ext cx="137160" cy="137160"/>
           </a:xfrm>
           <a:prstGeom prst="ellipse">
@@ -4183,13 +4498,13 @@
       </p:sp>
       <p:sp>
         <p:nvSpPr>
-          <p:cNvPr id="87" name="Intermediate RBC eat-me (inner)"/>
+          <p:cNvPr id="89" name="Intermediate RBC eat-me (inner)"/>
           <p:cNvSpPr/>
           <p:nvPr/>
         </p:nvSpPr>
         <p:spPr>
           <a:xfrm rot="3642000">
-            <a:off x="6690019" y="3639401"/>
+            <a:off x="5251295" y="3519787"/>
             <a:ext cx="155448" cy="155448"/>
           </a:xfrm>
           <a:prstGeom prst="diamond">
@@ -4208,13 +4523,13 @@
       </p:sp>
       <p:sp>
         <p:nvSpPr>
-          <p:cNvPr id="88" name="Intermediate RBC eat-me (inner)"/>
+          <p:cNvPr id="90" name="Intermediate RBC eat-me (inner)"/>
           <p:cNvSpPr/>
           <p:nvPr/>
         </p:nvSpPr>
         <p:spPr>
           <a:xfrm rot="5406000">
-            <a:off x="6321767" y="3735323"/>
+            <a:off x="4950407" y="3598163"/>
             <a:ext cx="155448" cy="155448"/>
           </a:xfrm>
           <a:prstGeom prst="diamond">
@@ -4233,13 +4548,13 @@
       </p:sp>
       <p:sp>
         <p:nvSpPr>
-          <p:cNvPr id="89" name="Intermediate RBC eat-me (inner)"/>
+          <p:cNvPr id="91" name="Intermediate RBC eat-me (inner)"/>
           <p:cNvSpPr/>
           <p:nvPr/>
         </p:nvSpPr>
         <p:spPr>
           <a:xfrm rot="7170000">
-            <a:off x="5953853" y="3638116"/>
+            <a:off x="4649794" y="3518738"/>
             <a:ext cx="155448" cy="155448"/>
           </a:xfrm>
           <a:prstGeom prst="diamond">
@@ -4258,13 +4573,13 @@
       </p:sp>
       <p:sp>
         <p:nvSpPr>
-          <p:cNvPr id="90" name="Intermediate RBC eat-me (inner)"/>
+          <p:cNvPr id="92" name="Intermediate RBC eat-me (inner)"/>
           <p:cNvSpPr/>
           <p:nvPr/>
         </p:nvSpPr>
         <p:spPr>
           <a:xfrm rot="8934000">
-            <a:off x="5681040" y="3372817"/>
+            <a:off x="4426886" y="3301969"/>
             <a:ext cx="155448" cy="155448"/>
           </a:xfrm>
           <a:prstGeom prst="diamond">
@@ -4283,13 +4598,13 @@
       </p:sp>
       <p:sp>
         <p:nvSpPr>
-          <p:cNvPr id="91" name="Intermediate RBC eat-me (inner)"/>
+          <p:cNvPr id="93" name="Intermediate RBC eat-me (inner)"/>
           <p:cNvSpPr/>
           <p:nvPr/>
         </p:nvSpPr>
         <p:spPr>
           <a:xfrm rot="11898000">
-            <a:off x="5611189" y="2750082"/>
+            <a:off x="4369812" y="2793149"/>
             <a:ext cx="155448" cy="155448"/>
           </a:xfrm>
           <a:prstGeom prst="diamond">
@@ -4308,13 +4623,13 @@
       </p:sp>
       <p:sp>
         <p:nvSpPr>
-          <p:cNvPr id="92" name="Intermediate RBC eat-me (inner)"/>
+          <p:cNvPr id="94" name="Intermediate RBC eat-me (inner)"/>
           <p:cNvSpPr/>
           <p:nvPr/>
         </p:nvSpPr>
         <p:spPr>
           <a:xfrm rot="13662000">
-            <a:off x="5818446" y="2430935"/>
+            <a:off x="4539156" y="2532382"/>
             <a:ext cx="155448" cy="155448"/>
           </a:xfrm>
           <a:prstGeom prst="diamond">
@@ -4333,13 +4648,13 @@
       </p:sp>
       <p:sp>
         <p:nvSpPr>
-          <p:cNvPr id="93" name="Intermediate RBC eat-me (inner)"/>
+          <p:cNvPr id="95" name="Intermediate RBC eat-me (inner)"/>
           <p:cNvSpPr/>
           <p:nvPr/>
         </p:nvSpPr>
         <p:spPr>
           <a:xfrm rot="15426000">
-            <a:off x="6155681" y="2254632"/>
+            <a:off x="4814702" y="2388331"/>
             <a:ext cx="155448" cy="155448"/>
           </a:xfrm>
           <a:prstGeom prst="diamond">
@@ -4358,13 +4673,13 @@
       </p:sp>
       <p:sp>
         <p:nvSpPr>
-          <p:cNvPr id="94" name="Intermediate RBC eat-me (inner)"/>
+          <p:cNvPr id="96" name="Intermediate RBC eat-me (inner)"/>
           <p:cNvSpPr/>
           <p:nvPr/>
         </p:nvSpPr>
         <p:spPr>
           <a:xfrm rot="18630000">
-            <a:off x="6810037" y="2415358"/>
+            <a:off x="5349359" y="2519655"/>
             <a:ext cx="155448" cy="155448"/>
           </a:xfrm>
           <a:prstGeom prst="diamond">
@@ -4383,13 +4698,13 @@
       </p:sp>
       <p:sp>
         <p:nvSpPr>
-          <p:cNvPr id="95" name="Intermediate RBC eat-me (inner)"/>
+          <p:cNvPr id="97" name="Intermediate RBC eat-me (inner)"/>
           <p:cNvSpPr/>
           <p:nvPr/>
         </p:nvSpPr>
         <p:spPr>
           <a:xfrm rot="20394000">
-            <a:off x="7027216" y="2727837"/>
+            <a:off x="5526810" y="2774974"/>
             <a:ext cx="155448" cy="155448"/>
           </a:xfrm>
           <a:prstGeom prst="diamond">
@@ -4408,13 +4723,13 @@
       </p:sp>
       <p:sp>
         <p:nvSpPr>
-          <p:cNvPr id="96" name="Intermediate RBC eat-me (inner)"/>
+          <p:cNvPr id="98" name="Intermediate RBC eat-me (inner)"/>
           <p:cNvSpPr/>
           <p:nvPr/>
         </p:nvSpPr>
         <p:spPr>
           <a:xfrm rot="558000">
-            <a:off x="7063028" y="3106688"/>
+            <a:off x="5556071" y="3084522"/>
             <a:ext cx="155448" cy="155448"/>
           </a:xfrm>
           <a:prstGeom prst="diamond">
@@ -4433,14 +4748,14 @@
       </p:sp>
       <p:sp>
         <p:nvSpPr>
-          <p:cNvPr id="97" name="Intermediate RBC heading"/>
+          <p:cNvPr id="99" name="Intermediate RBC heading"/>
           <p:cNvSpPr txBox="1"/>
           <p:nvPr/>
         </p:nvSpPr>
         <p:spPr>
           <a:xfrm>
-            <a:off x="4892040" y="1325880"/>
-            <a:ext cx="3017520" cy="566928"/>
+            <a:off x="3840480" y="1325880"/>
+            <a:ext cx="2377440" cy="566928"/>
           </a:xfrm>
           <a:prstGeom prst="rect">
             <a:avLst/>
@@ -4456,7 +4771,7 @@
               <a:buNone/>
             </a:pPr>
             <a:r>
-              <a:rPr lang="en-US" sz="1700" b="1" dirty="0">
+              <a:rPr lang="en-US" sz="1600" b="1" dirty="0">
                 <a:solidFill>
                   <a:schemeClr val="tx1"/>
                 </a:solidFill>
@@ -4464,9 +4779,9 @@
                 <a:ea typeface="Cambria" pitchFamily="34" charset="-122"/>
                 <a:cs typeface="Cambria" pitchFamily="34" charset="-120"/>
               </a:rPr>
-              <a:t>Intermediate-Age RBC</a:t>
+              <a:t>Intermediate RBC</a:t>
             </a:r>
-            <a:endParaRPr lang="en-US" sz="1700" dirty="0"/>
+            <a:endParaRPr lang="en-US" sz="1600" dirty="0"/>
           </a:p>
           <a:p>
             <a:pPr algn="ctr" indent="0" marL="0">
@@ -4480,20 +4795,20 @@
               </a:rPr>
               <a:t>Mid-circulation</a:t>
             </a:r>
-            <a:endParaRPr lang="en-US" sz="1700" dirty="0"/>
+            <a:endParaRPr lang="en-US" sz="1600" dirty="0"/>
           </a:p>
         </p:txBody>
       </p:sp>
       <p:sp>
         <p:nvSpPr>
-          <p:cNvPr id="98" name="Intermediate RBC summary"/>
+          <p:cNvPr id="100" name="Intermediate RBC summary"/>
           <p:cNvSpPr txBox="1"/>
           <p:nvPr/>
         </p:nvSpPr>
         <p:spPr>
           <a:xfrm>
-            <a:off x="4892040" y="4434840"/>
-            <a:ext cx="3017520" cy="914400"/>
+            <a:off x="4069080" y="4572000"/>
+            <a:ext cx="1920240" cy="914400"/>
           </a:xfrm>
           <a:prstGeom prst="rect">
             <a:avLst/>
@@ -4551,7 +4866,7 @@
                   <a:schemeClr val="tx2"/>
                 </a:solidFill>
               </a:rPr>
-              <a:t>Eat-me mostly inner, some outer</a:t>
+              <a:t>Eat-me mostly inside</a:t>
             </a:r>
             <a:endParaRPr lang="en-US" sz="1400" dirty="0"/>
           </a:p>
@@ -4559,14 +4874,14 @@
       </p:sp>
       <p:sp>
         <p:nvSpPr>
-          <p:cNvPr id="99" name="Senescent RBC cytoplasm"/>
-          <p:cNvSpPr/>
-          <p:nvPr/>
-        </p:nvSpPr>
-        <p:spPr>
-          <a:xfrm>
-            <a:off x="8979408" y="2258568"/>
-            <a:ext cx="1609344" cy="1609344"/>
+          <p:cNvPr id="101" name="Senescent RBC cytoplasm"/>
+          <p:cNvSpPr/>
+          <p:nvPr/>
+        </p:nvSpPr>
+        <p:spPr>
+          <a:xfrm>
+            <a:off x="6583680" y="2377440"/>
+            <a:ext cx="1371600" cy="1371600"/>
           </a:xfrm>
           <a:prstGeom prst="ellipse">
             <a:avLst/>
@@ -4579,14 +4894,14 @@
       </p:sp>
       <p:sp>
         <p:nvSpPr>
-          <p:cNvPr id="100" name="Senescent RBC central pallor"/>
-          <p:cNvSpPr/>
-          <p:nvPr/>
-        </p:nvSpPr>
-        <p:spPr>
-          <a:xfrm>
-            <a:off x="9407713" y="2686873"/>
-            <a:ext cx="752734" cy="752734"/>
+          <p:cNvPr id="102" name="Senescent RBC central pallor"/>
+          <p:cNvSpPr/>
+          <p:nvPr/>
+        </p:nvSpPr>
+        <p:spPr>
+          <a:xfrm>
+            <a:off x="6943039" y="2736799"/>
+            <a:ext cx="652882" cy="652882"/>
           </a:xfrm>
           <a:prstGeom prst="ellipse">
             <a:avLst/>
@@ -4599,20 +4914,20 @@
       </p:sp>
       <p:sp>
         <p:nvSpPr>
-          <p:cNvPr id="101" name="Senescent RBC outer leaflet 1"/>
-          <p:cNvSpPr/>
-          <p:nvPr/>
-        </p:nvSpPr>
-        <p:spPr>
-          <a:xfrm>
-            <a:off x="8887968" y="2167128"/>
-            <a:ext cx="1792224" cy="1792224"/>
+          <p:cNvPr id="103" name="Senescent RBC outer leaflet 1"/>
+          <p:cNvSpPr/>
+          <p:nvPr/>
+        </p:nvSpPr>
+        <p:spPr>
+          <a:xfrm>
+            <a:off x="6492240" y="2286000"/>
+            <a:ext cx="1554480" cy="1554480"/>
           </a:xfrm>
           <a:prstGeom prst="blockArc">
             <a:avLst>
               <a:gd name="adj1" fmla="val 1680000"/>
               <a:gd name="adj2" fmla="val 5040000"/>
-              <a:gd name="adj3" fmla="val 3827"/>
+              <a:gd name="adj3" fmla="val 4412"/>
             </a:avLst>
           </a:prstGeom>
           <a:solidFill>
@@ -4623,20 +4938,20 @@
       </p:sp>
       <p:sp>
         <p:nvSpPr>
-          <p:cNvPr id="102" name="Senescent RBC inner leaflet 1"/>
-          <p:cNvSpPr/>
-          <p:nvPr/>
-        </p:nvSpPr>
-        <p:spPr>
-          <a:xfrm>
-            <a:off x="8956548" y="2235708"/>
-            <a:ext cx="1655064" cy="1655064"/>
+          <p:cNvPr id="104" name="Senescent RBC inner leaflet 1"/>
+          <p:cNvSpPr/>
+          <p:nvPr/>
+        </p:nvSpPr>
+        <p:spPr>
+          <a:xfrm>
+            <a:off x="6560820" y="2354580"/>
+            <a:ext cx="1417320" cy="1417320"/>
           </a:xfrm>
           <a:prstGeom prst="blockArc">
             <a:avLst>
               <a:gd name="adj1" fmla="val 1680000"/>
               <a:gd name="adj2" fmla="val 5040000"/>
-              <a:gd name="adj3" fmla="val 4144"/>
+              <a:gd name="adj3" fmla="val 4839"/>
             </a:avLst>
           </a:prstGeom>
           <a:solidFill>
@@ -4647,20 +4962,20 @@
       </p:sp>
       <p:sp>
         <p:nvSpPr>
-          <p:cNvPr id="103" name="Senescent RBC outer leaflet 2"/>
-          <p:cNvSpPr/>
-          <p:nvPr/>
-        </p:nvSpPr>
-        <p:spPr>
-          <a:xfrm>
-            <a:off x="8887968" y="2167128"/>
-            <a:ext cx="1792224" cy="1792224"/>
+          <p:cNvPr id="105" name="Senescent RBC outer leaflet 2"/>
+          <p:cNvSpPr/>
+          <p:nvPr/>
+        </p:nvSpPr>
+        <p:spPr>
+          <a:xfrm>
+            <a:off x="6492240" y="2286000"/>
+            <a:ext cx="1554480" cy="1554480"/>
           </a:xfrm>
           <a:prstGeom prst="blockArc">
             <a:avLst>
               <a:gd name="adj1" fmla="val 6360000"/>
               <a:gd name="adj2" fmla="val 9360000"/>
-              <a:gd name="adj3" fmla="val 3827"/>
+              <a:gd name="adj3" fmla="val 4412"/>
             </a:avLst>
           </a:prstGeom>
           <a:solidFill>
@@ -4671,20 +4986,20 @@
       </p:sp>
       <p:sp>
         <p:nvSpPr>
-          <p:cNvPr id="104" name="Senescent RBC inner leaflet 2"/>
-          <p:cNvSpPr/>
-          <p:nvPr/>
-        </p:nvSpPr>
-        <p:spPr>
-          <a:xfrm>
-            <a:off x="8956548" y="2235708"/>
-            <a:ext cx="1655064" cy="1655064"/>
+          <p:cNvPr id="106" name="Senescent RBC inner leaflet 2"/>
+          <p:cNvSpPr/>
+          <p:nvPr/>
+        </p:nvSpPr>
+        <p:spPr>
+          <a:xfrm>
+            <a:off x="6560820" y="2354580"/>
+            <a:ext cx="1417320" cy="1417320"/>
           </a:xfrm>
           <a:prstGeom prst="blockArc">
             <a:avLst>
               <a:gd name="adj1" fmla="val 6360000"/>
               <a:gd name="adj2" fmla="val 9360000"/>
-              <a:gd name="adj3" fmla="val 4144"/>
+              <a:gd name="adj3" fmla="val 4839"/>
             </a:avLst>
           </a:prstGeom>
           <a:solidFill>
@@ -4695,20 +5010,20 @@
       </p:sp>
       <p:sp>
         <p:nvSpPr>
-          <p:cNvPr id="105" name="Senescent RBC outer leaflet 3"/>
-          <p:cNvSpPr/>
-          <p:nvPr/>
-        </p:nvSpPr>
-        <p:spPr>
-          <a:xfrm>
-            <a:off x="8887968" y="2167128"/>
-            <a:ext cx="1792224" cy="1792224"/>
+          <p:cNvPr id="107" name="Senescent RBC outer leaflet 3"/>
+          <p:cNvSpPr/>
+          <p:nvPr/>
+        </p:nvSpPr>
+        <p:spPr>
+          <a:xfrm>
+            <a:off x="6492240" y="2286000"/>
+            <a:ext cx="1554480" cy="1554480"/>
           </a:xfrm>
           <a:prstGeom prst="blockArc">
             <a:avLst>
               <a:gd name="adj1" fmla="val 11040000"/>
               <a:gd name="adj2" fmla="val 13800000"/>
-              <a:gd name="adj3" fmla="val 3827"/>
+              <a:gd name="adj3" fmla="val 4412"/>
             </a:avLst>
           </a:prstGeom>
           <a:solidFill>
@@ -4719,20 +5034,20 @@
       </p:sp>
       <p:sp>
         <p:nvSpPr>
-          <p:cNvPr id="106" name="Senescent RBC inner leaflet 3"/>
-          <p:cNvSpPr/>
-          <p:nvPr/>
-        </p:nvSpPr>
-        <p:spPr>
-          <a:xfrm>
-            <a:off x="8956548" y="2235708"/>
-            <a:ext cx="1655064" cy="1655064"/>
+          <p:cNvPr id="108" name="Senescent RBC inner leaflet 3"/>
+          <p:cNvSpPr/>
+          <p:nvPr/>
+        </p:nvSpPr>
+        <p:spPr>
+          <a:xfrm>
+            <a:off x="6560820" y="2354580"/>
+            <a:ext cx="1417320" cy="1417320"/>
           </a:xfrm>
           <a:prstGeom prst="blockArc">
             <a:avLst>
               <a:gd name="adj1" fmla="val 11040000"/>
               <a:gd name="adj2" fmla="val 13800000"/>
-              <a:gd name="adj3" fmla="val 4144"/>
+              <a:gd name="adj3" fmla="val 4839"/>
             </a:avLst>
           </a:prstGeom>
           <a:solidFill>
@@ -4743,20 +5058,20 @@
       </p:sp>
       <p:sp>
         <p:nvSpPr>
-          <p:cNvPr id="107" name="Senescent RBC outer leaflet 4"/>
-          <p:cNvSpPr/>
-          <p:nvPr/>
-        </p:nvSpPr>
-        <p:spPr>
-          <a:xfrm>
-            <a:off x="8887968" y="2167128"/>
-            <a:ext cx="1792224" cy="1792224"/>
+          <p:cNvPr id="109" name="Senescent RBC outer leaflet 4"/>
+          <p:cNvSpPr/>
+          <p:nvPr/>
+        </p:nvSpPr>
+        <p:spPr>
+          <a:xfrm>
+            <a:off x="6492240" y="2286000"/>
+            <a:ext cx="1554480" cy="1554480"/>
           </a:xfrm>
           <a:prstGeom prst="blockArc">
             <a:avLst>
               <a:gd name="adj1" fmla="val 15000000"/>
               <a:gd name="adj2" fmla="val 17880000"/>
-              <a:gd name="adj3" fmla="val 3827"/>
+              <a:gd name="adj3" fmla="val 4412"/>
             </a:avLst>
           </a:prstGeom>
           <a:solidFill>
@@ -4767,20 +5082,20 @@
       </p:sp>
       <p:sp>
         <p:nvSpPr>
-          <p:cNvPr id="108" name="Senescent RBC inner leaflet 4"/>
-          <p:cNvSpPr/>
-          <p:nvPr/>
-        </p:nvSpPr>
-        <p:spPr>
-          <a:xfrm>
-            <a:off x="8956548" y="2235708"/>
-            <a:ext cx="1655064" cy="1655064"/>
+          <p:cNvPr id="110" name="Senescent RBC inner leaflet 4"/>
+          <p:cNvSpPr/>
+          <p:nvPr/>
+        </p:nvSpPr>
+        <p:spPr>
+          <a:xfrm>
+            <a:off x="6560820" y="2354580"/>
+            <a:ext cx="1417320" cy="1417320"/>
           </a:xfrm>
           <a:prstGeom prst="blockArc">
             <a:avLst>
               <a:gd name="adj1" fmla="val 15000000"/>
               <a:gd name="adj2" fmla="val 17880000"/>
-              <a:gd name="adj3" fmla="val 4144"/>
+              <a:gd name="adj3" fmla="val 4839"/>
             </a:avLst>
           </a:prstGeom>
           <a:solidFill>
@@ -4791,20 +5106,20 @@
       </p:sp>
       <p:sp>
         <p:nvSpPr>
-          <p:cNvPr id="109" name="Senescent RBC outer leaflet 5"/>
-          <p:cNvSpPr/>
-          <p:nvPr/>
-        </p:nvSpPr>
-        <p:spPr>
-          <a:xfrm>
-            <a:off x="8887968" y="2167128"/>
-            <a:ext cx="1792224" cy="1792224"/>
+          <p:cNvPr id="111" name="Senescent RBC outer leaflet 5"/>
+          <p:cNvSpPr/>
+          <p:nvPr/>
+        </p:nvSpPr>
+        <p:spPr>
+          <a:xfrm>
+            <a:off x="6492240" y="2286000"/>
+            <a:ext cx="1554480" cy="1554480"/>
           </a:xfrm>
           <a:prstGeom prst="blockArc">
             <a:avLst>
               <a:gd name="adj1" fmla="val 19320000"/>
               <a:gd name="adj2" fmla="val 120000"/>
-              <a:gd name="adj3" fmla="val 3827"/>
+              <a:gd name="adj3" fmla="val 4412"/>
             </a:avLst>
           </a:prstGeom>
           <a:solidFill>
@@ -4815,20 +5130,20 @@
       </p:sp>
       <p:sp>
         <p:nvSpPr>
-          <p:cNvPr id="110" name="Senescent RBC inner leaflet 5"/>
-          <p:cNvSpPr/>
-          <p:nvPr/>
-        </p:nvSpPr>
-        <p:spPr>
-          <a:xfrm>
-            <a:off x="8956548" y="2235708"/>
-            <a:ext cx="1655064" cy="1655064"/>
+          <p:cNvPr id="112" name="Senescent RBC inner leaflet 5"/>
+          <p:cNvSpPr/>
+          <p:nvPr/>
+        </p:nvSpPr>
+        <p:spPr>
+          <a:xfrm>
+            <a:off x="6560820" y="2354580"/>
+            <a:ext cx="1417320" cy="1417320"/>
           </a:xfrm>
           <a:prstGeom prst="blockArc">
             <a:avLst>
               <a:gd name="adj1" fmla="val 19320000"/>
               <a:gd name="adj2" fmla="val 120000"/>
-              <a:gd name="adj3" fmla="val 4144"/>
+              <a:gd name="adj3" fmla="val 4839"/>
             </a:avLst>
           </a:prstGeom>
           <a:solidFill>
@@ -4839,13 +5154,13 @@
       </p:sp>
       <p:sp>
         <p:nvSpPr>
-          <p:cNvPr id="111" name="Senescent RBC eat-me (outer)"/>
+          <p:cNvPr id="113" name="Senescent RBC eat-me (outer)"/>
           <p:cNvSpPr/>
           <p:nvPr/>
         </p:nvSpPr>
         <p:spPr>
           <a:xfrm rot="2320000">
-            <a:off x="10441733" y="3573962"/>
+            <a:off x="7834318" y="3499692"/>
             <a:ext cx="155448" cy="155448"/>
           </a:xfrm>
           <a:prstGeom prst="diamond">
@@ -4864,13 +5179,13 @@
       </p:sp>
       <p:sp>
         <p:nvSpPr>
-          <p:cNvPr id="112" name="Senescent RBC eat-me (outer)"/>
+          <p:cNvPr id="114" name="Senescent RBC eat-me (outer)"/>
           <p:cNvSpPr/>
           <p:nvPr/>
         </p:nvSpPr>
         <p:spPr>
           <a:xfrm rot="3120000">
-            <a:off x="10286206" y="3727690"/>
+            <a:off x="7698421" y="3634017"/>
             <a:ext cx="155448" cy="155448"/>
           </a:xfrm>
           <a:prstGeom prst="diamond">
@@ -4889,13 +5204,13 @@
       </p:sp>
       <p:sp>
         <p:nvSpPr>
-          <p:cNvPr id="113" name="Senescent RBC eat-me (outer)"/>
+          <p:cNvPr id="115" name="Senescent RBC eat-me (outer)"/>
           <p:cNvSpPr/>
           <p:nvPr/>
         </p:nvSpPr>
         <p:spPr>
           <a:xfrm rot="3920000">
-            <a:off x="10099419" y="3841407"/>
+            <a:off x="7535209" y="3733382"/>
             <a:ext cx="155448" cy="155448"/>
           </a:xfrm>
           <a:prstGeom prst="diamond">
@@ -4914,13 +5229,13 @@
       </p:sp>
       <p:sp>
         <p:nvSpPr>
-          <p:cNvPr id="114" name="Senescent RBC eat-me (outer)"/>
+          <p:cNvPr id="116" name="Senescent RBC eat-me (outer)"/>
           <p:cNvSpPr/>
           <p:nvPr/>
         </p:nvSpPr>
         <p:spPr>
           <a:xfrm rot="4720000">
-            <a:off x="9891442" y="3908983"/>
+            <a:off x="7353481" y="3792429"/>
             <a:ext cx="155448" cy="155448"/>
           </a:xfrm>
           <a:prstGeom prst="diamond">
@@ -4939,13 +5254,13 @@
       </p:sp>
       <p:sp>
         <p:nvSpPr>
-          <p:cNvPr id="115" name="Senescent RBC eat-me (outer)"/>
+          <p:cNvPr id="117" name="Senescent RBC eat-me (outer)"/>
           <p:cNvSpPr/>
           <p:nvPr/>
         </p:nvSpPr>
         <p:spPr>
           <a:xfrm rot="7320000">
-            <a:off x="9207261" y="3784235"/>
+            <a:off x="6755654" y="3683426"/>
             <a:ext cx="155448" cy="155448"/>
           </a:xfrm>
           <a:prstGeom prst="diamond">
@@ -4964,13 +5279,13 @@
       </p:sp>
       <p:sp>
         <p:nvSpPr>
-          <p:cNvPr id="116" name="Senescent RBC eat-me (outer)"/>
+          <p:cNvPr id="118" name="Senescent RBC eat-me (outer)"/>
           <p:cNvSpPr/>
           <p:nvPr/>
         </p:nvSpPr>
         <p:spPr>
           <a:xfrm rot="8120000">
-            <a:off x="9036517" y="3647606"/>
+            <a:off x="6606460" y="3564041"/>
             <a:ext cx="155448" cy="155448"/>
           </a:xfrm>
           <a:prstGeom prst="diamond">
@@ -4989,13 +5304,13 @@
       </p:sp>
       <p:sp>
         <p:nvSpPr>
-          <p:cNvPr id="117" name="Senescent RBC eat-me (outer)"/>
+          <p:cNvPr id="119" name="Senescent RBC eat-me (outer)"/>
           <p:cNvSpPr/>
           <p:nvPr/>
         </p:nvSpPr>
         <p:spPr>
           <a:xfrm rot="8920000">
-            <a:off x="8901884" y="3475284"/>
+            <a:off x="6488819" y="3413468"/>
             <a:ext cx="155448" cy="155448"/>
           </a:xfrm>
           <a:prstGeom prst="diamond">
@@ -5014,13 +5329,13 @@
       </p:sp>
       <p:sp>
         <p:nvSpPr>
-          <p:cNvPr id="118" name="Senescent RBC CD47 stalk"/>
+          <p:cNvPr id="120" name="Senescent RBC CD47 stalk"/>
           <p:cNvSpPr/>
           <p:nvPr/>
         </p:nvSpPr>
         <p:spPr>
           <a:xfrm rot="6480000">
-            <a:off x="8843967" y="2681425"/>
+            <a:off x="6442421" y="2718158"/>
             <a:ext cx="36576" cy="164592"/>
           </a:xfrm>
           <a:prstGeom prst="rect">
@@ -5034,13 +5349,13 @@
       </p:sp>
       <p:sp>
         <p:nvSpPr>
-          <p:cNvPr id="119" name="Senescent RBC CD47"/>
-          <p:cNvSpPr/>
-          <p:nvPr/>
-        </p:nvSpPr>
-        <p:spPr>
-          <a:xfrm>
-            <a:off x="8671925" y="2655582"/>
+          <p:cNvPr id="121" name="Senescent RBC CD47"/>
+          <p:cNvSpPr/>
+          <p:nvPr/>
+        </p:nvSpPr>
+        <p:spPr>
+          <a:xfrm>
+            <a:off x="6270379" y="2692315"/>
             <a:ext cx="137160" cy="137160"/>
           </a:xfrm>
           <a:prstGeom prst="ellipse">
@@ -5059,13 +5374,13 @@
       </p:sp>
       <p:sp>
         <p:nvSpPr>
-          <p:cNvPr id="120" name="Senescent RBC eat-me (outer)"/>
+          <p:cNvPr id="122" name="Senescent RBC eat-me (outer)"/>
           <p:cNvSpPr/>
           <p:nvPr/>
         </p:nvSpPr>
         <p:spPr>
           <a:xfrm rot="12680000">
-            <a:off x="8901884" y="2495748"/>
+            <a:off x="6488819" y="2557564"/>
             <a:ext cx="155448" cy="155448"/>
           </a:xfrm>
           <a:prstGeom prst="diamond">
@@ -5084,13 +5399,13 @@
       </p:sp>
       <p:sp>
         <p:nvSpPr>
-          <p:cNvPr id="121" name="Senescent RBC eat-me (outer)"/>
+          <p:cNvPr id="123" name="Senescent RBC eat-me (outer)"/>
           <p:cNvSpPr/>
           <p:nvPr/>
         </p:nvSpPr>
         <p:spPr>
           <a:xfrm rot="13480000">
-            <a:off x="9036517" y="2323426"/>
+            <a:off x="6606460" y="2406991"/>
             <a:ext cx="155448" cy="155448"/>
           </a:xfrm>
           <a:prstGeom prst="diamond">
@@ -5109,13 +5424,13 @@
       </p:sp>
       <p:sp>
         <p:nvSpPr>
-          <p:cNvPr id="122" name="Senescent RBC eat-me (outer)"/>
+          <p:cNvPr id="124" name="Senescent RBC eat-me (outer)"/>
           <p:cNvSpPr/>
           <p:nvPr/>
         </p:nvSpPr>
         <p:spPr>
           <a:xfrm rot="15960000">
-            <a:off x="9640657" y="2045978"/>
+            <a:off x="7134349" y="2164561"/>
             <a:ext cx="155448" cy="155448"/>
           </a:xfrm>
           <a:prstGeom prst="diamond">
@@ -5134,13 +5449,13 @@
       </p:sp>
       <p:sp>
         <p:nvSpPr>
-          <p:cNvPr id="123" name="Senescent RBC eat-me (outer)"/>
+          <p:cNvPr id="125" name="Senescent RBC eat-me (outer)"/>
           <p:cNvSpPr/>
           <p:nvPr/>
         </p:nvSpPr>
         <p:spPr>
           <a:xfrm rot="16760000">
-            <a:off x="9859100" y="2056152"/>
+            <a:off x="7325222" y="2173451"/>
             <a:ext cx="155448" cy="155448"/>
           </a:xfrm>
           <a:prstGeom prst="diamond">
@@ -5159,13 +5474,13 @@
       </p:sp>
       <p:sp>
         <p:nvSpPr>
-          <p:cNvPr id="124" name="Senescent RBC eat-me (outer)"/>
+          <p:cNvPr id="126" name="Senescent RBC eat-me (outer)"/>
           <p:cNvSpPr/>
           <p:nvPr/>
         </p:nvSpPr>
         <p:spPr>
           <a:xfrm rot="17560000">
-            <a:off x="10069309" y="2116429"/>
+            <a:off x="7508899" y="2226119"/>
             <a:ext cx="155448" cy="155448"/>
           </a:xfrm>
           <a:prstGeom prst="diamond">
@@ -5184,13 +5499,13 @@
       </p:sp>
       <p:sp>
         <p:nvSpPr>
-          <p:cNvPr id="125" name="Senescent RBC eat-me (outer)"/>
+          <p:cNvPr id="127" name="Senescent RBC eat-me (outer)"/>
           <p:cNvSpPr/>
           <p:nvPr/>
         </p:nvSpPr>
         <p:spPr>
           <a:xfrm rot="20280000">
-            <a:off x="10579607" y="2632700"/>
+            <a:off x="7954791" y="2677230"/>
             <a:ext cx="155448" cy="155448"/>
           </a:xfrm>
           <a:prstGeom prst="diamond">
@@ -5209,13 +5524,13 @@
       </p:sp>
       <p:sp>
         <p:nvSpPr>
-          <p:cNvPr id="126" name="Senescent RBC CD47 stalk"/>
+          <p:cNvPr id="128" name="Senescent RBC CD47 stalk"/>
           <p:cNvSpPr/>
           <p:nvPr/>
         </p:nvSpPr>
         <p:spPr>
           <a:xfrm rot="15680000">
-            <a:off x="10723989" y="2834890"/>
+            <a:off x="8091874" y="2852802"/>
             <a:ext cx="36576" cy="164592"/>
           </a:xfrm>
           <a:prstGeom prst="rect">
@@ -5229,13 +5544,13 @@
       </p:sp>
       <p:sp>
         <p:nvSpPr>
-          <p:cNvPr id="127" name="Senescent RBC CD47"/>
-          <p:cNvSpPr/>
-          <p:nvPr/>
-        </p:nvSpPr>
-        <p:spPr>
-          <a:xfrm>
-            <a:off x="10800251" y="2829316"/>
+          <p:cNvPr id="129" name="Senescent RBC CD47"/>
+          <p:cNvSpPr/>
+          <p:nvPr/>
+        </p:nvSpPr>
+        <p:spPr>
+          <a:xfrm>
+            <a:off x="8168136" y="2847228"/>
             <a:ext cx="137160" cy="137160"/>
           </a:xfrm>
           <a:prstGeom prst="ellipse">
@@ -5254,13 +5569,13 @@
       </p:sp>
       <p:sp>
         <p:nvSpPr>
-          <p:cNvPr id="128" name="Senescent RBC eat-me (inner)"/>
+          <p:cNvPr id="130" name="Senescent RBC eat-me (inner)"/>
           <p:cNvSpPr/>
           <p:nvPr/>
         </p:nvSpPr>
         <p:spPr>
           <a:xfrm rot="3920000">
-            <a:off x="9992567" y="3608738"/>
+            <a:off x="7428357" y="3500712"/>
             <a:ext cx="155448" cy="155448"/>
           </a:xfrm>
           <a:prstGeom prst="diamond">
@@ -5279,13 +5594,13 @@
       </p:sp>
       <p:sp>
         <p:nvSpPr>
-          <p:cNvPr id="129" name="Senescent RBC eat-me (inner)"/>
+          <p:cNvPr id="131" name="Senescent RBC eat-me (inner)"/>
           <p:cNvSpPr/>
           <p:nvPr/>
         </p:nvSpPr>
         <p:spPr>
           <a:xfrm rot="11880000">
-            <a:off x="9054121" y="2773592"/>
+            <a:off x="6652575" y="2810326"/>
             <a:ext cx="155448" cy="155448"/>
           </a:xfrm>
           <a:prstGeom prst="diamond">
@@ -5304,13 +5619,13 @@
       </p:sp>
       <p:sp>
         <p:nvSpPr>
-          <p:cNvPr id="130" name="Senescent RBC eat-me (inner)"/>
+          <p:cNvPr id="132" name="Senescent RBC eat-me (inner)"/>
           <p:cNvSpPr/>
           <p:nvPr/>
         </p:nvSpPr>
         <p:spPr>
           <a:xfrm rot="17560000">
-            <a:off x="9970642" y="2352686"/>
+            <a:off x="7410233" y="2462376"/>
             <a:ext cx="155448" cy="155448"/>
           </a:xfrm>
           <a:prstGeom prst="diamond">
@@ -5329,14 +5644,14 @@
       </p:sp>
       <p:sp>
         <p:nvSpPr>
-          <p:cNvPr id="131" name="Senescent RBC heading"/>
+          <p:cNvPr id="133" name="Senescent RBC heading"/>
           <p:cNvSpPr txBox="1"/>
           <p:nvPr/>
         </p:nvSpPr>
         <p:spPr>
           <a:xfrm>
-            <a:off x="8275320" y="1325880"/>
-            <a:ext cx="3017520" cy="566928"/>
+            <a:off x="6080760" y="1325880"/>
+            <a:ext cx="2377440" cy="566928"/>
           </a:xfrm>
           <a:prstGeom prst="rect">
             <a:avLst/>
@@ -5352,7 +5667,7 @@
               <a:buNone/>
             </a:pPr>
             <a:r>
-              <a:rPr lang="en-US" sz="1700" b="1" dirty="0">
+              <a:rPr lang="en-US" sz="1600" b="1" dirty="0">
                 <a:solidFill>
                   <a:schemeClr val="tx1"/>
                 </a:solidFill>
@@ -5362,7 +5677,7 @@
               </a:rPr>
               <a:t>Senescent RBC</a:t>
             </a:r>
-            <a:endParaRPr lang="en-US" sz="1700" dirty="0"/>
+            <a:endParaRPr lang="en-US" sz="1600" dirty="0"/>
           </a:p>
           <a:p>
             <a:pPr algn="ctr" indent="0" marL="0">
@@ -5374,22 +5689,22 @@
                   <a:schemeClr val="accent3"/>
                 </a:solidFill>
               </a:rPr>
-              <a:t>~Day 120  |  end of lifespan</a:t>
+              <a:t>~Day 120</a:t>
             </a:r>
-            <a:endParaRPr lang="en-US" sz="1700" dirty="0"/>
+            <a:endParaRPr lang="en-US" sz="1600" dirty="0"/>
           </a:p>
         </p:txBody>
       </p:sp>
       <p:sp>
         <p:nvSpPr>
-          <p:cNvPr id="132" name="Senescent RBC summary"/>
+          <p:cNvPr id="134" name="Senescent RBC summary"/>
           <p:cNvSpPr txBox="1"/>
           <p:nvPr/>
         </p:nvSpPr>
         <p:spPr>
           <a:xfrm>
-            <a:off x="8275320" y="4434840"/>
-            <a:ext cx="3017520" cy="914400"/>
+            <a:off x="6309360" y="4572000"/>
+            <a:ext cx="1920240" cy="914400"/>
           </a:xfrm>
           <a:prstGeom prst="rect">
             <a:avLst/>
@@ -5447,7 +5762,7 @@
                   <a:schemeClr val="tx2"/>
                 </a:solidFill>
               </a:rPr>
-              <a:t>Eat-me predominantly outer</a:t>
+              <a:t>Eat-me mostly outside</a:t>
             </a:r>
             <a:endParaRPr lang="en-US" sz="1400" dirty="0"/>
           </a:p>
@@ -5455,14 +5770,863 @@
       </p:sp>
       <p:sp>
         <p:nvSpPr>
-          <p:cNvPr id="133" name="Shape 131"/>
-          <p:cNvSpPr/>
-          <p:nvPr/>
-        </p:nvSpPr>
-        <p:spPr>
-          <a:xfrm>
-            <a:off x="621792" y="5824728"/>
-            <a:ext cx="36576" cy="146304"/>
+          <p:cNvPr id="135" name="Spleen"/>
+          <p:cNvSpPr/>
+          <p:nvPr/>
+        </p:nvSpPr>
+        <p:spPr>
+          <a:xfrm>
+            <a:off x="8689674" y="1940357"/>
+            <a:ext cx="3029616" cy="2432304"/>
+          </a:xfrm>
+          <a:custGeom>
+            <a:avLst/>
+            <a:gdLst/>
+            <a:ahLst/>
+            <a:cxnLst/>
+            <a:rect l="l" t="t" r="r" b="b"/>
+            <a:pathLst>
+              <a:path w="3029616" h="2432304">
+                <a:moveTo>
+                  <a:pt x="3027447" y="1241755"/>
+                </a:moveTo>
+                <a:lnTo>
+                  <a:pt x="3029616" y="1312295"/>
+                </a:lnTo>
+                <a:lnTo>
+                  <a:pt x="3026384" y="1382940"/>
+                </a:lnTo>
+                <a:lnTo>
+                  <a:pt x="3017652" y="1453358"/>
+                </a:lnTo>
+                <a:lnTo>
+                  <a:pt x="3003368" y="1523202"/>
+                </a:lnTo>
+                <a:lnTo>
+                  <a:pt x="2983530" y="1592118"/>
+                </a:lnTo>
+                <a:lnTo>
+                  <a:pt x="2958189" y="1659749"/>
+                </a:lnTo>
+                <a:lnTo>
+                  <a:pt x="2927451" y="1725745"/>
+                </a:lnTo>
+                <a:lnTo>
+                  <a:pt x="2891473" y="1789768"/>
+                </a:lnTo>
+                <a:lnTo>
+                  <a:pt x="2850468" y="1851497"/>
+                </a:lnTo>
+                <a:lnTo>
+                  <a:pt x="2804694" y="1910639"/>
+                </a:lnTo>
+                <a:lnTo>
+                  <a:pt x="2754456" y="1966932"/>
+                </a:lnTo>
+                <a:lnTo>
+                  <a:pt x="2700093" y="2020153"/>
+                </a:lnTo>
+                <a:lnTo>
+                  <a:pt x="2641976" y="2070117"/>
+                </a:lnTo>
+                <a:lnTo>
+                  <a:pt x="2580497" y="2116686"/>
+                </a:lnTo>
+                <a:lnTo>
+                  <a:pt x="2516059" y="2159767"/>
+                </a:lnTo>
+                <a:lnTo>
+                  <a:pt x="2449070" y="2199311"/>
+                </a:lnTo>
+                <a:lnTo>
+                  <a:pt x="2379930" y="2235317"/>
+                </a:lnTo>
+                <a:lnTo>
+                  <a:pt x="2309026" y="2267825"/>
+                </a:lnTo>
+                <a:lnTo>
+                  <a:pt x="2236718" y="2296912"/>
+                </a:lnTo>
+                <a:lnTo>
+                  <a:pt x="2163339" y="2322690"/>
+                </a:lnTo>
+                <a:lnTo>
+                  <a:pt x="2089184" y="2345295"/>
+                </a:lnTo>
+                <a:lnTo>
+                  <a:pt x="2014505" y="2364885"/>
+                </a:lnTo>
+                <a:lnTo>
+                  <a:pt x="1939513" y="2381628"/>
+                </a:lnTo>
+                <a:lnTo>
+                  <a:pt x="1864372" y="2395698"/>
+                </a:lnTo>
+                <a:lnTo>
+                  <a:pt x="1789202" y="2407264"/>
+                </a:lnTo>
+                <a:lnTo>
+                  <a:pt x="1714081" y="2416483"/>
+                </a:lnTo>
+                <a:lnTo>
+                  <a:pt x="1639049" y="2423497"/>
+                </a:lnTo>
+                <a:lnTo>
+                  <a:pt x="1564114" y="2428419"/>
+                </a:lnTo>
+                <a:lnTo>
+                  <a:pt x="1489258" y="2431337"/>
+                </a:lnTo>
+                <a:lnTo>
+                  <a:pt x="1414446" y="2432304"/>
+                </a:lnTo>
+                <a:lnTo>
+                  <a:pt x="1339634" y="2431337"/>
+                </a:lnTo>
+                <a:lnTo>
+                  <a:pt x="1264778" y="2428419"/>
+                </a:lnTo>
+                <a:lnTo>
+                  <a:pt x="1189842" y="2423495"/>
+                </a:lnTo>
+                <a:lnTo>
+                  <a:pt x="1114811" y="2416480"/>
+                </a:lnTo>
+                <a:lnTo>
+                  <a:pt x="1039691" y="2407257"/>
+                </a:lnTo>
+                <a:lnTo>
+                  <a:pt x="964525" y="2395683"/>
+                </a:lnTo>
+                <a:lnTo>
+                  <a:pt x="889393" y="2381596"/>
+                </a:lnTo>
+                <a:lnTo>
+                  <a:pt x="814421" y="2364820"/>
+                </a:lnTo>
+                <a:lnTo>
+                  <a:pt x="739786" y="2345166"/>
+                </a:lnTo>
+                <a:lnTo>
+                  <a:pt x="665723" y="2322444"/>
+                </a:lnTo>
+                <a:lnTo>
+                  <a:pt x="592526" y="2296459"/>
+                </a:lnTo>
+                <a:lnTo>
+                  <a:pt x="520565" y="2267022"/>
+                </a:lnTo>
+                <a:lnTo>
+                  <a:pt x="450294" y="2233945"/>
+                </a:lnTo>
+                <a:lnTo>
+                  <a:pt x="382260" y="2197053"/>
+                </a:lnTo>
+                <a:lnTo>
+                  <a:pt x="317124" y="2156190"/>
+                </a:lnTo>
+                <a:lnTo>
+                  <a:pt x="255663" y="2111232"/>
+                </a:lnTo>
+                <a:lnTo>
+                  <a:pt x="198766" y="2062120"/>
+                </a:lnTo>
+                <a:lnTo>
+                  <a:pt x="147411" y="2008884"/>
+                </a:lnTo>
+                <a:lnTo>
+                  <a:pt x="102603" y="1951689"/>
+                </a:lnTo>
+                <a:lnTo>
+                  <a:pt x="65285" y="1890870"/>
+                </a:lnTo>
+                <a:lnTo>
+                  <a:pt x="36206" y="1826962"/>
+                </a:lnTo>
+                <a:lnTo>
+                  <a:pt x="15777" y="1760695"/>
+                </a:lnTo>
+                <a:lnTo>
+                  <a:pt x="3927" y="1692961"/>
+                </a:lnTo>
+                <a:lnTo>
+                  <a:pt x="0" y="1624739"/>
+                </a:lnTo>
+                <a:lnTo>
+                  <a:pt x="2727" y="1556979"/>
+                </a:lnTo>
+                <a:lnTo>
+                  <a:pt x="10309" y="1490471"/>
+                </a:lnTo>
+                <a:lnTo>
+                  <a:pt x="20598" y="1425725"/>
+                </a:lnTo>
+                <a:lnTo>
+                  <a:pt x="31385" y="1362893"/>
+                </a:lnTo>
+                <a:lnTo>
+                  <a:pt x="40724" y="1301750"/>
+                </a:lnTo>
+                <a:lnTo>
+                  <a:pt x="47235" y="1241755"/>
+                </a:lnTo>
+                <a:lnTo>
+                  <a:pt x="50324" y="1182180"/>
+                </a:lnTo>
+                <a:lnTo>
+                  <a:pt x="50270" y="1122271"/>
+                </a:lnTo>
+                <a:lnTo>
+                  <a:pt x="48151" y="1061422"/>
+                </a:lnTo>
+                <a:lnTo>
+                  <a:pt x="45637" y="999297"/>
+                </a:lnTo>
+                <a:lnTo>
+                  <a:pt x="44697" y="935903"/>
+                </a:lnTo>
+                <a:lnTo>
+                  <a:pt x="47279" y="871572"/>
+                </a:lnTo>
+                <a:lnTo>
+                  <a:pt x="55041" y="806900"/>
+                </a:lnTo>
+                <a:lnTo>
+                  <a:pt x="69165" y="742624"/>
+                </a:lnTo>
+                <a:lnTo>
+                  <a:pt x="90282" y="679509"/>
+                </a:lnTo>
+                <a:lnTo>
+                  <a:pt x="118500" y="618243"/>
+                </a:lnTo>
+                <a:lnTo>
+                  <a:pt x="153503" y="559367"/>
+                </a:lnTo>
+                <a:lnTo>
+                  <a:pt x="194690" y="503251"/>
+                </a:lnTo>
+                <a:lnTo>
+                  <a:pt x="241315" y="450103"/>
+                </a:lnTo>
+                <a:lnTo>
+                  <a:pt x="292606" y="399998"/>
+                </a:lnTo>
+                <a:lnTo>
+                  <a:pt x="347848" y="352924"/>
+                </a:lnTo>
+                <a:lnTo>
+                  <a:pt x="406428" y="308824"/>
+                </a:lnTo>
+                <a:lnTo>
+                  <a:pt x="467850" y="267631"/>
+                </a:lnTo>
+                <a:lnTo>
+                  <a:pt x="531727" y="229290"/>
+                </a:lnTo>
+                <a:lnTo>
+                  <a:pt x="597761" y="193769"/>
+                </a:lnTo>
+                <a:lnTo>
+                  <a:pt x="665723" y="161067"/>
+                </a:lnTo>
+                <a:lnTo>
+                  <a:pt x="735422" y="131207"/>
+                </a:lnTo>
+                <a:lnTo>
+                  <a:pt x="806698" y="104235"/>
+                </a:lnTo>
+                <a:lnTo>
+                  <a:pt x="879395" y="80211"/>
+                </a:lnTo>
+                <a:lnTo>
+                  <a:pt x="953364" y="59202"/>
+                </a:lnTo>
+                <a:lnTo>
+                  <a:pt x="1028446" y="41279"/>
+                </a:lnTo>
+                <a:lnTo>
+                  <a:pt x="1104475" y="26508"/>
+                </a:lnTo>
+                <a:lnTo>
+                  <a:pt x="1181278" y="14951"/>
+                </a:lnTo>
+                <a:lnTo>
+                  <a:pt x="1258669" y="6658"/>
+                </a:lnTo>
+                <a:lnTo>
+                  <a:pt x="1336457" y="1667"/>
+                </a:lnTo>
+                <a:lnTo>
+                  <a:pt x="1414446" y="0"/>
+                </a:lnTo>
+                <a:lnTo>
+                  <a:pt x="1492434" y="1666"/>
+                </a:lnTo>
+                <a:lnTo>
+                  <a:pt x="1570222" y="6658"/>
+                </a:lnTo>
+                <a:lnTo>
+                  <a:pt x="1647614" y="14950"/>
+                </a:lnTo>
+                <a:lnTo>
+                  <a:pt x="1724417" y="26505"/>
+                </a:lnTo>
+                <a:lnTo>
+                  <a:pt x="1800448" y="41272"/>
+                </a:lnTo>
+                <a:lnTo>
+                  <a:pt x="1875533" y="59187"/>
+                </a:lnTo>
+                <a:lnTo>
+                  <a:pt x="1949510" y="80179"/>
+                </a:lnTo>
+                <a:lnTo>
+                  <a:pt x="2022228" y="104170"/>
+                </a:lnTo>
+                <a:lnTo>
+                  <a:pt x="2093548" y="131078"/>
+                </a:lnTo>
+                <a:lnTo>
+                  <a:pt x="2163339" y="160820"/>
+                </a:lnTo>
+                <a:lnTo>
+                  <a:pt x="2231483" y="193316"/>
+                </a:lnTo>
+                <a:lnTo>
+                  <a:pt x="2297865" y="228487"/>
+                </a:lnTo>
+                <a:lnTo>
+                  <a:pt x="2362375" y="266259"/>
+                </a:lnTo>
+                <a:lnTo>
+                  <a:pt x="2424902" y="306567"/>
+                </a:lnTo>
+                <a:lnTo>
+                  <a:pt x="2485335" y="349347"/>
+                </a:lnTo>
+                <a:lnTo>
+                  <a:pt x="2543554" y="394544"/>
+                </a:lnTo>
+                <a:lnTo>
+                  <a:pt x="2599427" y="442106"/>
+                </a:lnTo>
+                <a:lnTo>
+                  <a:pt x="2652814" y="491982"/>
+                </a:lnTo>
+                <a:lnTo>
+                  <a:pt x="2703556" y="544123"/>
+                </a:lnTo>
+                <a:lnTo>
+                  <a:pt x="2751479" y="598475"/>
+                </a:lnTo>
+                <a:lnTo>
+                  <a:pt x="2796391" y="654975"/>
+                </a:lnTo>
+                <a:lnTo>
+                  <a:pt x="2838085" y="713551"/>
+                </a:lnTo>
+                <a:lnTo>
+                  <a:pt x="2876337" y="774116"/>
+                </a:lnTo>
+                <a:lnTo>
+                  <a:pt x="2910910" y="836563"/>
+                </a:lnTo>
+                <a:lnTo>
+                  <a:pt x="2941561" y="900764"/>
+                </a:lnTo>
+                <a:lnTo>
+                  <a:pt x="2968039" y="966566"/>
+                </a:lnTo>
+                <a:lnTo>
+                  <a:pt x="2990099" y="1033789"/>
+                </a:lnTo>
+                <a:lnTo>
+                  <a:pt x="3007500" y="1102225"/>
+                </a:lnTo>
+                <a:lnTo>
+                  <a:pt x="3020017" y="1171635"/>
+                </a:lnTo>
+                <a:close/>
+              </a:path>
+            </a:pathLst>
+          </a:custGeom>
+          <a:solidFill>
+            <a:srgbClr val="F4DADD"/>
+          </a:solidFill>
+          <a:ln w="19050">
+            <a:solidFill>
+              <a:srgbClr val="B5525E"/>
+            </a:solidFill>
+            <a:prstDash val="solid"/>
+          </a:ln>
+        </p:spPr>
+      </p:sp>
+      <p:sp>
+        <p:nvSpPr>
+          <p:cNvPr id="136" name="Engulfed RBC cytoplasm"/>
+          <p:cNvSpPr/>
+          <p:nvPr/>
+        </p:nvSpPr>
+        <p:spPr>
+          <a:xfrm>
+            <a:off x="9098280" y="2651760"/>
+            <a:ext cx="822960" cy="822960"/>
+          </a:xfrm>
+          <a:prstGeom prst="ellipse">
+            <a:avLst/>
+          </a:prstGeom>
+          <a:solidFill>
+            <a:srgbClr val="9A3B3B"/>
+          </a:solidFill>
+          <a:ln/>
+        </p:spPr>
+      </p:sp>
+      <p:sp>
+        <p:nvSpPr>
+          <p:cNvPr id="137" name="Engulfed RBC central pallor"/>
+          <p:cNvSpPr/>
+          <p:nvPr/>
+        </p:nvSpPr>
+        <p:spPr>
+          <a:xfrm>
+            <a:off x="9298534" y="2852014"/>
+            <a:ext cx="422453" cy="422453"/>
+          </a:xfrm>
+          <a:prstGeom prst="ellipse">
+            <a:avLst/>
+          </a:prstGeom>
+          <a:solidFill>
+            <a:srgbClr val="C48A8A"/>
+          </a:solidFill>
+          <a:ln/>
+        </p:spPr>
+      </p:sp>
+      <p:sp>
+        <p:nvSpPr>
+          <p:cNvPr id="138" name="Engulfed RBC outer leaflet 1"/>
+          <p:cNvSpPr/>
+          <p:nvPr/>
+        </p:nvSpPr>
+        <p:spPr>
+          <a:xfrm>
+            <a:off x="9006840" y="2560320"/>
+            <a:ext cx="1005840" cy="1005840"/>
+          </a:xfrm>
+          <a:prstGeom prst="blockArc">
+            <a:avLst>
+              <a:gd name="adj1" fmla="val 1980000"/>
+              <a:gd name="adj2" fmla="val 5880000"/>
+              <a:gd name="adj3" fmla="val 6818"/>
+            </a:avLst>
+          </a:prstGeom>
+          <a:solidFill>
+            <a:srgbClr val="3B3B3B"/>
+          </a:solidFill>
+          <a:ln/>
+        </p:spPr>
+      </p:sp>
+      <p:sp>
+        <p:nvSpPr>
+          <p:cNvPr id="139" name="Engulfed RBC inner leaflet 1"/>
+          <p:cNvSpPr/>
+          <p:nvPr/>
+        </p:nvSpPr>
+        <p:spPr>
+          <a:xfrm>
+            <a:off x="9075420" y="2628900"/>
+            <a:ext cx="868680" cy="868680"/>
+          </a:xfrm>
+          <a:prstGeom prst="blockArc">
+            <a:avLst>
+              <a:gd name="adj1" fmla="val 1980000"/>
+              <a:gd name="adj2" fmla="val 5880000"/>
+              <a:gd name="adj3" fmla="val 7895"/>
+            </a:avLst>
+          </a:prstGeom>
+          <a:solidFill>
+            <a:srgbClr val="8FA7B0"/>
+          </a:solidFill>
+          <a:ln/>
+        </p:spPr>
+      </p:sp>
+      <p:sp>
+        <p:nvSpPr>
+          <p:cNvPr id="140" name="Engulfed RBC outer leaflet 2"/>
+          <p:cNvSpPr/>
+          <p:nvPr/>
+        </p:nvSpPr>
+        <p:spPr>
+          <a:xfrm>
+            <a:off x="9006840" y="2560320"/>
+            <a:ext cx="1005840" cy="1005840"/>
+          </a:xfrm>
+          <a:prstGeom prst="blockArc">
+            <a:avLst>
+              <a:gd name="adj1" fmla="val 7320000"/>
+              <a:gd name="adj2" fmla="val 10260000"/>
+              <a:gd name="adj3" fmla="val 6818"/>
+            </a:avLst>
+          </a:prstGeom>
+          <a:solidFill>
+            <a:srgbClr val="3B3B3B"/>
+          </a:solidFill>
+          <a:ln/>
+        </p:spPr>
+      </p:sp>
+      <p:sp>
+        <p:nvSpPr>
+          <p:cNvPr id="141" name="Engulfed RBC inner leaflet 2"/>
+          <p:cNvSpPr/>
+          <p:nvPr/>
+        </p:nvSpPr>
+        <p:spPr>
+          <a:xfrm>
+            <a:off x="9075420" y="2628900"/>
+            <a:ext cx="868680" cy="868680"/>
+          </a:xfrm>
+          <a:prstGeom prst="blockArc">
+            <a:avLst>
+              <a:gd name="adj1" fmla="val 7320000"/>
+              <a:gd name="adj2" fmla="val 10260000"/>
+              <a:gd name="adj3" fmla="val 7895"/>
+            </a:avLst>
+          </a:prstGeom>
+          <a:solidFill>
+            <a:srgbClr val="8FA7B0"/>
+          </a:solidFill>
+          <a:ln/>
+        </p:spPr>
+      </p:sp>
+      <p:sp>
+        <p:nvSpPr>
+          <p:cNvPr id="142" name="Engulfed RBC outer leaflet 3"/>
+          <p:cNvSpPr/>
+          <p:nvPr/>
+        </p:nvSpPr>
+        <p:spPr>
+          <a:xfrm>
+            <a:off x="9006840" y="2560320"/>
+            <a:ext cx="1005840" cy="1005840"/>
+          </a:xfrm>
+          <a:prstGeom prst="blockArc">
+            <a:avLst>
+              <a:gd name="adj1" fmla="val 11940000"/>
+              <a:gd name="adj2" fmla="val 14340000"/>
+              <a:gd name="adj3" fmla="val 6818"/>
+            </a:avLst>
+          </a:prstGeom>
+          <a:solidFill>
+            <a:srgbClr val="3B3B3B"/>
+          </a:solidFill>
+          <a:ln/>
+        </p:spPr>
+      </p:sp>
+      <p:sp>
+        <p:nvSpPr>
+          <p:cNvPr id="143" name="Engulfed RBC inner leaflet 3"/>
+          <p:cNvSpPr/>
+          <p:nvPr/>
+        </p:nvSpPr>
+        <p:spPr>
+          <a:xfrm>
+            <a:off x="9075420" y="2628900"/>
+            <a:ext cx="868680" cy="868680"/>
+          </a:xfrm>
+          <a:prstGeom prst="blockArc">
+            <a:avLst>
+              <a:gd name="adj1" fmla="val 11940000"/>
+              <a:gd name="adj2" fmla="val 14340000"/>
+              <a:gd name="adj3" fmla="val 7895"/>
+            </a:avLst>
+          </a:prstGeom>
+          <a:solidFill>
+            <a:srgbClr val="8FA7B0"/>
+          </a:solidFill>
+          <a:ln/>
+        </p:spPr>
+      </p:sp>
+      <p:sp>
+        <p:nvSpPr>
+          <p:cNvPr id="144" name="Engulfed RBC outer leaflet 4"/>
+          <p:cNvSpPr/>
+          <p:nvPr/>
+        </p:nvSpPr>
+        <p:spPr>
+          <a:xfrm>
+            <a:off x="9006840" y="2560320"/>
+            <a:ext cx="1005840" cy="1005840"/>
+          </a:xfrm>
+          <a:prstGeom prst="blockArc">
+            <a:avLst>
+              <a:gd name="adj1" fmla="val 15660000"/>
+              <a:gd name="adj2" fmla="val 18480000"/>
+              <a:gd name="adj3" fmla="val 6818"/>
+            </a:avLst>
+          </a:prstGeom>
+          <a:solidFill>
+            <a:srgbClr val="3B3B3B"/>
+          </a:solidFill>
+          <a:ln/>
+        </p:spPr>
+      </p:sp>
+      <p:sp>
+        <p:nvSpPr>
+          <p:cNvPr id="145" name="Engulfed RBC inner leaflet 4"/>
+          <p:cNvSpPr/>
+          <p:nvPr/>
+        </p:nvSpPr>
+        <p:spPr>
+          <a:xfrm>
+            <a:off x="9075420" y="2628900"/>
+            <a:ext cx="868680" cy="868680"/>
+          </a:xfrm>
+          <a:prstGeom prst="blockArc">
+            <a:avLst>
+              <a:gd name="adj1" fmla="val 15660000"/>
+              <a:gd name="adj2" fmla="val 18480000"/>
+              <a:gd name="adj3" fmla="val 7895"/>
+            </a:avLst>
+          </a:prstGeom>
+          <a:solidFill>
+            <a:srgbClr val="8FA7B0"/>
+          </a:solidFill>
+          <a:ln/>
+        </p:spPr>
+      </p:sp>
+      <p:sp>
+        <p:nvSpPr>
+          <p:cNvPr id="146" name="Engulfed RBC outer leaflet 5"/>
+          <p:cNvSpPr/>
+          <p:nvPr/>
+        </p:nvSpPr>
+        <p:spPr>
+          <a:xfrm>
+            <a:off x="9006840" y="2560320"/>
+            <a:ext cx="1005840" cy="1005840"/>
+          </a:xfrm>
+          <a:prstGeom prst="blockArc">
+            <a:avLst>
+              <a:gd name="adj1" fmla="val 19920000"/>
+              <a:gd name="adj2" fmla="val 420000"/>
+              <a:gd name="adj3" fmla="val 6818"/>
+            </a:avLst>
+          </a:prstGeom>
+          <a:solidFill>
+            <a:srgbClr val="3B3B3B"/>
+          </a:solidFill>
+          <a:ln/>
+        </p:spPr>
+      </p:sp>
+      <p:sp>
+        <p:nvSpPr>
+          <p:cNvPr id="147" name="Engulfed RBC inner leaflet 5"/>
+          <p:cNvSpPr/>
+          <p:nvPr/>
+        </p:nvSpPr>
+        <p:spPr>
+          <a:xfrm>
+            <a:off x="9075420" y="2628900"/>
+            <a:ext cx="868680" cy="868680"/>
+          </a:xfrm>
+          <a:prstGeom prst="blockArc">
+            <a:avLst>
+              <a:gd name="adj1" fmla="val 19920000"/>
+              <a:gd name="adj2" fmla="val 420000"/>
+              <a:gd name="adj3" fmla="val 7895"/>
+            </a:avLst>
+          </a:prstGeom>
+          <a:solidFill>
+            <a:srgbClr val="8FA7B0"/>
+          </a:solidFill>
+          <a:ln/>
+        </p:spPr>
+      </p:sp>
+      <p:sp>
+        <p:nvSpPr>
+          <p:cNvPr id="148" name="Engulfed RBC eat-me (outer)"/>
+          <p:cNvSpPr/>
+          <p:nvPr/>
+        </p:nvSpPr>
+        <p:spPr>
+          <a:xfrm rot="2955000">
+            <a:off x="9790166" y="3401146"/>
+            <a:ext cx="155448" cy="155448"/>
+          </a:xfrm>
+          <a:prstGeom prst="diamond">
+            <a:avLst/>
+          </a:prstGeom>
+          <a:solidFill>
+            <a:srgbClr val="FFB81D"/>
+          </a:solidFill>
+          <a:ln w="9525">
+            <a:solidFill>
+              <a:srgbClr val="8A5A00"/>
+            </a:solidFill>
+            <a:prstDash val="solid"/>
+          </a:ln>
+        </p:spPr>
+      </p:sp>
+      <p:sp>
+        <p:nvSpPr>
+          <p:cNvPr id="149" name="Engulfed RBC eat-me (outer)"/>
+          <p:cNvSpPr/>
+          <p:nvPr/>
+        </p:nvSpPr>
+        <p:spPr>
+          <a:xfrm rot="4425000">
+            <a:off x="9585561" y="3512238"/>
+            <a:ext cx="155448" cy="155448"/>
+          </a:xfrm>
+          <a:prstGeom prst="diamond">
+            <a:avLst/>
+          </a:prstGeom>
+          <a:solidFill>
+            <a:srgbClr val="FFB81D"/>
+          </a:solidFill>
+          <a:ln w="9525">
+            <a:solidFill>
+              <a:srgbClr val="8A5A00"/>
+            </a:solidFill>
+            <a:prstDash val="solid"/>
+          </a:ln>
+        </p:spPr>
+      </p:sp>
+      <p:sp>
+        <p:nvSpPr>
+          <p:cNvPr id="150" name="Engulfed RBC eat-me (outer)"/>
+          <p:cNvSpPr/>
+          <p:nvPr/>
+        </p:nvSpPr>
+        <p:spPr>
+          <a:xfrm rot="7815000">
+            <a:off x="9077547" y="3404256"/>
+            <a:ext cx="155448" cy="155448"/>
+          </a:xfrm>
+          <a:prstGeom prst="diamond">
+            <a:avLst/>
+          </a:prstGeom>
+          <a:solidFill>
+            <a:srgbClr val="FFB81D"/>
+          </a:solidFill>
+          <a:ln w="9525">
+            <a:solidFill>
+              <a:srgbClr val="8A5A00"/>
+            </a:solidFill>
+            <a:prstDash val="solid"/>
+          </a:ln>
+        </p:spPr>
+      </p:sp>
+      <p:sp>
+        <p:nvSpPr>
+          <p:cNvPr id="151" name="Engulfed RBC eat-me (outer)"/>
+          <p:cNvSpPr/>
+          <p:nvPr/>
+        </p:nvSpPr>
+        <p:spPr>
+          <a:xfrm rot="9285000">
+            <a:off x="8935816" y="3219549"/>
+            <a:ext cx="155448" cy="155448"/>
+          </a:xfrm>
+          <a:prstGeom prst="diamond">
+            <a:avLst/>
+          </a:prstGeom>
+          <a:solidFill>
+            <a:srgbClr val="FFB81D"/>
+          </a:solidFill>
+          <a:ln w="9525">
+            <a:solidFill>
+              <a:srgbClr val="8A5A00"/>
+            </a:solidFill>
+            <a:prstDash val="solid"/>
+          </a:ln>
+        </p:spPr>
+      </p:sp>
+      <p:sp>
+        <p:nvSpPr>
+          <p:cNvPr id="152" name="Engulfed RBC eat-me (outer)"/>
+          <p:cNvSpPr/>
+          <p:nvPr/>
+        </p:nvSpPr>
+        <p:spPr>
+          <a:xfrm rot="12915000">
+            <a:off x="8983994" y="2668871"/>
+            <a:ext cx="155448" cy="155448"/>
+          </a:xfrm>
+          <a:prstGeom prst="diamond">
+            <a:avLst/>
+          </a:prstGeom>
+          <a:solidFill>
+            <a:srgbClr val="FFB81D"/>
+          </a:solidFill>
+          <a:ln w="9525">
+            <a:solidFill>
+              <a:srgbClr val="8A5A00"/>
+            </a:solidFill>
+            <a:prstDash val="solid"/>
+          </a:ln>
+        </p:spPr>
+      </p:sp>
+      <p:sp>
+        <p:nvSpPr>
+          <p:cNvPr id="153" name="Engulfed RBC eat-me (outer)"/>
+          <p:cNvSpPr/>
+          <p:nvPr/>
+        </p:nvSpPr>
+        <p:spPr>
+          <a:xfrm rot="16185000">
+            <a:off x="9429642" y="2436881"/>
+            <a:ext cx="155448" cy="155448"/>
+          </a:xfrm>
+          <a:prstGeom prst="diamond">
+            <a:avLst/>
+          </a:prstGeom>
+          <a:solidFill>
+            <a:srgbClr val="FFB81D"/>
+          </a:solidFill>
+          <a:ln w="9525">
+            <a:solidFill>
+              <a:srgbClr val="8A5A00"/>
+            </a:solidFill>
+            <a:prstDash val="solid"/>
+          </a:ln>
+        </p:spPr>
+      </p:sp>
+      <p:sp>
+        <p:nvSpPr>
+          <p:cNvPr id="154" name="Engulfed RBC eat-me (outer)"/>
+          <p:cNvSpPr/>
+          <p:nvPr/>
+        </p:nvSpPr>
+        <p:spPr>
+          <a:xfrm rot="17655000">
+            <a:off x="9657373" y="2485287"/>
+            <a:ext cx="155448" cy="155448"/>
+          </a:xfrm>
+          <a:prstGeom prst="diamond">
+            <a:avLst/>
+          </a:prstGeom>
+          <a:solidFill>
+            <a:srgbClr val="FFB81D"/>
+          </a:solidFill>
+          <a:ln w="9525">
+            <a:solidFill>
+              <a:srgbClr val="8A5A00"/>
+            </a:solidFill>
+            <a:prstDash val="solid"/>
+          </a:ln>
+        </p:spPr>
+      </p:sp>
+      <p:sp>
+        <p:nvSpPr>
+          <p:cNvPr id="155" name="Engulfed RBC CD47 stalk"/>
+          <p:cNvSpPr/>
+          <p:nvPr/>
+        </p:nvSpPr>
+        <p:spPr>
+          <a:xfrm rot="15645000">
+            <a:off x="10060053" y="2888345"/>
+            <a:ext cx="36576" cy="164592"/>
           </a:xfrm>
           <a:prstGeom prst="rect">
             <a:avLst/>
@@ -5475,13 +6639,13 @@
       </p:sp>
       <p:sp>
         <p:nvSpPr>
-          <p:cNvPr id="134" name="Shape 132"/>
-          <p:cNvSpPr/>
-          <p:nvPr/>
-        </p:nvSpPr>
-        <p:spPr>
-          <a:xfrm>
-            <a:off x="571500" y="5705856"/>
+          <p:cNvPr id="156" name="Engulfed RBC CD47"/>
+          <p:cNvSpPr/>
+          <p:nvPr/>
+        </p:nvSpPr>
+        <p:spPr>
+          <a:xfrm>
+            <a:off x="10136112" y="2881483"/>
             <a:ext cx="137160" cy="137160"/>
           </a:xfrm>
           <a:prstGeom prst="ellipse">
@@ -5500,7 +6664,2070 @@
       </p:sp>
       <p:sp>
         <p:nvSpPr>
-          <p:cNvPr id="135" name="Text 133"/>
+          <p:cNvPr id="157" name="Engulfed RBC eat-me (inner)"/>
+          <p:cNvSpPr/>
+          <p:nvPr/>
+        </p:nvSpPr>
+        <p:spPr>
+          <a:xfrm rot="5160000">
+            <a:off x="9452447" y="3277411"/>
+            <a:ext cx="155448" cy="155448"/>
+          </a:xfrm>
+          <a:prstGeom prst="diamond">
+            <a:avLst/>
+          </a:prstGeom>
+          <a:solidFill>
+            <a:srgbClr val="FFB81D"/>
+          </a:solidFill>
+          <a:ln w="9525">
+            <a:solidFill>
+              <a:srgbClr val="8A5A00"/>
+            </a:solidFill>
+            <a:prstDash val="solid"/>
+          </a:ln>
+        </p:spPr>
+      </p:sp>
+      <p:sp>
+        <p:nvSpPr>
+          <p:cNvPr id="158" name="Engulfed RBC eat-me (inner)"/>
+          <p:cNvSpPr/>
+          <p:nvPr/>
+        </p:nvSpPr>
+        <p:spPr>
+          <a:xfrm rot="16920000">
+            <a:off x="9492873" y="2699302"/>
+            <a:ext cx="155448" cy="155448"/>
+          </a:xfrm>
+          <a:prstGeom prst="diamond">
+            <a:avLst/>
+          </a:prstGeom>
+          <a:solidFill>
+            <a:srgbClr val="FFB81D"/>
+          </a:solidFill>
+          <a:ln w="9525">
+            <a:solidFill>
+              <a:srgbClr val="8A5A00"/>
+            </a:solidFill>
+            <a:prstDash val="solid"/>
+          </a:ln>
+        </p:spPr>
+      </p:sp>
+      <p:sp>
+        <p:nvSpPr>
+          <p:cNvPr id="159" name="Pseudopod (upper)"/>
+          <p:cNvSpPr/>
+          <p:nvPr/>
+        </p:nvSpPr>
+        <p:spPr>
+          <a:xfrm>
+            <a:off x="8776529" y="2222120"/>
+            <a:ext cx="1377664" cy="595095"/>
+          </a:xfrm>
+          <a:custGeom>
+            <a:avLst/>
+            <a:gdLst/>
+            <a:ahLst/>
+            <a:cxnLst/>
+            <a:rect l="l" t="t" r="r" b="b"/>
+            <a:pathLst>
+              <a:path w="1377664" h="595095">
+                <a:moveTo>
+                  <a:pt x="1377664" y="300376"/>
+                </a:moveTo>
+                <a:lnTo>
+                  <a:pt x="1348481" y="267390"/>
+                </a:lnTo>
+                <a:lnTo>
+                  <a:pt x="1317611" y="235977"/>
+                </a:lnTo>
+                <a:lnTo>
+                  <a:pt x="1285139" y="206222"/>
+                </a:lnTo>
+                <a:lnTo>
+                  <a:pt x="1251155" y="178207"/>
+                </a:lnTo>
+                <a:lnTo>
+                  <a:pt x="1215751" y="152010"/>
+                </a:lnTo>
+                <a:lnTo>
+                  <a:pt x="1179024" y="127701"/>
+                </a:lnTo>
+                <a:lnTo>
+                  <a:pt x="1141076" y="105348"/>
+                </a:lnTo>
+                <a:lnTo>
+                  <a:pt x="1102010" y="85011"/>
+                </a:lnTo>
+                <a:lnTo>
+                  <a:pt x="1061933" y="66747"/>
+                </a:lnTo>
+                <a:lnTo>
+                  <a:pt x="1020955" y="50605"/>
+                </a:lnTo>
+                <a:lnTo>
+                  <a:pt x="979188" y="36630"/>
+                </a:lnTo>
+                <a:lnTo>
+                  <a:pt x="936747" y="24861"/>
+                </a:lnTo>
+                <a:lnTo>
+                  <a:pt x="893749" y="15328"/>
+                </a:lnTo>
+                <a:lnTo>
+                  <a:pt x="850310" y="8059"/>
+                </a:lnTo>
+                <a:lnTo>
+                  <a:pt x="806550" y="3073"/>
+                </a:lnTo>
+                <a:lnTo>
+                  <a:pt x="762590" y="384"/>
+                </a:lnTo>
+                <a:lnTo>
+                  <a:pt x="718549" y="0"/>
+                </a:lnTo>
+                <a:lnTo>
+                  <a:pt x="674548" y="1921"/>
+                </a:lnTo>
+                <a:lnTo>
+                  <a:pt x="630709" y="6142"/>
+                </a:lnTo>
+                <a:lnTo>
+                  <a:pt x="587150" y="12652"/>
+                </a:lnTo>
+                <a:lnTo>
+                  <a:pt x="543991" y="21433"/>
+                </a:lnTo>
+                <a:lnTo>
+                  <a:pt x="501352" y="32460"/>
+                </a:lnTo>
+                <a:lnTo>
+                  <a:pt x="459347" y="45704"/>
+                </a:lnTo>
+                <a:lnTo>
+                  <a:pt x="418094" y="61128"/>
+                </a:lnTo>
+                <a:lnTo>
+                  <a:pt x="377704" y="78690"/>
+                </a:lnTo>
+                <a:lnTo>
+                  <a:pt x="338289" y="98342"/>
+                </a:lnTo>
+                <a:lnTo>
+                  <a:pt x="299956" y="120030"/>
+                </a:lnTo>
+                <a:lnTo>
+                  <a:pt x="262811" y="143694"/>
+                </a:lnTo>
+                <a:lnTo>
+                  <a:pt x="226955" y="169269"/>
+                </a:lnTo>
+                <a:lnTo>
+                  <a:pt x="192487" y="196687"/>
+                </a:lnTo>
+                <a:lnTo>
+                  <a:pt x="159501" y="225870"/>
+                </a:lnTo>
+                <a:lnTo>
+                  <a:pt x="128088" y="256740"/>
+                </a:lnTo>
+                <a:lnTo>
+                  <a:pt x="98333" y="289212"/>
+                </a:lnTo>
+                <a:lnTo>
+                  <a:pt x="70318" y="323196"/>
+                </a:lnTo>
+                <a:lnTo>
+                  <a:pt x="52443" y="364427"/>
+                </a:lnTo>
+                <a:lnTo>
+                  <a:pt x="37044" y="406094"/>
+                </a:lnTo>
+                <a:lnTo>
+                  <a:pt x="24117" y="448052"/>
+                </a:lnTo>
+                <a:lnTo>
+                  <a:pt x="13649" y="490156"/>
+                </a:lnTo>
+                <a:lnTo>
+                  <a:pt x="5620" y="532267"/>
+                </a:lnTo>
+                <a:lnTo>
+                  <a:pt x="0" y="574246"/>
+                </a:lnTo>
+                <a:lnTo>
+                  <a:pt x="57284" y="595095"/>
+                </a:lnTo>
+                <a:lnTo>
+                  <a:pt x="80438" y="564026"/>
+                </a:lnTo>
+                <a:lnTo>
+                  <a:pt x="104967" y="534695"/>
+                </a:lnTo>
+                <a:lnTo>
+                  <a:pt x="130751" y="507160"/>
+                </a:lnTo>
+                <a:lnTo>
+                  <a:pt x="157671" y="481470"/>
+                </a:lnTo>
+                <a:lnTo>
+                  <a:pt x="185605" y="457668"/>
+                </a:lnTo>
+                <a:lnTo>
+                  <a:pt x="214430" y="435788"/>
+                </a:lnTo>
+                <a:lnTo>
+                  <a:pt x="236354" y="409192"/>
+                </a:lnTo>
+                <a:lnTo>
+                  <a:pt x="259641" y="383779"/>
+                </a:lnTo>
+                <a:lnTo>
+                  <a:pt x="284225" y="359620"/>
+                </a:lnTo>
+                <a:lnTo>
+                  <a:pt x="310040" y="336781"/>
+                </a:lnTo>
+                <a:lnTo>
+                  <a:pt x="337015" y="315324"/>
+                </a:lnTo>
+                <a:lnTo>
+                  <a:pt x="365076" y="295308"/>
+                </a:lnTo>
+                <a:lnTo>
+                  <a:pt x="394146" y="276788"/>
+                </a:lnTo>
+                <a:lnTo>
+                  <a:pt x="424146" y="259815"/>
+                </a:lnTo>
+                <a:lnTo>
+                  <a:pt x="454993" y="244436"/>
+                </a:lnTo>
+                <a:lnTo>
+                  <a:pt x="486602" y="230692"/>
+                </a:lnTo>
+                <a:lnTo>
+                  <a:pt x="518887" y="218621"/>
+                </a:lnTo>
+                <a:lnTo>
+                  <a:pt x="551760" y="208256"/>
+                </a:lnTo>
+                <a:lnTo>
+                  <a:pt x="585130" y="199626"/>
+                </a:lnTo>
+                <a:lnTo>
+                  <a:pt x="618906" y="192754"/>
+                </a:lnTo>
+                <a:lnTo>
+                  <a:pt x="652996" y="187659"/>
+                </a:lnTo>
+                <a:lnTo>
+                  <a:pt x="687305" y="184356"/>
+                </a:lnTo>
+                <a:lnTo>
+                  <a:pt x="721741" y="182852"/>
+                </a:lnTo>
+                <a:lnTo>
+                  <a:pt x="756208" y="183153"/>
+                </a:lnTo>
+                <a:lnTo>
+                  <a:pt x="790611" y="185257"/>
+                </a:lnTo>
+                <a:lnTo>
+                  <a:pt x="824858" y="189159"/>
+                </a:lnTo>
+                <a:lnTo>
+                  <a:pt x="858853" y="194848"/>
+                </a:lnTo>
+                <a:lnTo>
+                  <a:pt x="892505" y="202308"/>
+                </a:lnTo>
+                <a:lnTo>
+                  <a:pt x="925719" y="211519"/>
+                </a:lnTo>
+                <a:lnTo>
+                  <a:pt x="958406" y="222456"/>
+                </a:lnTo>
+                <a:lnTo>
+                  <a:pt x="990476" y="235089"/>
+                </a:lnTo>
+                <a:lnTo>
+                  <a:pt x="1021840" y="249383"/>
+                </a:lnTo>
+                <a:lnTo>
+                  <a:pt x="1052414" y="265298"/>
+                </a:lnTo>
+                <a:lnTo>
+                  <a:pt x="1082113" y="282792"/>
+                </a:lnTo>
+                <a:lnTo>
+                  <a:pt x="1110855" y="301816"/>
+                </a:lnTo>
+                <a:lnTo>
+                  <a:pt x="1138563" y="322319"/>
+                </a:lnTo>
+                <a:lnTo>
+                  <a:pt x="1165159" y="344243"/>
+                </a:lnTo>
+                <a:lnTo>
+                  <a:pt x="1190572" y="367530"/>
+                </a:lnTo>
+                <a:lnTo>
+                  <a:pt x="1214731" y="392114"/>
+                </a:lnTo>
+                <a:lnTo>
+                  <a:pt x="1237570" y="417929"/>
+                </a:lnTo>
+                <a:close/>
+              </a:path>
+            </a:pathLst>
+          </a:custGeom>
+          <a:solidFill>
+            <a:srgbClr val="D7C7E3"/>
+          </a:solidFill>
+          <a:ln w="19050">
+            <a:solidFill>
+              <a:srgbClr val="7A5C8E"/>
+            </a:solidFill>
+            <a:prstDash val="solid"/>
+          </a:ln>
+        </p:spPr>
+      </p:sp>
+      <p:sp>
+        <p:nvSpPr>
+          <p:cNvPr id="160" name="Pseudopod (lower)"/>
+          <p:cNvSpPr/>
+          <p:nvPr/>
+        </p:nvSpPr>
+        <p:spPr>
+          <a:xfrm>
+            <a:off x="8776529" y="3309265"/>
+            <a:ext cx="1377664" cy="595095"/>
+          </a:xfrm>
+          <a:custGeom>
+            <a:avLst/>
+            <a:gdLst/>
+            <a:ahLst/>
+            <a:cxnLst/>
+            <a:rect l="l" t="t" r="r" b="b"/>
+            <a:pathLst>
+              <a:path w="1377664" h="595095">
+                <a:moveTo>
+                  <a:pt x="1377664" y="294719"/>
+                </a:moveTo>
+                <a:lnTo>
+                  <a:pt x="1348481" y="327705"/>
+                </a:lnTo>
+                <a:lnTo>
+                  <a:pt x="1317611" y="359119"/>
+                </a:lnTo>
+                <a:lnTo>
+                  <a:pt x="1285139" y="388873"/>
+                </a:lnTo>
+                <a:lnTo>
+                  <a:pt x="1251155" y="416888"/>
+                </a:lnTo>
+                <a:lnTo>
+                  <a:pt x="1215751" y="443085"/>
+                </a:lnTo>
+                <a:lnTo>
+                  <a:pt x="1179024" y="467394"/>
+                </a:lnTo>
+                <a:lnTo>
+                  <a:pt x="1141076" y="489747"/>
+                </a:lnTo>
+                <a:lnTo>
+                  <a:pt x="1102010" y="510084"/>
+                </a:lnTo>
+                <a:lnTo>
+                  <a:pt x="1061933" y="528348"/>
+                </a:lnTo>
+                <a:lnTo>
+                  <a:pt x="1020955" y="544490"/>
+                </a:lnTo>
+                <a:lnTo>
+                  <a:pt x="979188" y="558465"/>
+                </a:lnTo>
+                <a:lnTo>
+                  <a:pt x="936747" y="570235"/>
+                </a:lnTo>
+                <a:lnTo>
+                  <a:pt x="893749" y="579767"/>
+                </a:lnTo>
+                <a:lnTo>
+                  <a:pt x="850310" y="587036"/>
+                </a:lnTo>
+                <a:lnTo>
+                  <a:pt x="806550" y="592022"/>
+                </a:lnTo>
+                <a:lnTo>
+                  <a:pt x="762590" y="594711"/>
+                </a:lnTo>
+                <a:lnTo>
+                  <a:pt x="718549" y="595095"/>
+                </a:lnTo>
+                <a:lnTo>
+                  <a:pt x="674548" y="593174"/>
+                </a:lnTo>
+                <a:lnTo>
+                  <a:pt x="630709" y="588953"/>
+                </a:lnTo>
+                <a:lnTo>
+                  <a:pt x="587150" y="582443"/>
+                </a:lnTo>
+                <a:lnTo>
+                  <a:pt x="543991" y="573662"/>
+                </a:lnTo>
+                <a:lnTo>
+                  <a:pt x="501352" y="562635"/>
+                </a:lnTo>
+                <a:lnTo>
+                  <a:pt x="459347" y="549391"/>
+                </a:lnTo>
+                <a:lnTo>
+                  <a:pt x="418094" y="533967"/>
+                </a:lnTo>
+                <a:lnTo>
+                  <a:pt x="377704" y="516405"/>
+                </a:lnTo>
+                <a:lnTo>
+                  <a:pt x="338289" y="496753"/>
+                </a:lnTo>
+                <a:lnTo>
+                  <a:pt x="299956" y="475066"/>
+                </a:lnTo>
+                <a:lnTo>
+                  <a:pt x="262811" y="451402"/>
+                </a:lnTo>
+                <a:lnTo>
+                  <a:pt x="226955" y="425826"/>
+                </a:lnTo>
+                <a:lnTo>
+                  <a:pt x="192487" y="398409"/>
+                </a:lnTo>
+                <a:lnTo>
+                  <a:pt x="159501" y="369225"/>
+                </a:lnTo>
+                <a:lnTo>
+                  <a:pt x="128088" y="338355"/>
+                </a:lnTo>
+                <a:lnTo>
+                  <a:pt x="98333" y="305884"/>
+                </a:lnTo>
+                <a:lnTo>
+                  <a:pt x="70318" y="271899"/>
+                </a:lnTo>
+                <a:lnTo>
+                  <a:pt x="52443" y="230668"/>
+                </a:lnTo>
+                <a:lnTo>
+                  <a:pt x="37044" y="189001"/>
+                </a:lnTo>
+                <a:lnTo>
+                  <a:pt x="24117" y="147043"/>
+                </a:lnTo>
+                <a:lnTo>
+                  <a:pt x="13649" y="104939"/>
+                </a:lnTo>
+                <a:lnTo>
+                  <a:pt x="5620" y="62828"/>
+                </a:lnTo>
+                <a:lnTo>
+                  <a:pt x="0" y="20850"/>
+                </a:lnTo>
+                <a:lnTo>
+                  <a:pt x="57284" y="0"/>
+                </a:lnTo>
+                <a:lnTo>
+                  <a:pt x="80438" y="31069"/>
+                </a:lnTo>
+                <a:lnTo>
+                  <a:pt x="104967" y="60400"/>
+                </a:lnTo>
+                <a:lnTo>
+                  <a:pt x="130751" y="87935"/>
+                </a:lnTo>
+                <a:lnTo>
+                  <a:pt x="157671" y="113625"/>
+                </a:lnTo>
+                <a:lnTo>
+                  <a:pt x="185605" y="137427"/>
+                </a:lnTo>
+                <a:lnTo>
+                  <a:pt x="214430" y="159307"/>
+                </a:lnTo>
+                <a:lnTo>
+                  <a:pt x="236354" y="185904"/>
+                </a:lnTo>
+                <a:lnTo>
+                  <a:pt x="259641" y="211316"/>
+                </a:lnTo>
+                <a:lnTo>
+                  <a:pt x="284225" y="235475"/>
+                </a:lnTo>
+                <a:lnTo>
+                  <a:pt x="310040" y="258314"/>
+                </a:lnTo>
+                <a:lnTo>
+                  <a:pt x="337015" y="279771"/>
+                </a:lnTo>
+                <a:lnTo>
+                  <a:pt x="365076" y="299787"/>
+                </a:lnTo>
+                <a:lnTo>
+                  <a:pt x="394146" y="318307"/>
+                </a:lnTo>
+                <a:lnTo>
+                  <a:pt x="424146" y="335280"/>
+                </a:lnTo>
+                <a:lnTo>
+                  <a:pt x="454993" y="350659"/>
+                </a:lnTo>
+                <a:lnTo>
+                  <a:pt x="486602" y="364404"/>
+                </a:lnTo>
+                <a:lnTo>
+                  <a:pt x="518887" y="376475"/>
+                </a:lnTo>
+                <a:lnTo>
+                  <a:pt x="551760" y="386839"/>
+                </a:lnTo>
+                <a:lnTo>
+                  <a:pt x="585130" y="395469"/>
+                </a:lnTo>
+                <a:lnTo>
+                  <a:pt x="618906" y="402341"/>
+                </a:lnTo>
+                <a:lnTo>
+                  <a:pt x="652996" y="407436"/>
+                </a:lnTo>
+                <a:lnTo>
+                  <a:pt x="687305" y="410740"/>
+                </a:lnTo>
+                <a:lnTo>
+                  <a:pt x="721741" y="412243"/>
+                </a:lnTo>
+                <a:lnTo>
+                  <a:pt x="756208" y="411942"/>
+                </a:lnTo>
+                <a:lnTo>
+                  <a:pt x="790611" y="409838"/>
+                </a:lnTo>
+                <a:lnTo>
+                  <a:pt x="824858" y="405936"/>
+                </a:lnTo>
+                <a:lnTo>
+                  <a:pt x="858853" y="400247"/>
+                </a:lnTo>
+                <a:lnTo>
+                  <a:pt x="892505" y="392787"/>
+                </a:lnTo>
+                <a:lnTo>
+                  <a:pt x="925719" y="383576"/>
+                </a:lnTo>
+                <a:lnTo>
+                  <a:pt x="958406" y="372639"/>
+                </a:lnTo>
+                <a:lnTo>
+                  <a:pt x="990476" y="360006"/>
+                </a:lnTo>
+                <a:lnTo>
+                  <a:pt x="1021840" y="345713"/>
+                </a:lnTo>
+                <a:lnTo>
+                  <a:pt x="1052414" y="329797"/>
+                </a:lnTo>
+                <a:lnTo>
+                  <a:pt x="1082113" y="312303"/>
+                </a:lnTo>
+                <a:lnTo>
+                  <a:pt x="1110855" y="293279"/>
+                </a:lnTo>
+                <a:lnTo>
+                  <a:pt x="1138563" y="272776"/>
+                </a:lnTo>
+                <a:lnTo>
+                  <a:pt x="1165159" y="250852"/>
+                </a:lnTo>
+                <a:lnTo>
+                  <a:pt x="1190572" y="227566"/>
+                </a:lnTo>
+                <a:lnTo>
+                  <a:pt x="1214731" y="202981"/>
+                </a:lnTo>
+                <a:lnTo>
+                  <a:pt x="1237570" y="177166"/>
+                </a:lnTo>
+                <a:close/>
+              </a:path>
+            </a:pathLst>
+          </a:custGeom>
+          <a:solidFill>
+            <a:srgbClr val="D7C7E3"/>
+          </a:solidFill>
+          <a:ln w="19050">
+            <a:solidFill>
+              <a:srgbClr val="7A5C8E"/>
+            </a:solidFill>
+            <a:prstDash val="solid"/>
+          </a:ln>
+        </p:spPr>
+      </p:sp>
+      <p:sp>
+        <p:nvSpPr>
+          <p:cNvPr id="161" name="Macrophage body"/>
+          <p:cNvSpPr/>
+          <p:nvPr/>
+        </p:nvSpPr>
+        <p:spPr>
+          <a:xfrm>
+            <a:off x="9908726" y="2118391"/>
+            <a:ext cx="1491028" cy="1769454"/>
+          </a:xfrm>
+          <a:custGeom>
+            <a:avLst/>
+            <a:gdLst/>
+            <a:ahLst/>
+            <a:cxnLst/>
+            <a:rect l="l" t="t" r="r" b="b"/>
+            <a:pathLst>
+              <a:path w="1491028" h="1769454">
+                <a:moveTo>
+                  <a:pt x="1479875" y="944849"/>
+                </a:moveTo>
+                <a:lnTo>
+                  <a:pt x="1488395" y="994019"/>
+                </a:lnTo>
+                <a:lnTo>
+                  <a:pt x="1491028" y="1043788"/>
+                </a:lnTo>
+                <a:lnTo>
+                  <a:pt x="1486819" y="1093152"/>
+                </a:lnTo>
+                <a:lnTo>
+                  <a:pt x="1475475" y="1141013"/>
+                </a:lnTo>
+                <a:lnTo>
+                  <a:pt x="1457467" y="1186403"/>
+                </a:lnTo>
+                <a:lnTo>
+                  <a:pt x="1433976" y="1228698"/>
+                </a:lnTo>
+                <a:lnTo>
+                  <a:pt x="1406719" y="1267767"/>
+                </a:lnTo>
+                <a:lnTo>
+                  <a:pt x="1377668" y="1304029"/>
+                </a:lnTo>
+                <a:lnTo>
+                  <a:pt x="1348723" y="1338386"/>
+                </a:lnTo>
+                <a:lnTo>
+                  <a:pt x="1321401" y="1372039"/>
+                </a:lnTo>
+                <a:lnTo>
+                  <a:pt x="1296601" y="1406231"/>
+                </a:lnTo>
+                <a:lnTo>
+                  <a:pt x="1274483" y="1441949"/>
+                </a:lnTo>
+                <a:lnTo>
+                  <a:pt x="1254488" y="1479676"/>
+                </a:lnTo>
+                <a:lnTo>
+                  <a:pt x="1235493" y="1519216"/>
+                </a:lnTo>
+                <a:lnTo>
+                  <a:pt x="1216055" y="1559666"/>
+                </a:lnTo>
+                <a:lnTo>
+                  <a:pt x="1194710" y="1599522"/>
+                </a:lnTo>
+                <a:lnTo>
+                  <a:pt x="1170257" y="1636924"/>
+                </a:lnTo>
+                <a:lnTo>
+                  <a:pt x="1141967" y="1669979"/>
+                </a:lnTo>
+                <a:lnTo>
+                  <a:pt x="1109702" y="1697108"/>
+                </a:lnTo>
+                <a:lnTo>
+                  <a:pt x="1073896" y="1717350"/>
+                </a:lnTo>
+                <a:lnTo>
+                  <a:pt x="1035438" y="1730551"/>
+                </a:lnTo>
+                <a:lnTo>
+                  <a:pt x="995467" y="1737406"/>
+                </a:lnTo>
+                <a:lnTo>
+                  <a:pt x="955139" y="1739347"/>
+                </a:lnTo>
+                <a:lnTo>
+                  <a:pt x="915410" y="1738279"/>
+                </a:lnTo>
+                <a:lnTo>
+                  <a:pt x="876886" y="1736246"/>
+                </a:lnTo>
+                <a:lnTo>
+                  <a:pt x="839758" y="1735062"/>
+                </a:lnTo>
+                <a:lnTo>
+                  <a:pt x="803835" y="1735997"/>
+                </a:lnTo>
+                <a:lnTo>
+                  <a:pt x="768655" y="1739583"/>
+                </a:lnTo>
+                <a:lnTo>
+                  <a:pt x="733652" y="1745557"/>
+                </a:lnTo>
+                <a:lnTo>
+                  <a:pt x="698314" y="1752969"/>
+                </a:lnTo>
+                <a:lnTo>
+                  <a:pt x="662321" y="1760418"/>
+                </a:lnTo>
+                <a:lnTo>
+                  <a:pt x="625603" y="1766364"/>
+                </a:lnTo>
+                <a:lnTo>
+                  <a:pt x="588331" y="1769454"/>
+                </a:lnTo>
+                <a:lnTo>
+                  <a:pt x="550833" y="1768789"/>
+                </a:lnTo>
+                <a:lnTo>
+                  <a:pt x="513462" y="1764078"/>
+                </a:lnTo>
+                <a:lnTo>
+                  <a:pt x="476465" y="1755651"/>
+                </a:lnTo>
+                <a:lnTo>
+                  <a:pt x="439879" y="1744328"/>
+                </a:lnTo>
+                <a:lnTo>
+                  <a:pt x="403493" y="1731186"/>
+                </a:lnTo>
+                <a:lnTo>
+                  <a:pt x="366893" y="1717258"/>
+                </a:lnTo>
+                <a:lnTo>
+                  <a:pt x="329583" y="1703258"/>
+                </a:lnTo>
+                <a:lnTo>
+                  <a:pt x="291158" y="1689370"/>
+                </a:lnTo>
+                <a:lnTo>
+                  <a:pt x="251489" y="1675164"/>
+                </a:lnTo>
+                <a:lnTo>
+                  <a:pt x="210877" y="1659646"/>
+                </a:lnTo>
+                <a:lnTo>
+                  <a:pt x="170130" y="1641445"/>
+                </a:lnTo>
+                <a:lnTo>
+                  <a:pt x="130532" y="1619089"/>
+                </a:lnTo>
+                <a:lnTo>
+                  <a:pt x="93706" y="1591313"/>
+                </a:lnTo>
+                <a:lnTo>
+                  <a:pt x="61383" y="1557333"/>
+                </a:lnTo>
+                <a:lnTo>
+                  <a:pt x="35114" y="1517037"/>
+                </a:lnTo>
+                <a:lnTo>
+                  <a:pt x="15992" y="1471036"/>
+                </a:lnTo>
+                <a:lnTo>
+                  <a:pt x="4421" y="1420584"/>
+                </a:lnTo>
+                <a:lnTo>
+                  <a:pt x="0" y="1367371"/>
+                </a:lnTo>
+                <a:lnTo>
+                  <a:pt x="1542" y="1313238"/>
+                </a:lnTo>
+                <a:lnTo>
+                  <a:pt x="7230" y="1259871"/>
+                </a:lnTo>
+                <a:lnTo>
+                  <a:pt x="14896" y="1208540"/>
+                </a:lnTo>
+                <a:lnTo>
+                  <a:pt x="22360" y="1159930"/>
+                </a:lnTo>
+                <a:lnTo>
+                  <a:pt x="27779" y="1114099"/>
+                </a:lnTo>
+                <a:lnTo>
+                  <a:pt x="29939" y="1070558"/>
+                </a:lnTo>
+                <a:lnTo>
+                  <a:pt x="28429" y="1028458"/>
+                </a:lnTo>
+                <a:lnTo>
+                  <a:pt x="23678" y="986834"/>
+                </a:lnTo>
+                <a:lnTo>
+                  <a:pt x="16835" y="944849"/>
+                </a:lnTo>
+                <a:lnTo>
+                  <a:pt x="9532" y="901983"/>
+                </a:lnTo>
+                <a:lnTo>
+                  <a:pt x="3564" y="858136"/>
+                </a:lnTo>
+                <a:lnTo>
+                  <a:pt x="562" y="813614"/>
+                </a:lnTo>
+                <a:lnTo>
+                  <a:pt x="1709" y="769018"/>
+                </a:lnTo>
+                <a:lnTo>
+                  <a:pt x="7563" y="725059"/>
+                </a:lnTo>
+                <a:lnTo>
+                  <a:pt x="18006" y="682357"/>
+                </a:lnTo>
+                <a:lnTo>
+                  <a:pt x="32334" y="641269"/>
+                </a:lnTo>
+                <a:lnTo>
+                  <a:pt x="49451" y="601789"/>
+                </a:lnTo>
+                <a:lnTo>
+                  <a:pt x="68131" y="563549"/>
+                </a:lnTo>
+                <a:lnTo>
+                  <a:pt x="87290" y="525928"/>
+                </a:lnTo>
+                <a:lnTo>
+                  <a:pt x="106201" y="488228"/>
+                </a:lnTo>
+                <a:lnTo>
+                  <a:pt x="124630" y="449891"/>
+                </a:lnTo>
+                <a:lnTo>
+                  <a:pt x="142841" y="410696"/>
+                </a:lnTo>
+                <a:lnTo>
+                  <a:pt x="161509" y="370881"/>
+                </a:lnTo>
+                <a:lnTo>
+                  <a:pt x="181529" y="331167"/>
+                </a:lnTo>
+                <a:lnTo>
+                  <a:pt x="203800" y="292658"/>
+                </a:lnTo>
+                <a:lnTo>
+                  <a:pt x="229009" y="256641"/>
+                </a:lnTo>
+                <a:lnTo>
+                  <a:pt x="257478" y="224323"/>
+                </a:lnTo>
+                <a:lnTo>
+                  <a:pt x="289099" y="196563"/>
+                </a:lnTo>
+                <a:lnTo>
+                  <a:pt x="323371" y="173662"/>
+                </a:lnTo>
+                <a:lnTo>
+                  <a:pt x="359520" y="155255"/>
+                </a:lnTo>
+                <a:lnTo>
+                  <a:pt x="396684" y="140349"/>
+                </a:lnTo>
+                <a:lnTo>
+                  <a:pt x="434102" y="127498"/>
+                </a:lnTo>
+                <a:lnTo>
+                  <a:pt x="471278" y="115088"/>
+                </a:lnTo>
+                <a:lnTo>
+                  <a:pt x="508061" y="101685"/>
+                </a:lnTo>
+                <a:lnTo>
+                  <a:pt x="544651" y="86370"/>
+                </a:lnTo>
+                <a:lnTo>
+                  <a:pt x="581495" y="68987"/>
+                </a:lnTo>
+                <a:lnTo>
+                  <a:pt x="619135" y="50262"/>
+                </a:lnTo>
+                <a:lnTo>
+                  <a:pt x="658016" y="31749"/>
+                </a:lnTo>
+                <a:lnTo>
+                  <a:pt x="698314" y="15609"/>
+                </a:lnTo>
+                <a:lnTo>
+                  <a:pt x="739824" y="4269"/>
+                </a:lnTo>
+                <a:lnTo>
+                  <a:pt x="781941" y="0"/>
+                </a:lnTo>
+                <a:lnTo>
+                  <a:pt x="823731" y="4524"/>
+                </a:lnTo>
+                <a:lnTo>
+                  <a:pt x="864091" y="18692"/>
+                </a:lnTo>
+                <a:lnTo>
+                  <a:pt x="901962" y="42317"/>
+                </a:lnTo>
+                <a:lnTo>
+                  <a:pt x="936541" y="74187"/>
+                </a:lnTo>
+                <a:lnTo>
+                  <a:pt x="967456" y="112246"/>
+                </a:lnTo>
+                <a:lnTo>
+                  <a:pt x="994853" y="153928"/>
+                </a:lnTo>
+                <a:lnTo>
+                  <a:pt x="1019387" y="196555"/>
+                </a:lnTo>
+                <a:lnTo>
+                  <a:pt x="1042098" y="237750"/>
+                </a:lnTo>
+                <a:lnTo>
+                  <a:pt x="1064213" y="275770"/>
+                </a:lnTo>
+                <a:lnTo>
+                  <a:pt x="1086906" y="309713"/>
+                </a:lnTo>
+                <a:lnTo>
+                  <a:pt x="1111071" y="339565"/>
+                </a:lnTo>
+                <a:lnTo>
+                  <a:pt x="1137150" y="366089"/>
+                </a:lnTo>
+                <a:lnTo>
+                  <a:pt x="1165058" y="390590"/>
+                </a:lnTo>
+                <a:lnTo>
+                  <a:pt x="1194224" y="414607"/>
+                </a:lnTo>
+                <a:lnTo>
+                  <a:pt x="1223727" y="439602"/>
+                </a:lnTo>
+                <a:lnTo>
+                  <a:pt x="1252509" y="466706"/>
+                </a:lnTo>
+                <a:lnTo>
+                  <a:pt x="1279609" y="496570"/>
+                </a:lnTo>
+                <a:lnTo>
+                  <a:pt x="1304369" y="529335"/>
+                </a:lnTo>
+                <a:lnTo>
+                  <a:pt x="1326565" y="564718"/>
+                </a:lnTo>
+                <a:lnTo>
+                  <a:pt x="1346432" y="602183"/>
+                </a:lnTo>
+                <a:lnTo>
+                  <a:pt x="1364576" y="641141"/>
+                </a:lnTo>
+                <a:lnTo>
+                  <a:pt x="1381794" y="681133"/>
+                </a:lnTo>
+                <a:lnTo>
+                  <a:pt x="1398832" y="721951"/>
+                </a:lnTo>
+                <a:lnTo>
+                  <a:pt x="1416151" y="763659"/>
+                </a:lnTo>
+                <a:lnTo>
+                  <a:pt x="1433737" y="806529"/>
+                </a:lnTo>
+                <a:lnTo>
+                  <a:pt x="1451015" y="850903"/>
+                </a:lnTo>
+                <a:lnTo>
+                  <a:pt x="1466885" y="897017"/>
+                </a:lnTo>
+                <a:close/>
+              </a:path>
+            </a:pathLst>
+          </a:custGeom>
+          <a:solidFill>
+            <a:srgbClr val="D7C7E3"/>
+          </a:solidFill>
+          <a:ln w="19050">
+            <a:solidFill>
+              <a:srgbClr val="7A5C8E"/>
+            </a:solidFill>
+            <a:prstDash val="solid"/>
+          </a:ln>
+        </p:spPr>
+      </p:sp>
+      <p:sp>
+        <p:nvSpPr>
+          <p:cNvPr id="162" name="Macrophage nucleus"/>
+          <p:cNvSpPr/>
+          <p:nvPr/>
+        </p:nvSpPr>
+        <p:spPr>
+          <a:xfrm rot="-720000">
+            <a:off x="10440275" y="2430965"/>
+            <a:ext cx="662603" cy="364625"/>
+          </a:xfrm>
+          <a:custGeom>
+            <a:avLst/>
+            <a:gdLst/>
+            <a:ahLst/>
+            <a:cxnLst/>
+            <a:rect l="l" t="t" r="r" b="b"/>
+            <a:pathLst>
+              <a:path w="662603" h="364625">
+                <a:moveTo>
+                  <a:pt x="660491" y="202507"/>
+                </a:moveTo>
+                <a:lnTo>
+                  <a:pt x="662059" y="213099"/>
+                </a:lnTo>
+                <a:lnTo>
+                  <a:pt x="662603" y="223783"/>
+                </a:lnTo>
+                <a:lnTo>
+                  <a:pt x="662020" y="234512"/>
+                </a:lnTo>
+                <a:lnTo>
+                  <a:pt x="660217" y="245225"/>
+                </a:lnTo>
+                <a:lnTo>
+                  <a:pt x="657120" y="255850"/>
+                </a:lnTo>
+                <a:lnTo>
+                  <a:pt x="652677" y="266309"/>
+                </a:lnTo>
+                <a:lnTo>
+                  <a:pt x="646855" y="276518"/>
+                </a:lnTo>
+                <a:lnTo>
+                  <a:pt x="639651" y="286389"/>
+                </a:lnTo>
+                <a:lnTo>
+                  <a:pt x="631081" y="295834"/>
+                </a:lnTo>
+                <a:lnTo>
+                  <a:pt x="621190" y="304768"/>
+                </a:lnTo>
+                <a:lnTo>
+                  <a:pt x="610045" y="313107"/>
+                </a:lnTo>
+                <a:lnTo>
+                  <a:pt x="597734" y="320778"/>
+                </a:lnTo>
+                <a:lnTo>
+                  <a:pt x="584366" y="327713"/>
+                </a:lnTo>
+                <a:lnTo>
+                  <a:pt x="570067" y="333856"/>
+                </a:lnTo>
+                <a:lnTo>
+                  <a:pt x="554981" y="339166"/>
+                </a:lnTo>
+                <a:lnTo>
+                  <a:pt x="539266" y="343616"/>
+                </a:lnTo>
+                <a:lnTo>
+                  <a:pt x="523092" y="347201"/>
+                </a:lnTo>
+                <a:lnTo>
+                  <a:pt x="506636" y="349938"/>
+                </a:lnTo>
+                <a:lnTo>
+                  <a:pt x="490078" y="351868"/>
+                </a:lnTo>
+                <a:lnTo>
+                  <a:pt x="473595" y="353062"/>
+                </a:lnTo>
+                <a:lnTo>
+                  <a:pt x="457349" y="353618"/>
+                </a:lnTo>
+                <a:lnTo>
+                  <a:pt x="441480" y="353659"/>
+                </a:lnTo>
+                <a:lnTo>
+                  <a:pt x="426097" y="353332"/>
+                </a:lnTo>
+                <a:lnTo>
+                  <a:pt x="411265" y="352798"/>
+                </a:lnTo>
+                <a:lnTo>
+                  <a:pt x="397002" y="352222"/>
+                </a:lnTo>
+                <a:lnTo>
+                  <a:pt x="383272" y="351765"/>
+                </a:lnTo>
+                <a:lnTo>
+                  <a:pt x="369990" y="351566"/>
+                </a:lnTo>
+                <a:lnTo>
+                  <a:pt x="357023" y="351734"/>
+                </a:lnTo>
+                <a:lnTo>
+                  <a:pt x="344206" y="352335"/>
+                </a:lnTo>
+                <a:lnTo>
+                  <a:pt x="331357" y="353383"/>
+                </a:lnTo>
+                <a:lnTo>
+                  <a:pt x="318294" y="354841"/>
+                </a:lnTo>
+                <a:lnTo>
+                  <a:pt x="304852" y="356617"/>
+                </a:lnTo>
+                <a:lnTo>
+                  <a:pt x="290909" y="358573"/>
+                </a:lnTo>
+                <a:lnTo>
+                  <a:pt x="276391" y="360539"/>
+                </a:lnTo>
+                <a:lnTo>
+                  <a:pt x="261286" y="362319"/>
+                </a:lnTo>
+                <a:lnTo>
+                  <a:pt x="245645" y="363715"/>
+                </a:lnTo>
+                <a:lnTo>
+                  <a:pt x="229579" y="364539"/>
+                </a:lnTo>
+                <a:lnTo>
+                  <a:pt x="213245" y="364625"/>
+                </a:lnTo>
+                <a:lnTo>
+                  <a:pt x="196838" y="363846"/>
+                </a:lnTo>
+                <a:lnTo>
+                  <a:pt x="180567" y="362115"/>
+                </a:lnTo>
+                <a:lnTo>
+                  <a:pt x="164642" y="359391"/>
+                </a:lnTo>
+                <a:lnTo>
+                  <a:pt x="149255" y="355677"/>
+                </a:lnTo>
+                <a:lnTo>
+                  <a:pt x="134568" y="351017"/>
+                </a:lnTo>
+                <a:lnTo>
+                  <a:pt x="120701" y="345481"/>
+                </a:lnTo>
+                <a:lnTo>
+                  <a:pt x="107734" y="339166"/>
+                </a:lnTo>
+                <a:lnTo>
+                  <a:pt x="95700" y="332177"/>
+                </a:lnTo>
+                <a:lnTo>
+                  <a:pt x="84592" y="324623"/>
+                </a:lnTo>
+                <a:lnTo>
+                  <a:pt x="74373" y="316608"/>
+                </a:lnTo>
+                <a:lnTo>
+                  <a:pt x="64980" y="308222"/>
+                </a:lnTo>
+                <a:lnTo>
+                  <a:pt x="56338" y="299541"/>
+                </a:lnTo>
+                <a:lnTo>
+                  <a:pt x="48371" y="290623"/>
+                </a:lnTo>
+                <a:lnTo>
+                  <a:pt x="41009" y="281506"/>
+                </a:lnTo>
+                <a:lnTo>
+                  <a:pt x="34198" y="272216"/>
+                </a:lnTo>
+                <a:lnTo>
+                  <a:pt x="27903" y="262762"/>
+                </a:lnTo>
+                <a:lnTo>
+                  <a:pt x="22117" y="253144"/>
+                </a:lnTo>
+                <a:lnTo>
+                  <a:pt x="16855" y="243360"/>
+                </a:lnTo>
+                <a:lnTo>
+                  <a:pt x="12162" y="233402"/>
+                </a:lnTo>
+                <a:lnTo>
+                  <a:pt x="8101" y="223270"/>
+                </a:lnTo>
+                <a:lnTo>
+                  <a:pt x="4756" y="212967"/>
+                </a:lnTo>
+                <a:lnTo>
+                  <a:pt x="2224" y="202507"/>
+                </a:lnTo>
+                <a:lnTo>
+                  <a:pt x="604" y="191914"/>
+                </a:lnTo>
+                <a:lnTo>
+                  <a:pt x="0" y="181224"/>
+                </a:lnTo>
+                <a:lnTo>
+                  <a:pt x="503" y="170484"/>
+                </a:lnTo>
+                <a:lnTo>
+                  <a:pt x="2194" y="159750"/>
+                </a:lnTo>
+                <a:lnTo>
+                  <a:pt x="5132" y="149089"/>
+                </a:lnTo>
+                <a:lnTo>
+                  <a:pt x="9354" y="138570"/>
+                </a:lnTo>
+                <a:lnTo>
+                  <a:pt x="14870" y="128264"/>
+                </a:lnTo>
+                <a:lnTo>
+                  <a:pt x="21661" y="118244"/>
+                </a:lnTo>
+                <a:lnTo>
+                  <a:pt x="29684" y="108573"/>
+                </a:lnTo>
+                <a:lnTo>
+                  <a:pt x="38869" y="99310"/>
+                </a:lnTo>
+                <a:lnTo>
+                  <a:pt x="49126" y="90501"/>
+                </a:lnTo>
+                <a:lnTo>
+                  <a:pt x="60346" y="82179"/>
+                </a:lnTo>
+                <a:lnTo>
+                  <a:pt x="72412" y="74363"/>
+                </a:lnTo>
+                <a:lnTo>
+                  <a:pt x="85200" y="67060"/>
+                </a:lnTo>
+                <a:lnTo>
+                  <a:pt x="98589" y="60260"/>
+                </a:lnTo>
+                <a:lnTo>
+                  <a:pt x="112464" y="53943"/>
+                </a:lnTo>
+                <a:lnTo>
+                  <a:pt x="126723" y="48078"/>
+                </a:lnTo>
+                <a:lnTo>
+                  <a:pt x="141280" y="42629"/>
+                </a:lnTo>
+                <a:lnTo>
+                  <a:pt x="156068" y="37555"/>
+                </a:lnTo>
+                <a:lnTo>
+                  <a:pt x="171042" y="32817"/>
+                </a:lnTo>
+                <a:lnTo>
+                  <a:pt x="186175" y="28379"/>
+                </a:lnTo>
+                <a:lnTo>
+                  <a:pt x="201461" y="24214"/>
+                </a:lnTo>
+                <a:lnTo>
+                  <a:pt x="216908" y="20304"/>
+                </a:lnTo>
+                <a:lnTo>
+                  <a:pt x="232536" y="16644"/>
+                </a:lnTo>
+                <a:lnTo>
+                  <a:pt x="248372" y="13242"/>
+                </a:lnTo>
+                <a:lnTo>
+                  <a:pt x="264442" y="10122"/>
+                </a:lnTo>
+                <a:lnTo>
+                  <a:pt x="280770" y="7320"/>
+                </a:lnTo>
+                <a:lnTo>
+                  <a:pt x="297368" y="4882"/>
+                </a:lnTo>
+                <a:lnTo>
+                  <a:pt x="314237" y="2868"/>
+                </a:lnTo>
+                <a:lnTo>
+                  <a:pt x="331357" y="1339"/>
+                </a:lnTo>
+                <a:lnTo>
+                  <a:pt x="348693" y="362"/>
+                </a:lnTo>
+                <a:lnTo>
+                  <a:pt x="366186" y="0"/>
+                </a:lnTo>
+                <a:lnTo>
+                  <a:pt x="383761" y="312"/>
+                </a:lnTo>
+                <a:lnTo>
+                  <a:pt x="401324" y="1348"/>
+                </a:lnTo>
+                <a:lnTo>
+                  <a:pt x="418770" y="3145"/>
+                </a:lnTo>
+                <a:lnTo>
+                  <a:pt x="435983" y="5726"/>
+                </a:lnTo>
+                <a:lnTo>
+                  <a:pt x="452846" y="9097"/>
+                </a:lnTo>
+                <a:lnTo>
+                  <a:pt x="469243" y="13248"/>
+                </a:lnTo>
+                <a:lnTo>
+                  <a:pt x="485068" y="18151"/>
+                </a:lnTo>
+                <a:lnTo>
+                  <a:pt x="500226" y="23764"/>
+                </a:lnTo>
+                <a:lnTo>
+                  <a:pt x="514641" y="30032"/>
+                </a:lnTo>
+                <a:lnTo>
+                  <a:pt x="528259" y="36889"/>
+                </a:lnTo>
+                <a:lnTo>
+                  <a:pt x="541047" y="44263"/>
+                </a:lnTo>
+                <a:lnTo>
+                  <a:pt x="552998" y="52078"/>
+                </a:lnTo>
+                <a:lnTo>
+                  <a:pt x="564126" y="60260"/>
+                </a:lnTo>
+                <a:lnTo>
+                  <a:pt x="574463" y="68739"/>
+                </a:lnTo>
+                <a:lnTo>
+                  <a:pt x="584060" y="77453"/>
+                </a:lnTo>
+                <a:lnTo>
+                  <a:pt x="592977" y="86349"/>
+                </a:lnTo>
+                <a:lnTo>
+                  <a:pt x="601279" y="95386"/>
+                </a:lnTo>
+                <a:lnTo>
+                  <a:pt x="609032" y="104536"/>
+                </a:lnTo>
+                <a:lnTo>
+                  <a:pt x="616294" y="113785"/>
+                </a:lnTo>
+                <a:lnTo>
+                  <a:pt x="623110" y="123126"/>
+                </a:lnTo>
+                <a:lnTo>
+                  <a:pt x="629508" y="132566"/>
+                </a:lnTo>
+                <a:lnTo>
+                  <a:pt x="635498" y="142117"/>
+                </a:lnTo>
+                <a:lnTo>
+                  <a:pt x="641064" y="151794"/>
+                </a:lnTo>
+                <a:lnTo>
+                  <a:pt x="646169" y="161614"/>
+                </a:lnTo>
+                <a:lnTo>
+                  <a:pt x="650755" y="171593"/>
+                </a:lnTo>
+                <a:lnTo>
+                  <a:pt x="654743" y="181736"/>
+                </a:lnTo>
+                <a:lnTo>
+                  <a:pt x="658040" y="192045"/>
+                </a:lnTo>
+                <a:close/>
+              </a:path>
+            </a:pathLst>
+          </a:custGeom>
+          <a:solidFill>
+            <a:srgbClr val="6E4A85"/>
+          </a:solidFill>
+          <a:ln/>
+        </p:spPr>
+      </p:sp>
+      <p:sp>
+        <p:nvSpPr>
+          <p:cNvPr id="163" name="Phagosome"/>
+          <p:cNvSpPr/>
+          <p:nvPr/>
+        </p:nvSpPr>
+        <p:spPr>
+          <a:xfrm>
+            <a:off x="10469880" y="3154680"/>
+            <a:ext cx="621792" cy="548640"/>
+          </a:xfrm>
+          <a:prstGeom prst="ellipse">
+            <a:avLst/>
+          </a:prstGeom>
+          <a:solidFill>
+            <a:srgbClr val="F3EDF7"/>
+          </a:solidFill>
+          <a:ln w="12700">
+            <a:solidFill>
+              <a:srgbClr val="7A5C8E"/>
+            </a:solidFill>
+            <a:prstDash val="dash"/>
+          </a:ln>
+        </p:spPr>
+      </p:sp>
+      <p:sp>
+        <p:nvSpPr>
+          <p:cNvPr id="164" name="Digested RBC"/>
+          <p:cNvSpPr/>
+          <p:nvPr/>
+        </p:nvSpPr>
+        <p:spPr>
+          <a:xfrm>
+            <a:off x="10589491" y="3256178"/>
+            <a:ext cx="397549" cy="329930"/>
+          </a:xfrm>
+          <a:custGeom>
+            <a:avLst/>
+            <a:gdLst/>
+            <a:ahLst/>
+            <a:cxnLst/>
+            <a:rect l="l" t="t" r="r" b="b"/>
+            <a:pathLst>
+              <a:path w="397549" h="329930">
+                <a:moveTo>
+                  <a:pt x="380807" y="172822"/>
+                </a:moveTo>
+                <a:lnTo>
+                  <a:pt x="389217" y="181466"/>
+                </a:lnTo>
+                <a:lnTo>
+                  <a:pt x="395053" y="190670"/>
+                </a:lnTo>
+                <a:lnTo>
+                  <a:pt x="397549" y="200046"/>
+                </a:lnTo>
+                <a:lnTo>
+                  <a:pt x="396244" y="209127"/>
+                </a:lnTo>
+                <a:lnTo>
+                  <a:pt x="391056" y="217429"/>
+                </a:lnTo>
+                <a:lnTo>
+                  <a:pt x="382291" y="224540"/>
+                </a:lnTo>
+                <a:lnTo>
+                  <a:pt x="370609" y="230185"/>
+                </a:lnTo>
+                <a:lnTo>
+                  <a:pt x="356936" y="234283"/>
+                </a:lnTo>
+                <a:lnTo>
+                  <a:pt x="342344" y="236962"/>
+                </a:lnTo>
+                <a:lnTo>
+                  <a:pt x="327909" y="238556"/>
+                </a:lnTo>
+                <a:lnTo>
+                  <a:pt x="314582" y="239547"/>
+                </a:lnTo>
+                <a:lnTo>
+                  <a:pt x="303074" y="240505"/>
+                </a:lnTo>
+                <a:lnTo>
+                  <a:pt x="293784" y="241991"/>
+                </a:lnTo>
+                <a:lnTo>
+                  <a:pt x="286778" y="244474"/>
+                </a:lnTo>
+                <a:lnTo>
+                  <a:pt x="281811" y="248261"/>
+                </a:lnTo>
+                <a:lnTo>
+                  <a:pt x="278395" y="253444"/>
+                </a:lnTo>
+                <a:lnTo>
+                  <a:pt x="275894" y="259892"/>
+                </a:lnTo>
+                <a:lnTo>
+                  <a:pt x="273634" y="267275"/>
+                </a:lnTo>
+                <a:lnTo>
+                  <a:pt x="271005" y="275121"/>
+                </a:lnTo>
+                <a:lnTo>
+                  <a:pt x="267544" y="282893"/>
+                </a:lnTo>
+                <a:lnTo>
+                  <a:pt x="262980" y="290079"/>
+                </a:lnTo>
+                <a:lnTo>
+                  <a:pt x="257244" y="296277"/>
+                </a:lnTo>
+                <a:lnTo>
+                  <a:pt x="250445" y="301253"/>
+                </a:lnTo>
+                <a:lnTo>
+                  <a:pt x="242812" y="304977"/>
+                </a:lnTo>
+                <a:lnTo>
+                  <a:pt x="234625" y="307612"/>
+                </a:lnTo>
+                <a:lnTo>
+                  <a:pt x="226143" y="309483"/>
+                </a:lnTo>
+                <a:lnTo>
+                  <a:pt x="217547" y="310999"/>
+                </a:lnTo>
+                <a:lnTo>
+                  <a:pt x="208911" y="312573"/>
+                </a:lnTo>
+                <a:lnTo>
+                  <a:pt x="200197" y="314530"/>
+                </a:lnTo>
+                <a:lnTo>
+                  <a:pt x="191285" y="317041"/>
+                </a:lnTo>
+                <a:lnTo>
+                  <a:pt x="182025" y="320069"/>
+                </a:lnTo>
+                <a:lnTo>
+                  <a:pt x="172298" y="323364"/>
+                </a:lnTo>
+                <a:lnTo>
+                  <a:pt x="162079" y="326488"/>
+                </a:lnTo>
+                <a:lnTo>
+                  <a:pt x="151481" y="328876"/>
+                </a:lnTo>
+                <a:lnTo>
+                  <a:pt x="140769" y="329930"/>
+                </a:lnTo>
+                <a:lnTo>
+                  <a:pt x="130349" y="329108"/>
+                </a:lnTo>
+                <a:lnTo>
+                  <a:pt x="120715" y="326024"/>
+                </a:lnTo>
+                <a:lnTo>
+                  <a:pt x="112376" y="320516"/>
+                </a:lnTo>
+                <a:lnTo>
+                  <a:pt x="105767" y="312687"/>
+                </a:lnTo>
+                <a:lnTo>
+                  <a:pt x="101163" y="302902"/>
+                </a:lnTo>
+                <a:lnTo>
+                  <a:pt x="98607" y="291749"/>
+                </a:lnTo>
+                <a:lnTo>
+                  <a:pt x="97875" y="279962"/>
+                </a:lnTo>
+                <a:lnTo>
+                  <a:pt x="98481" y="268325"/>
+                </a:lnTo>
+                <a:lnTo>
+                  <a:pt x="99721" y="257566"/>
+                </a:lnTo>
+                <a:lnTo>
+                  <a:pt x="100759" y="248261"/>
+                </a:lnTo>
+                <a:lnTo>
+                  <a:pt x="100738" y="240763"/>
+                </a:lnTo>
+                <a:lnTo>
+                  <a:pt x="98906" y="235162"/>
+                </a:lnTo>
+                <a:lnTo>
+                  <a:pt x="94720" y="231288"/>
+                </a:lnTo>
+                <a:lnTo>
+                  <a:pt x="87941" y="228749"/>
+                </a:lnTo>
+                <a:lnTo>
+                  <a:pt x="78672" y="227003"/>
+                </a:lnTo>
+                <a:lnTo>
+                  <a:pt x="67355" y="225443"/>
+                </a:lnTo>
+                <a:lnTo>
+                  <a:pt x="54720" y="223491"/>
+                </a:lnTo>
+                <a:lnTo>
+                  <a:pt x="41686" y="220677"/>
+                </a:lnTo>
+                <a:lnTo>
+                  <a:pt x="29237" y="216699"/>
+                </a:lnTo>
+                <a:lnTo>
+                  <a:pt x="18295" y="211449"/>
+                </a:lnTo>
+                <a:lnTo>
+                  <a:pt x="9597" y="205005"/>
+                </a:lnTo>
+                <a:lnTo>
+                  <a:pt x="3607" y="197593"/>
+                </a:lnTo>
+                <a:lnTo>
+                  <a:pt x="467" y="189535"/>
+                </a:lnTo>
+                <a:lnTo>
+                  <a:pt x="0" y="181176"/>
+                </a:lnTo>
+                <a:lnTo>
+                  <a:pt x="1763" y="172822"/>
+                </a:lnTo>
+                <a:lnTo>
+                  <a:pt x="5134" y="164692"/>
+                </a:lnTo>
+                <a:lnTo>
+                  <a:pt x="9423" y="156893"/>
+                </a:lnTo>
+                <a:lnTo>
+                  <a:pt x="13991" y="149422"/>
+                </a:lnTo>
+                <a:lnTo>
+                  <a:pt x="18348" y="142190"/>
+                </a:lnTo>
+                <a:lnTo>
+                  <a:pt x="22227" y="135073"/>
+                </a:lnTo>
+                <a:lnTo>
+                  <a:pt x="25607" y="127962"/>
+                </a:lnTo>
+                <a:lnTo>
+                  <a:pt x="28699" y="120813"/>
+                </a:lnTo>
+                <a:lnTo>
+                  <a:pt x="31886" y="113681"/>
+                </a:lnTo>
+                <a:lnTo>
+                  <a:pt x="35638" y="106734"/>
+                </a:lnTo>
+                <a:lnTo>
+                  <a:pt x="40407" y="100231"/>
+                </a:lnTo>
+                <a:lnTo>
+                  <a:pt x="46532" y="94486"/>
+                </a:lnTo>
+                <a:lnTo>
+                  <a:pt x="54168" y="89804"/>
+                </a:lnTo>
+                <a:lnTo>
+                  <a:pt x="63239" y="86414"/>
+                </a:lnTo>
+                <a:lnTo>
+                  <a:pt x="73444" y="84401"/>
+                </a:lnTo>
+                <a:lnTo>
+                  <a:pt x="84299" y="83667"/>
+                </a:lnTo>
+                <a:lnTo>
+                  <a:pt x="95216" y="83909"/>
+                </a:lnTo>
+                <a:lnTo>
+                  <a:pt x="105592" y="84637"/>
+                </a:lnTo>
+                <a:lnTo>
+                  <a:pt x="114915" y="85227"/>
+                </a:lnTo>
+                <a:lnTo>
+                  <a:pt x="122847" y="85002"/>
+                </a:lnTo>
+                <a:lnTo>
+                  <a:pt x="129280" y="83325"/>
+                </a:lnTo>
+                <a:lnTo>
+                  <a:pt x="134351" y="79706"/>
+                </a:lnTo>
+                <a:lnTo>
+                  <a:pt x="138423" y="73880"/>
+                </a:lnTo>
+                <a:lnTo>
+                  <a:pt x="142019" y="65869"/>
+                </a:lnTo>
+                <a:lnTo>
+                  <a:pt x="145737" y="56003"/>
+                </a:lnTo>
+                <a:lnTo>
+                  <a:pt x="150150" y="44890"/>
+                </a:lnTo>
+                <a:lnTo>
+                  <a:pt x="155712" y="33356"/>
+                </a:lnTo>
+                <a:lnTo>
+                  <a:pt x="162685" y="22344"/>
+                </a:lnTo>
+                <a:lnTo>
+                  <a:pt x="171102" y="12797"/>
+                </a:lnTo>
+                <a:lnTo>
+                  <a:pt x="180765" y="5539"/>
+                </a:lnTo>
+                <a:lnTo>
+                  <a:pt x="191285" y="1171"/>
+                </a:lnTo>
+                <a:lnTo>
+                  <a:pt x="202154" y="0"/>
+                </a:lnTo>
+                <a:lnTo>
+                  <a:pt x="212829" y="2006"/>
+                </a:lnTo>
+                <a:lnTo>
+                  <a:pt x="222829" y="6856"/>
+                </a:lnTo>
+                <a:lnTo>
+                  <a:pt x="231805" y="13963"/>
+                </a:lnTo>
+                <a:lnTo>
+                  <a:pt x="239596" y="22573"/>
+                </a:lnTo>
+                <a:lnTo>
+                  <a:pt x="246242" y="31872"/>
+                </a:lnTo>
+                <a:lnTo>
+                  <a:pt x="251962" y="41099"/>
+                </a:lnTo>
+                <a:lnTo>
+                  <a:pt x="257097" y="49641"/>
+                </a:lnTo>
+                <a:lnTo>
+                  <a:pt x="262042" y="57099"/>
+                </a:lnTo>
+                <a:lnTo>
+                  <a:pt x="267153" y="63316"/>
+                </a:lnTo>
+                <a:lnTo>
+                  <a:pt x="272680" y="68374"/>
+                </a:lnTo>
+                <a:lnTo>
+                  <a:pt x="278716" y="72540"/>
+                </a:lnTo>
+                <a:lnTo>
+                  <a:pt x="285173" y="76204"/>
+                </a:lnTo>
+                <a:lnTo>
+                  <a:pt x="291808" y="79787"/>
+                </a:lnTo>
+                <a:lnTo>
+                  <a:pt x="298271" y="83667"/>
+                </a:lnTo>
+                <a:lnTo>
+                  <a:pt x="304180" y="88113"/>
+                </a:lnTo>
+                <a:lnTo>
+                  <a:pt x="309212" y="93243"/>
+                </a:lnTo>
+                <a:lnTo>
+                  <a:pt x="313178" y="99022"/>
+                </a:lnTo>
+                <a:lnTo>
+                  <a:pt x="316084" y="105284"/>
+                </a:lnTo>
+                <a:lnTo>
+                  <a:pt x="318152" y="111783"/>
+                </a:lnTo>
+                <a:lnTo>
+                  <a:pt x="319803" y="118253"/>
+                </a:lnTo>
+                <a:lnTo>
+                  <a:pt x="321597" y="124473"/>
+                </a:lnTo>
+                <a:lnTo>
+                  <a:pt x="324146" y="130322"/>
+                </a:lnTo>
+                <a:lnTo>
+                  <a:pt x="328005" y="135803"/>
+                </a:lnTo>
+                <a:lnTo>
+                  <a:pt x="333562" y="141053"/>
+                </a:lnTo>
+                <a:lnTo>
+                  <a:pt x="340950" y="146312"/>
+                </a:lnTo>
+                <a:lnTo>
+                  <a:pt x="349993" y="151875"/>
+                </a:lnTo>
+                <a:lnTo>
+                  <a:pt x="360197" y="158028"/>
+                </a:lnTo>
+                <a:lnTo>
+                  <a:pt x="370789" y="164983"/>
+                </a:lnTo>
+                <a:close/>
+              </a:path>
+            </a:pathLst>
+          </a:custGeom>
+          <a:solidFill>
+            <a:srgbClr val="A86A6A"/>
+          </a:solidFill>
+          <a:ln w="9525">
+            <a:solidFill>
+              <a:srgbClr val="7A3B3B"/>
+            </a:solidFill>
+            <a:prstDash val="solid"/>
+          </a:ln>
+        </p:spPr>
+      </p:sp>
+      <p:sp>
+        <p:nvSpPr>
+          <p:cNvPr id="165" name="RBC fragment 1"/>
+          <p:cNvSpPr/>
+          <p:nvPr/>
+        </p:nvSpPr>
+        <p:spPr>
+          <a:xfrm>
+            <a:off x="10561320" y="3291840"/>
+            <a:ext cx="64008" cy="64008"/>
+          </a:xfrm>
+          <a:prstGeom prst="ellipse">
+            <a:avLst/>
+          </a:prstGeom>
+          <a:solidFill>
+            <a:srgbClr val="A86A6A"/>
+          </a:solidFill>
+          <a:ln/>
+        </p:spPr>
+      </p:sp>
+      <p:sp>
+        <p:nvSpPr>
+          <p:cNvPr id="166" name="RBC fragment 2"/>
+          <p:cNvSpPr/>
+          <p:nvPr/>
+        </p:nvSpPr>
+        <p:spPr>
+          <a:xfrm>
+            <a:off x="10954512" y="3273552"/>
+            <a:ext cx="54864" cy="54864"/>
+          </a:xfrm>
+          <a:prstGeom prst="ellipse">
+            <a:avLst/>
+          </a:prstGeom>
+          <a:solidFill>
+            <a:srgbClr val="A86A6A"/>
+          </a:solidFill>
+          <a:ln/>
+        </p:spPr>
+      </p:sp>
+      <p:sp>
+        <p:nvSpPr>
+          <p:cNvPr id="167" name="RBC fragment 3"/>
+          <p:cNvSpPr/>
+          <p:nvPr/>
+        </p:nvSpPr>
+        <p:spPr>
+          <a:xfrm>
+            <a:off x="10607040" y="3547872"/>
+            <a:ext cx="54864" cy="54864"/>
+          </a:xfrm>
+          <a:prstGeom prst="ellipse">
+            <a:avLst/>
+          </a:prstGeom>
+          <a:solidFill>
+            <a:srgbClr val="A86A6A"/>
+          </a:solidFill>
+          <a:ln/>
+        </p:spPr>
+      </p:sp>
+      <p:sp>
+        <p:nvSpPr>
+          <p:cNvPr id="168" name="RBC fragment 4"/>
+          <p:cNvSpPr/>
+          <p:nvPr/>
+        </p:nvSpPr>
+        <p:spPr>
+          <a:xfrm>
+            <a:off x="10972800" y="3529584"/>
+            <a:ext cx="45720" cy="45720"/>
+          </a:xfrm>
+          <a:prstGeom prst="ellipse">
+            <a:avLst/>
+          </a:prstGeom>
+          <a:solidFill>
+            <a:srgbClr val="A86A6A"/>
+          </a:solidFill>
+          <a:ln/>
+        </p:spPr>
+      </p:sp>
+      <p:sp>
+        <p:nvSpPr>
+          <p:cNvPr id="169" name="Macrophage heading"/>
+          <p:cNvSpPr txBox="1"/>
+          <p:nvPr/>
+        </p:nvSpPr>
+        <p:spPr>
+          <a:xfrm>
+            <a:off x="8869680" y="1325880"/>
+            <a:ext cx="2468880" cy="566928"/>
+          </a:xfrm>
+          <a:prstGeom prst="rect">
+            <a:avLst/>
+          </a:prstGeom>
+          <a:noFill/>
+          <a:ln/>
+        </p:spPr>
+        <p:txBody>
+          <a:bodyPr wrap="square" lIns="0" tIns="0" rIns="0" bIns="0" rtlCol="0" anchor="t"/>
+          <a:lstStyle/>
+          <a:p>
+            <a:pPr algn="ctr" indent="0" marL="0">
+              <a:buNone/>
+            </a:pPr>
+            <a:r>
+              <a:rPr lang="en-US" sz="1600" b="1" dirty="0">
+                <a:solidFill>
+                  <a:schemeClr val="tx1"/>
+                </a:solidFill>
+                <a:latin typeface="Cambria" pitchFamily="34" charset="0"/>
+                <a:ea typeface="Cambria" pitchFamily="34" charset="-122"/>
+                <a:cs typeface="Cambria" pitchFamily="34" charset="-120"/>
+              </a:rPr>
+              <a:t>Splenic Macrophage</a:t>
+            </a:r>
+            <a:endParaRPr lang="en-US" sz="1600" dirty="0"/>
+          </a:p>
+          <a:p>
+            <a:pPr algn="ctr" indent="0" marL="0">
+              <a:buNone/>
+            </a:pPr>
+            <a:r>
+              <a:rPr lang="en-US" sz="1200" dirty="0">
+                <a:solidFill>
+                  <a:schemeClr val="accent3"/>
+                </a:solidFill>
+              </a:rPr>
+              <a:t>Red pulp of the spleen</a:t>
+            </a:r>
+            <a:endParaRPr lang="en-US" sz="1600" dirty="0"/>
+          </a:p>
+        </p:txBody>
+      </p:sp>
+      <p:sp>
+        <p:nvSpPr>
+          <p:cNvPr id="170" name="Macrophage summary"/>
+          <p:cNvSpPr txBox="1"/>
+          <p:nvPr/>
+        </p:nvSpPr>
+        <p:spPr>
+          <a:xfrm>
+            <a:off x="8869680" y="4572000"/>
+            <a:ext cx="2468880" cy="914400"/>
+          </a:xfrm>
+          <a:prstGeom prst="rect">
+            <a:avLst/>
+          </a:prstGeom>
+          <a:noFill/>
+          <a:ln/>
+        </p:spPr>
+        <p:txBody>
+          <a:bodyPr wrap="square" lIns="0" tIns="0" rIns="0" bIns="0" rtlCol="0" anchor="t"/>
+          <a:lstStyle/>
+          <a:p>
+            <a:pPr algn="ctr" indent="0" marL="0">
+              <a:spcAft>
+                <a:spcPts val="200"/>
+              </a:spcAft>
+              <a:buNone/>
+            </a:pPr>
+            <a:r>
+              <a:rPr lang="en-US" sz="1400" dirty="0">
+                <a:solidFill>
+                  <a:schemeClr val="tx2"/>
+                </a:solidFill>
+              </a:rPr>
+              <a:t>Eat-me signals recognized</a:t>
+            </a:r>
+            <a:endParaRPr lang="en-US" sz="1400" dirty="0"/>
+          </a:p>
+          <a:p>
+            <a:pPr algn="ctr" indent="0" marL="0">
+              <a:spcAft>
+                <a:spcPts val="200"/>
+              </a:spcAft>
+              <a:buNone/>
+            </a:pPr>
+            <a:r>
+              <a:rPr lang="en-US" sz="1400" dirty="0">
+                <a:solidFill>
+                  <a:schemeClr val="tx2"/>
+                </a:solidFill>
+              </a:rPr>
+              <a:t>Senescent RBC engulfed</a:t>
+            </a:r>
+            <a:endParaRPr lang="en-US" sz="1400" dirty="0"/>
+          </a:p>
+          <a:p>
+            <a:pPr algn="ctr" indent="0" marL="0">
+              <a:spcAft>
+                <a:spcPts val="200"/>
+              </a:spcAft>
+              <a:buNone/>
+            </a:pPr>
+            <a:r>
+              <a:rPr lang="en-US" sz="1400" dirty="0">
+                <a:solidFill>
+                  <a:schemeClr val="tx2"/>
+                </a:solidFill>
+              </a:rPr>
+              <a:t>Digested in phagosome</a:t>
+            </a:r>
+            <a:endParaRPr lang="en-US" sz="1400" dirty="0"/>
+          </a:p>
+        </p:txBody>
+      </p:sp>
+      <p:sp>
+        <p:nvSpPr>
+          <p:cNvPr id="171" name="Shape 169"/>
+          <p:cNvSpPr/>
+          <p:nvPr/>
+        </p:nvSpPr>
+        <p:spPr>
+          <a:xfrm>
+            <a:off x="621792" y="5824728"/>
+            <a:ext cx="36576" cy="146304"/>
+          </a:xfrm>
+          <a:prstGeom prst="rect">
+            <a:avLst/>
+          </a:prstGeom>
+          <a:solidFill>
+            <a:srgbClr val="1E5E3A"/>
+          </a:solidFill>
+          <a:ln/>
+        </p:spPr>
+      </p:sp>
+      <p:sp>
+        <p:nvSpPr>
+          <p:cNvPr id="172" name="Shape 170"/>
+          <p:cNvSpPr/>
+          <p:nvPr/>
+        </p:nvSpPr>
+        <p:spPr>
+          <a:xfrm>
+            <a:off x="571500" y="5705856"/>
+            <a:ext cx="137160" cy="137160"/>
+          </a:xfrm>
+          <a:prstGeom prst="ellipse">
+            <a:avLst/>
+          </a:prstGeom>
+          <a:solidFill>
+            <a:srgbClr val="2E8B57"/>
+          </a:solidFill>
+          <a:ln w="9525">
+            <a:solidFill>
+              <a:srgbClr val="1E5E3A"/>
+            </a:solidFill>
+            <a:prstDash val="solid"/>
+          </a:ln>
+        </p:spPr>
+      </p:sp>
+      <p:sp>
+        <p:nvSpPr>
+          <p:cNvPr id="173" name="Text 171"/>
           <p:cNvSpPr txBox="1"/>
           <p:nvPr/>
         </p:nvSpPr>
@@ -5536,7 +8763,7 @@
       </p:sp>
       <p:sp>
         <p:nvSpPr>
-          <p:cNvPr id="136" name="Shape 134"/>
+          <p:cNvPr id="174" name="Shape 172"/>
           <p:cNvSpPr/>
           <p:nvPr/>
         </p:nvSpPr>
@@ -5561,7 +8788,7 @@
       </p:sp>
       <p:sp>
         <p:nvSpPr>
-          <p:cNvPr id="137" name="Text 135"/>
+          <p:cNvPr id="175" name="Text 173"/>
           <p:cNvSpPr txBox="1"/>
           <p:nvPr/>
         </p:nvSpPr>
@@ -5597,7 +8824,7 @@
       </p:sp>
       <p:sp>
         <p:nvSpPr>
-          <p:cNvPr id="138" name="Shape 136"/>
+          <p:cNvPr id="176" name="Shape 174"/>
           <p:cNvSpPr/>
           <p:nvPr/>
         </p:nvSpPr>
@@ -5617,7 +8844,7 @@
       </p:sp>
       <p:sp>
         <p:nvSpPr>
-          <p:cNvPr id="139" name="Shape 137"/>
+          <p:cNvPr id="177" name="Shape 175"/>
           <p:cNvSpPr/>
           <p:nvPr/>
         </p:nvSpPr>
@@ -5637,7 +8864,7 @@
       </p:sp>
       <p:sp>
         <p:nvSpPr>
-          <p:cNvPr id="140" name="Text 138"/>
+          <p:cNvPr id="178" name="Text 176"/>
           <p:cNvSpPr txBox="1"/>
           <p:nvPr/>
         </p:nvSpPr>
@@ -5673,14 +8900,39 @@
       </p:sp>
       <p:sp>
         <p:nvSpPr>
-          <p:cNvPr id="141" name="Text 139"/>
+          <p:cNvPr id="179" name="Shape 177"/>
+          <p:cNvSpPr/>
+          <p:nvPr/>
+        </p:nvSpPr>
+        <p:spPr>
+          <a:xfrm>
+            <a:off x="8869680" y="5733288"/>
+            <a:ext cx="237744" cy="219456"/>
+          </a:xfrm>
+          <a:prstGeom prst="ellipse">
+            <a:avLst/>
+          </a:prstGeom>
+          <a:solidFill>
+            <a:srgbClr val="D7C7E3"/>
+          </a:solidFill>
+          <a:ln w="12700">
+            <a:solidFill>
+              <a:srgbClr val="7A5C8E"/>
+            </a:solidFill>
+            <a:prstDash val="solid"/>
+          </a:ln>
+        </p:spPr>
+      </p:sp>
+      <p:sp>
+        <p:nvSpPr>
+          <p:cNvPr id="180" name="Text 178"/>
           <p:cNvSpPr txBox="1"/>
           <p:nvPr/>
         </p:nvSpPr>
         <p:spPr>
           <a:xfrm>
-            <a:off x="8778240" y="5705856"/>
-            <a:ext cx="2862072" cy="292608"/>
+            <a:off x="9198864" y="5705856"/>
+            <a:ext cx="2441448" cy="292608"/>
           </a:xfrm>
           <a:prstGeom prst="rect">
             <a:avLst/>
@@ -5692,16 +8944,16 @@
           <a:bodyPr wrap="square" lIns="0" tIns="0" rIns="0" bIns="0" rtlCol="0" anchor="ctr"/>
           <a:lstStyle/>
           <a:p>
-            <a:pPr algn="r" indent="0" marL="0">
+            <a:pPr indent="0" marL="0">
               <a:buNone/>
             </a:pPr>
             <a:r>
-              <a:rPr lang="en-US" sz="1300" i="1" dirty="0">
+              <a:rPr lang="en-US" sz="1300" dirty="0">
                 <a:solidFill>
-                  <a:schemeClr val="accent3"/>
+                  <a:schemeClr val="tx1"/>
                 </a:solidFill>
               </a:rPr>
-              <a:t>Direction of aging in circulation →</a:t>
+              <a:t>Macrophage (phagocytosis)</a:t>
             </a:r>
             <a:endParaRPr lang="en-US" sz="1300" dirty="0"/>
           </a:p>
